--- a/K.pptx
+++ b/K.pptx
@@ -2,7 +2,7 @@
 <file path=ppt/presentation.xml><?xml version="1.0" encoding="utf-8"?>
 <p:presentation xmlns:a="http://schemas.openxmlformats.org/drawingml/2006/main" xmlns:r="http://schemas.openxmlformats.org/officeDocument/2006/relationships" xmlns:p="http://schemas.openxmlformats.org/presentationml/2006/main" saveSubsetFonts="1">
   <p:sldMasterIdLst>
-    <p:sldMasterId id="2147483648" r:id="rId1"/>
+    <p:sldMasterId id="2147483708" r:id="rId1"/>
   </p:sldMasterIdLst>
   <p:sldIdLst>
     <p:sldId id="256" r:id="rId2"/>
@@ -17,7 +17,7 @@
     <a:defPPr>
       <a:defRPr lang="en-US"/>
     </a:defPPr>
-    <a:lvl1pPr marL="0" algn="l" defTabSz="914400" rtl="0" eaLnBrk="1" latinLnBrk="0" hangingPunct="1">
+    <a:lvl1pPr marL="0" algn="l" defTabSz="457200" rtl="0" eaLnBrk="1" latinLnBrk="0" hangingPunct="1">
       <a:defRPr sz="1800" kern="1200">
         <a:solidFill>
           <a:schemeClr val="tx1"/>
@@ -27,7 +27,7 @@
         <a:cs typeface="+mn-cs"/>
       </a:defRPr>
     </a:lvl1pPr>
-    <a:lvl2pPr marL="457200" algn="l" defTabSz="914400" rtl="0" eaLnBrk="1" latinLnBrk="0" hangingPunct="1">
+    <a:lvl2pPr marL="457200" algn="l" defTabSz="457200" rtl="0" eaLnBrk="1" latinLnBrk="0" hangingPunct="1">
       <a:defRPr sz="1800" kern="1200">
         <a:solidFill>
           <a:schemeClr val="tx1"/>
@@ -37,7 +37,7 @@
         <a:cs typeface="+mn-cs"/>
       </a:defRPr>
     </a:lvl2pPr>
-    <a:lvl3pPr marL="914400" algn="l" defTabSz="914400" rtl="0" eaLnBrk="1" latinLnBrk="0" hangingPunct="1">
+    <a:lvl3pPr marL="914400" algn="l" defTabSz="457200" rtl="0" eaLnBrk="1" latinLnBrk="0" hangingPunct="1">
       <a:defRPr sz="1800" kern="1200">
         <a:solidFill>
           <a:schemeClr val="tx1"/>
@@ -47,7 +47,7 @@
         <a:cs typeface="+mn-cs"/>
       </a:defRPr>
     </a:lvl3pPr>
-    <a:lvl4pPr marL="1371600" algn="l" defTabSz="914400" rtl="0" eaLnBrk="1" latinLnBrk="0" hangingPunct="1">
+    <a:lvl4pPr marL="1371600" algn="l" defTabSz="457200" rtl="0" eaLnBrk="1" latinLnBrk="0" hangingPunct="1">
       <a:defRPr sz="1800" kern="1200">
         <a:solidFill>
           <a:schemeClr val="tx1"/>
@@ -57,7 +57,7 @@
         <a:cs typeface="+mn-cs"/>
       </a:defRPr>
     </a:lvl4pPr>
-    <a:lvl5pPr marL="1828800" algn="l" defTabSz="914400" rtl="0" eaLnBrk="1" latinLnBrk="0" hangingPunct="1">
+    <a:lvl5pPr marL="1828800" algn="l" defTabSz="457200" rtl="0" eaLnBrk="1" latinLnBrk="0" hangingPunct="1">
       <a:defRPr sz="1800" kern="1200">
         <a:solidFill>
           <a:schemeClr val="tx1"/>
@@ -67,7 +67,7 @@
         <a:cs typeface="+mn-cs"/>
       </a:defRPr>
     </a:lvl5pPr>
-    <a:lvl6pPr marL="2286000" algn="l" defTabSz="914400" rtl="0" eaLnBrk="1" latinLnBrk="0" hangingPunct="1">
+    <a:lvl6pPr marL="2286000" algn="l" defTabSz="457200" rtl="0" eaLnBrk="1" latinLnBrk="0" hangingPunct="1">
       <a:defRPr sz="1800" kern="1200">
         <a:solidFill>
           <a:schemeClr val="tx1"/>
@@ -77,7 +77,7 @@
         <a:cs typeface="+mn-cs"/>
       </a:defRPr>
     </a:lvl6pPr>
-    <a:lvl7pPr marL="2743200" algn="l" defTabSz="914400" rtl="0" eaLnBrk="1" latinLnBrk="0" hangingPunct="1">
+    <a:lvl7pPr marL="2743200" algn="l" defTabSz="457200" rtl="0" eaLnBrk="1" latinLnBrk="0" hangingPunct="1">
       <a:defRPr sz="1800" kern="1200">
         <a:solidFill>
           <a:schemeClr val="tx1"/>
@@ -87,7 +87,7 @@
         <a:cs typeface="+mn-cs"/>
       </a:defRPr>
     </a:lvl7pPr>
-    <a:lvl8pPr marL="3200400" algn="l" defTabSz="914400" rtl="0" eaLnBrk="1" latinLnBrk="0" hangingPunct="1">
+    <a:lvl8pPr marL="3200400" algn="l" defTabSz="457200" rtl="0" eaLnBrk="1" latinLnBrk="0" hangingPunct="1">
       <a:defRPr sz="1800" kern="1200">
         <a:solidFill>
           <a:schemeClr val="tx1"/>
@@ -97,7 +97,7 @@
         <a:cs typeface="+mn-cs"/>
       </a:defRPr>
     </a:lvl8pPr>
-    <a:lvl9pPr marL="3657600" algn="l" defTabSz="914400" rtl="0" eaLnBrk="1" latinLnBrk="0" hangingPunct="1">
+    <a:lvl9pPr marL="3657600" algn="l" defTabSz="457200" rtl="0" eaLnBrk="1" latinLnBrk="0" hangingPunct="1">
       <a:defRPr sz="1800" kern="1200">
         <a:solidFill>
           <a:schemeClr val="tx1"/>
@@ -108,6 +108,11 @@
       </a:defRPr>
     </a:lvl9pPr>
   </p:defaultTextStyle>
+  <p:extLst>
+    <p:ext uri="{EFAFB233-063F-42B5-8137-9DF3F51BA10A}">
+      <p15:sldGuideLst xmlns:p15="http://schemas.microsoft.com/office/powerpoint/2012/main"/>
+    </p:ext>
+  </p:extLst>
 </p:presentation>
 </file>
 
@@ -140,15 +145,15 @@
         </p:nvSpPr>
         <p:spPr>
           <a:xfrm>
-            <a:off x="1524000" y="1122363"/>
-            <a:ext cx="9144000" cy="2387600"/>
+            <a:off x="1154955" y="1447800"/>
+            <a:ext cx="8825658" cy="3329581"/>
           </a:xfrm>
         </p:spPr>
         <p:txBody>
           <a:bodyPr anchor="b"/>
           <a:lstStyle>
-            <a:lvl1pPr algn="ctr">
-              <a:defRPr sz="6000"/>
+            <a:lvl1pPr>
+              <a:defRPr sz="7200"/>
             </a:lvl1pPr>
           </a:lstStyle>
           <a:p>
@@ -156,7 +161,7 @@
               <a:rPr lang="en-US" smtClean="0"/>
               <a:t>Click to edit Master title style</a:t>
             </a:r>
-            <a:endParaRPr lang="en-ZA"/>
+            <a:endParaRPr lang="en-US" dirty="0"/>
           </a:p>
         </p:txBody>
       </p:sp>
@@ -172,48 +177,100 @@
         </p:nvSpPr>
         <p:spPr>
           <a:xfrm>
-            <a:off x="1524000" y="3602038"/>
-            <a:ext cx="9144000" cy="1655762"/>
+            <a:off x="1154955" y="4777380"/>
+            <a:ext cx="8825658" cy="861420"/>
           </a:xfrm>
         </p:spPr>
         <p:txBody>
-          <a:bodyPr/>
+          <a:bodyPr anchor="t"/>
           <a:lstStyle>
-            <a:lvl1pPr marL="0" indent="0" algn="ctr">
-              <a:buNone/>
-              <a:defRPr sz="2400"/>
+            <a:lvl1pPr marL="0" indent="0" algn="l">
+              <a:buNone/>
+              <a:defRPr cap="all">
+                <a:solidFill>
+                  <a:schemeClr val="accent1"/>
+                </a:solidFill>
+              </a:defRPr>
             </a:lvl1pPr>
             <a:lvl2pPr marL="457200" indent="0" algn="ctr">
               <a:buNone/>
-              <a:defRPr sz="2000"/>
+              <a:defRPr>
+                <a:solidFill>
+                  <a:schemeClr val="tx1">
+                    <a:tint val="75000"/>
+                  </a:schemeClr>
+                </a:solidFill>
+              </a:defRPr>
             </a:lvl2pPr>
             <a:lvl3pPr marL="914400" indent="0" algn="ctr">
               <a:buNone/>
-              <a:defRPr sz="1800"/>
+              <a:defRPr>
+                <a:solidFill>
+                  <a:schemeClr val="tx1">
+                    <a:tint val="75000"/>
+                  </a:schemeClr>
+                </a:solidFill>
+              </a:defRPr>
             </a:lvl3pPr>
             <a:lvl4pPr marL="1371600" indent="0" algn="ctr">
               <a:buNone/>
-              <a:defRPr sz="1600"/>
+              <a:defRPr>
+                <a:solidFill>
+                  <a:schemeClr val="tx1">
+                    <a:tint val="75000"/>
+                  </a:schemeClr>
+                </a:solidFill>
+              </a:defRPr>
             </a:lvl4pPr>
             <a:lvl5pPr marL="1828800" indent="0" algn="ctr">
               <a:buNone/>
-              <a:defRPr sz="1600"/>
+              <a:defRPr>
+                <a:solidFill>
+                  <a:schemeClr val="tx1">
+                    <a:tint val="75000"/>
+                  </a:schemeClr>
+                </a:solidFill>
+              </a:defRPr>
             </a:lvl5pPr>
             <a:lvl6pPr marL="2286000" indent="0" algn="ctr">
               <a:buNone/>
-              <a:defRPr sz="1600"/>
+              <a:defRPr>
+                <a:solidFill>
+                  <a:schemeClr val="tx1">
+                    <a:tint val="75000"/>
+                  </a:schemeClr>
+                </a:solidFill>
+              </a:defRPr>
             </a:lvl6pPr>
             <a:lvl7pPr marL="2743200" indent="0" algn="ctr">
               <a:buNone/>
-              <a:defRPr sz="1600"/>
+              <a:defRPr>
+                <a:solidFill>
+                  <a:schemeClr val="tx1">
+                    <a:tint val="75000"/>
+                  </a:schemeClr>
+                </a:solidFill>
+              </a:defRPr>
             </a:lvl7pPr>
             <a:lvl8pPr marL="3200400" indent="0" algn="ctr">
               <a:buNone/>
-              <a:defRPr sz="1600"/>
+              <a:defRPr>
+                <a:solidFill>
+                  <a:schemeClr val="tx1">
+                    <a:tint val="75000"/>
+                  </a:schemeClr>
+                </a:solidFill>
+              </a:defRPr>
             </a:lvl8pPr>
             <a:lvl9pPr marL="3657600" indent="0" algn="ctr">
               <a:buNone/>
-              <a:defRPr sz="1600"/>
+              <a:defRPr>
+                <a:solidFill>
+                  <a:schemeClr val="tx1">
+                    <a:tint val="75000"/>
+                  </a:schemeClr>
+                </a:solidFill>
+              </a:defRPr>
             </a:lvl9pPr>
           </a:lstStyle>
           <a:p>
@@ -221,7 +278,7 @@
               <a:rPr lang="en-US" smtClean="0"/>
               <a:t>Click to edit Master subtitle style</a:t>
             </a:r>
-            <a:endParaRPr lang="en-ZA"/>
+            <a:endParaRPr lang="en-US" dirty="0"/>
           </a:p>
         </p:txBody>
       </p:sp>
@@ -242,7 +299,7 @@
           <a:p>
             <a:fld id="{F475391B-CAB0-48AB-BB3A-E843B1163B6B}" type="datetimeFigureOut">
               <a:rPr lang="en-ZA" smtClean="0"/>
-              <a:t>2026/09/17</a:t>
+              <a:t>2026/09/18</a:t>
             </a:fld>
             <a:endParaRPr lang="en-ZA"/>
           </a:p>
@@ -293,7 +350,7 @@
     </p:spTree>
     <p:extLst>
       <p:ext uri="{BB962C8B-B14F-4D97-AF65-F5344CB8AC3E}">
-        <p14:creationId xmlns:p14="http://schemas.microsoft.com/office/powerpoint/2010/main" val="2795538142"/>
+        <p14:creationId xmlns:p14="http://schemas.microsoft.com/office/powerpoint/2010/main" val="1551952901"/>
       </p:ext>
     </p:extLst>
   </p:cSld>
@@ -304,6 +361,2532 @@
 </file>
 
 <file path=ppt/slideLayouts/slideLayout10.xml><?xml version="1.0" encoding="utf-8"?>
+<p:sldLayout xmlns:a="http://schemas.openxmlformats.org/drawingml/2006/main" xmlns:r="http://schemas.openxmlformats.org/officeDocument/2006/relationships" xmlns:p="http://schemas.openxmlformats.org/presentationml/2006/main" preserve="1">
+  <p:cSld name="Panoramic Picture with Caption">
+    <p:spTree>
+      <p:nvGrpSpPr>
+        <p:cNvPr id="1" name=""/>
+        <p:cNvGrpSpPr/>
+        <p:nvPr/>
+      </p:nvGrpSpPr>
+      <p:grpSpPr>
+        <a:xfrm>
+          <a:off x="0" y="0"/>
+          <a:ext cx="0" cy="0"/>
+          <a:chOff x="0" y="0"/>
+          <a:chExt cx="0" cy="0"/>
+        </a:xfrm>
+      </p:grpSpPr>
+      <p:sp>
+        <p:nvSpPr>
+          <p:cNvPr id="2" name="Title 1"/>
+          <p:cNvSpPr>
+            <a:spLocks noGrp="1"/>
+          </p:cNvSpPr>
+          <p:nvPr>
+            <p:ph type="title"/>
+          </p:nvPr>
+        </p:nvSpPr>
+        <p:spPr>
+          <a:xfrm>
+            <a:off x="1154956" y="4800587"/>
+            <a:ext cx="8825657" cy="566738"/>
+          </a:xfrm>
+        </p:spPr>
+        <p:txBody>
+          <a:bodyPr anchor="b">
+            <a:normAutofit/>
+          </a:bodyPr>
+          <a:lstStyle>
+            <a:lvl1pPr algn="l">
+              <a:defRPr sz="2400" b="0"/>
+            </a:lvl1pPr>
+          </a:lstStyle>
+          <a:p>
+            <a:r>
+              <a:rPr lang="en-US" smtClean="0"/>
+              <a:t>Click to edit Master title style</a:t>
+            </a:r>
+            <a:endParaRPr lang="en-US" dirty="0"/>
+          </a:p>
+        </p:txBody>
+      </p:sp>
+      <p:sp>
+        <p:nvSpPr>
+          <p:cNvPr id="3" name="Picture Placeholder 2"/>
+          <p:cNvSpPr>
+            <a:spLocks noGrp="1" noChangeAspect="1"/>
+          </p:cNvSpPr>
+          <p:nvPr>
+            <p:ph type="pic" idx="1"/>
+          </p:nvPr>
+        </p:nvSpPr>
+        <p:spPr>
+          <a:xfrm>
+            <a:off x="1154955" y="685800"/>
+            <a:ext cx="8825658" cy="3640666"/>
+          </a:xfrm>
+          <a:prstGeom prst="roundRect">
+            <a:avLst>
+              <a:gd name="adj" fmla="val 1858"/>
+            </a:avLst>
+          </a:prstGeom>
+          <a:effectLst>
+            <a:outerShdw blurRad="50800" dist="50800" dir="5400000" algn="tl" rotWithShape="0">
+              <a:srgbClr val="000000">
+                <a:alpha val="43000"/>
+              </a:srgbClr>
+            </a:outerShdw>
+          </a:effectLst>
+        </p:spPr>
+        <p:txBody>
+          <a:bodyPr anchor="t">
+            <a:normAutofit/>
+          </a:bodyPr>
+          <a:lstStyle>
+            <a:lvl1pPr marL="0" indent="0" algn="ctr">
+              <a:buNone/>
+              <a:defRPr sz="1600"/>
+            </a:lvl1pPr>
+            <a:lvl2pPr marL="457200" indent="0">
+              <a:buNone/>
+              <a:defRPr sz="1600"/>
+            </a:lvl2pPr>
+            <a:lvl3pPr marL="914400" indent="0">
+              <a:buNone/>
+              <a:defRPr sz="1600"/>
+            </a:lvl3pPr>
+            <a:lvl4pPr marL="1371600" indent="0">
+              <a:buNone/>
+              <a:defRPr sz="1600"/>
+            </a:lvl4pPr>
+            <a:lvl5pPr marL="1828800" indent="0">
+              <a:buNone/>
+              <a:defRPr sz="1600"/>
+            </a:lvl5pPr>
+            <a:lvl6pPr marL="2286000" indent="0">
+              <a:buNone/>
+              <a:defRPr sz="1600"/>
+            </a:lvl6pPr>
+            <a:lvl7pPr marL="2743200" indent="0">
+              <a:buNone/>
+              <a:defRPr sz="1600"/>
+            </a:lvl7pPr>
+            <a:lvl8pPr marL="3200400" indent="0">
+              <a:buNone/>
+              <a:defRPr sz="1600"/>
+            </a:lvl8pPr>
+            <a:lvl9pPr marL="3657600" indent="0">
+              <a:buNone/>
+              <a:defRPr sz="1600"/>
+            </a:lvl9pPr>
+          </a:lstStyle>
+          <a:p>
+            <a:r>
+              <a:rPr lang="en-US" smtClean="0"/>
+              <a:t>Click icon to add picture</a:t>
+            </a:r>
+            <a:endParaRPr lang="en-US" dirty="0"/>
+          </a:p>
+        </p:txBody>
+      </p:sp>
+      <p:sp>
+        <p:nvSpPr>
+          <p:cNvPr id="4" name="Text Placeholder 3"/>
+          <p:cNvSpPr>
+            <a:spLocks noGrp="1"/>
+          </p:cNvSpPr>
+          <p:nvPr>
+            <p:ph type="body" sz="half" idx="2"/>
+          </p:nvPr>
+        </p:nvSpPr>
+        <p:spPr>
+          <a:xfrm>
+            <a:off x="1154956" y="5367325"/>
+            <a:ext cx="8825656" cy="493712"/>
+          </a:xfrm>
+        </p:spPr>
+        <p:txBody>
+          <a:bodyPr>
+            <a:normAutofit/>
+          </a:bodyPr>
+          <a:lstStyle>
+            <a:lvl1pPr marL="0" indent="0">
+              <a:buNone/>
+              <a:defRPr sz="1200"/>
+            </a:lvl1pPr>
+            <a:lvl2pPr marL="457200" indent="0">
+              <a:buNone/>
+              <a:defRPr sz="1200"/>
+            </a:lvl2pPr>
+            <a:lvl3pPr marL="914400" indent="0">
+              <a:buNone/>
+              <a:defRPr sz="1000"/>
+            </a:lvl3pPr>
+            <a:lvl4pPr marL="1371600" indent="0">
+              <a:buNone/>
+              <a:defRPr sz="900"/>
+            </a:lvl4pPr>
+            <a:lvl5pPr marL="1828800" indent="0">
+              <a:buNone/>
+              <a:defRPr sz="900"/>
+            </a:lvl5pPr>
+            <a:lvl6pPr marL="2286000" indent="0">
+              <a:buNone/>
+              <a:defRPr sz="900"/>
+            </a:lvl6pPr>
+            <a:lvl7pPr marL="2743200" indent="0">
+              <a:buNone/>
+              <a:defRPr sz="900"/>
+            </a:lvl7pPr>
+            <a:lvl8pPr marL="3200400" indent="0">
+              <a:buNone/>
+              <a:defRPr sz="900"/>
+            </a:lvl8pPr>
+            <a:lvl9pPr marL="3657600" indent="0">
+              <a:buNone/>
+              <a:defRPr sz="900"/>
+            </a:lvl9pPr>
+          </a:lstStyle>
+          <a:p>
+            <a:pPr lvl="0"/>
+            <a:r>
+              <a:rPr lang="en-US" smtClean="0"/>
+              <a:t>Edit Master text styles</a:t>
+            </a:r>
+          </a:p>
+        </p:txBody>
+      </p:sp>
+      <p:sp>
+        <p:nvSpPr>
+          <p:cNvPr id="5" name="Date Placeholder 4"/>
+          <p:cNvSpPr>
+            <a:spLocks noGrp="1"/>
+          </p:cNvSpPr>
+          <p:nvPr>
+            <p:ph type="dt" sz="half" idx="10"/>
+          </p:nvPr>
+        </p:nvSpPr>
+        <p:spPr/>
+        <p:txBody>
+          <a:bodyPr/>
+          <a:lstStyle/>
+          <a:p>
+            <a:fld id="{F475391B-CAB0-48AB-BB3A-E843B1163B6B}" type="datetimeFigureOut">
+              <a:rPr lang="en-ZA" smtClean="0"/>
+              <a:t>2026/09/18</a:t>
+            </a:fld>
+            <a:endParaRPr lang="en-ZA"/>
+          </a:p>
+        </p:txBody>
+      </p:sp>
+      <p:sp>
+        <p:nvSpPr>
+          <p:cNvPr id="6" name="Footer Placeholder 5"/>
+          <p:cNvSpPr>
+            <a:spLocks noGrp="1"/>
+          </p:cNvSpPr>
+          <p:nvPr>
+            <p:ph type="ftr" sz="quarter" idx="11"/>
+          </p:nvPr>
+        </p:nvSpPr>
+        <p:spPr/>
+        <p:txBody>
+          <a:bodyPr/>
+          <a:lstStyle/>
+          <a:p>
+            <a:endParaRPr lang="en-ZA"/>
+          </a:p>
+        </p:txBody>
+      </p:sp>
+      <p:sp>
+        <p:nvSpPr>
+          <p:cNvPr id="7" name="Slide Number Placeholder 6"/>
+          <p:cNvSpPr>
+            <a:spLocks noGrp="1"/>
+          </p:cNvSpPr>
+          <p:nvPr>
+            <p:ph type="sldNum" sz="quarter" idx="12"/>
+          </p:nvPr>
+        </p:nvSpPr>
+        <p:spPr/>
+        <p:txBody>
+          <a:bodyPr/>
+          <a:lstStyle/>
+          <a:p>
+            <a:fld id="{4D7B34C8-07E8-487E-933E-E1E99116B26C}" type="slidenum">
+              <a:rPr lang="en-ZA" smtClean="0"/>
+              <a:t>‹#›</a:t>
+            </a:fld>
+            <a:endParaRPr lang="en-ZA"/>
+          </a:p>
+        </p:txBody>
+      </p:sp>
+    </p:spTree>
+    <p:extLst>
+      <p:ext uri="{BB962C8B-B14F-4D97-AF65-F5344CB8AC3E}">
+        <p14:creationId xmlns:p14="http://schemas.microsoft.com/office/powerpoint/2010/main" val="2640999829"/>
+      </p:ext>
+    </p:extLst>
+  </p:cSld>
+  <p:clrMapOvr>
+    <a:masterClrMapping/>
+  </p:clrMapOvr>
+</p:sldLayout>
+</file>
+
+<file path=ppt/slideLayouts/slideLayout11.xml><?xml version="1.0" encoding="utf-8"?>
+<p:sldLayout xmlns:a="http://schemas.openxmlformats.org/drawingml/2006/main" xmlns:r="http://schemas.openxmlformats.org/officeDocument/2006/relationships" xmlns:p="http://schemas.openxmlformats.org/presentationml/2006/main" preserve="1">
+  <p:cSld name="Title and Caption">
+    <p:spTree>
+      <p:nvGrpSpPr>
+        <p:cNvPr id="1" name=""/>
+        <p:cNvGrpSpPr/>
+        <p:nvPr/>
+      </p:nvGrpSpPr>
+      <p:grpSpPr>
+        <a:xfrm>
+          <a:off x="0" y="0"/>
+          <a:ext cx="0" cy="0"/>
+          <a:chOff x="0" y="0"/>
+          <a:chExt cx="0" cy="0"/>
+        </a:xfrm>
+      </p:grpSpPr>
+      <p:sp>
+        <p:nvSpPr>
+          <p:cNvPr id="2" name="Title 1"/>
+          <p:cNvSpPr>
+            <a:spLocks noGrp="1"/>
+          </p:cNvSpPr>
+          <p:nvPr>
+            <p:ph type="title"/>
+          </p:nvPr>
+        </p:nvSpPr>
+        <p:spPr>
+          <a:xfrm>
+            <a:off x="1154954" y="1447800"/>
+            <a:ext cx="8825659" cy="1981200"/>
+          </a:xfrm>
+        </p:spPr>
+        <p:txBody>
+          <a:bodyPr/>
+          <a:lstStyle>
+            <a:lvl1pPr>
+              <a:defRPr sz="4800"/>
+            </a:lvl1pPr>
+          </a:lstStyle>
+          <a:p>
+            <a:r>
+              <a:rPr lang="en-US" smtClean="0"/>
+              <a:t>Click to edit Master title style</a:t>
+            </a:r>
+            <a:endParaRPr lang="en-US" dirty="0"/>
+          </a:p>
+        </p:txBody>
+      </p:sp>
+      <p:sp>
+        <p:nvSpPr>
+          <p:cNvPr id="8" name="Text Placeholder 3"/>
+          <p:cNvSpPr>
+            <a:spLocks noGrp="1"/>
+          </p:cNvSpPr>
+          <p:nvPr>
+            <p:ph type="body" sz="half" idx="2"/>
+          </p:nvPr>
+        </p:nvSpPr>
+        <p:spPr>
+          <a:xfrm>
+            <a:off x="1154954" y="3657600"/>
+            <a:ext cx="8825659" cy="2362200"/>
+          </a:xfrm>
+        </p:spPr>
+        <p:txBody>
+          <a:bodyPr anchor="ctr">
+            <a:normAutofit/>
+          </a:bodyPr>
+          <a:lstStyle>
+            <a:lvl1pPr marL="0" indent="0">
+              <a:buNone/>
+              <a:defRPr sz="1800"/>
+            </a:lvl1pPr>
+            <a:lvl2pPr marL="457200" indent="0">
+              <a:buNone/>
+              <a:defRPr sz="1200"/>
+            </a:lvl2pPr>
+            <a:lvl3pPr marL="914400" indent="0">
+              <a:buNone/>
+              <a:defRPr sz="1000"/>
+            </a:lvl3pPr>
+            <a:lvl4pPr marL="1371600" indent="0">
+              <a:buNone/>
+              <a:defRPr sz="900"/>
+            </a:lvl4pPr>
+            <a:lvl5pPr marL="1828800" indent="0">
+              <a:buNone/>
+              <a:defRPr sz="900"/>
+            </a:lvl5pPr>
+            <a:lvl6pPr marL="2286000" indent="0">
+              <a:buNone/>
+              <a:defRPr sz="900"/>
+            </a:lvl6pPr>
+            <a:lvl7pPr marL="2743200" indent="0">
+              <a:buNone/>
+              <a:defRPr sz="900"/>
+            </a:lvl7pPr>
+            <a:lvl8pPr marL="3200400" indent="0">
+              <a:buNone/>
+              <a:defRPr sz="900"/>
+            </a:lvl8pPr>
+            <a:lvl9pPr marL="3657600" indent="0">
+              <a:buNone/>
+              <a:defRPr sz="900"/>
+            </a:lvl9pPr>
+          </a:lstStyle>
+          <a:p>
+            <a:pPr lvl="0"/>
+            <a:r>
+              <a:rPr lang="en-US" smtClean="0"/>
+              <a:t>Edit Master text styles</a:t>
+            </a:r>
+          </a:p>
+        </p:txBody>
+      </p:sp>
+      <p:sp>
+        <p:nvSpPr>
+          <p:cNvPr id="4" name="Date Placeholder 3"/>
+          <p:cNvSpPr>
+            <a:spLocks noGrp="1"/>
+          </p:cNvSpPr>
+          <p:nvPr>
+            <p:ph type="dt" sz="half" idx="10"/>
+          </p:nvPr>
+        </p:nvSpPr>
+        <p:spPr/>
+        <p:txBody>
+          <a:bodyPr/>
+          <a:lstStyle/>
+          <a:p>
+            <a:fld id="{F475391B-CAB0-48AB-BB3A-E843B1163B6B}" type="datetimeFigureOut">
+              <a:rPr lang="en-ZA" smtClean="0"/>
+              <a:t>2026/09/18</a:t>
+            </a:fld>
+            <a:endParaRPr lang="en-ZA"/>
+          </a:p>
+        </p:txBody>
+      </p:sp>
+      <p:sp>
+        <p:nvSpPr>
+          <p:cNvPr id="5" name="Footer Placeholder 4"/>
+          <p:cNvSpPr>
+            <a:spLocks noGrp="1"/>
+          </p:cNvSpPr>
+          <p:nvPr>
+            <p:ph type="ftr" sz="quarter" idx="11"/>
+          </p:nvPr>
+        </p:nvSpPr>
+        <p:spPr/>
+        <p:txBody>
+          <a:bodyPr/>
+          <a:lstStyle/>
+          <a:p>
+            <a:endParaRPr lang="en-ZA"/>
+          </a:p>
+        </p:txBody>
+      </p:sp>
+      <p:sp>
+        <p:nvSpPr>
+          <p:cNvPr id="6" name="Slide Number Placeholder 5"/>
+          <p:cNvSpPr>
+            <a:spLocks noGrp="1"/>
+          </p:cNvSpPr>
+          <p:nvPr>
+            <p:ph type="sldNum" sz="quarter" idx="12"/>
+          </p:nvPr>
+        </p:nvSpPr>
+        <p:spPr/>
+        <p:txBody>
+          <a:bodyPr/>
+          <a:lstStyle/>
+          <a:p>
+            <a:fld id="{4D7B34C8-07E8-487E-933E-E1E99116B26C}" type="slidenum">
+              <a:rPr lang="en-ZA" smtClean="0"/>
+              <a:t>‹#›</a:t>
+            </a:fld>
+            <a:endParaRPr lang="en-ZA"/>
+          </a:p>
+        </p:txBody>
+      </p:sp>
+    </p:spTree>
+    <p:extLst>
+      <p:ext uri="{BB962C8B-B14F-4D97-AF65-F5344CB8AC3E}">
+        <p14:creationId xmlns:p14="http://schemas.microsoft.com/office/powerpoint/2010/main" val="2573870309"/>
+      </p:ext>
+    </p:extLst>
+  </p:cSld>
+  <p:clrMapOvr>
+    <a:masterClrMapping/>
+  </p:clrMapOvr>
+</p:sldLayout>
+</file>
+
+<file path=ppt/slideLayouts/slideLayout12.xml><?xml version="1.0" encoding="utf-8"?>
+<p:sldLayout xmlns:a="http://schemas.openxmlformats.org/drawingml/2006/main" xmlns:r="http://schemas.openxmlformats.org/officeDocument/2006/relationships" xmlns:p="http://schemas.openxmlformats.org/presentationml/2006/main" preserve="1">
+  <p:cSld name="Quote with Caption">
+    <p:spTree>
+      <p:nvGrpSpPr>
+        <p:cNvPr id="1" name=""/>
+        <p:cNvGrpSpPr/>
+        <p:nvPr/>
+      </p:nvGrpSpPr>
+      <p:grpSpPr>
+        <a:xfrm>
+          <a:off x="0" y="0"/>
+          <a:ext cx="0" cy="0"/>
+          <a:chOff x="0" y="0"/>
+          <a:chExt cx="0" cy="0"/>
+        </a:xfrm>
+      </p:grpSpPr>
+      <p:sp>
+        <p:nvSpPr>
+          <p:cNvPr id="2" name="Title 1"/>
+          <p:cNvSpPr>
+            <a:spLocks noGrp="1"/>
+          </p:cNvSpPr>
+          <p:nvPr>
+            <p:ph type="title"/>
+          </p:nvPr>
+        </p:nvSpPr>
+        <p:spPr>
+          <a:xfrm>
+            <a:off x="1574801" y="1447800"/>
+            <a:ext cx="7999315" cy="2323374"/>
+          </a:xfrm>
+        </p:spPr>
+        <p:txBody>
+          <a:bodyPr/>
+          <a:lstStyle>
+            <a:lvl1pPr>
+              <a:defRPr sz="4800"/>
+            </a:lvl1pPr>
+          </a:lstStyle>
+          <a:p>
+            <a:r>
+              <a:rPr lang="en-US" smtClean="0"/>
+              <a:t>Click to edit Master title style</a:t>
+            </a:r>
+            <a:endParaRPr lang="en-US" dirty="0"/>
+          </a:p>
+        </p:txBody>
+      </p:sp>
+      <p:sp>
+        <p:nvSpPr>
+          <p:cNvPr id="14" name="Text Placeholder 3"/>
+          <p:cNvSpPr>
+            <a:spLocks noGrp="1"/>
+          </p:cNvSpPr>
+          <p:nvPr>
+            <p:ph type="body" sz="half" idx="13"/>
+          </p:nvPr>
+        </p:nvSpPr>
+        <p:spPr>
+          <a:xfrm>
+            <a:off x="1930400" y="3771174"/>
+            <a:ext cx="7279649" cy="342174"/>
+          </a:xfrm>
+        </p:spPr>
+        <p:txBody>
+          <a:bodyPr anchor="t">
+            <a:normAutofit/>
+          </a:bodyPr>
+          <a:lstStyle>
+            <a:lvl1pPr marL="0" indent="0">
+              <a:buNone/>
+              <a:defRPr lang="en-US" sz="1400" b="0" i="0" kern="1200" cap="small" dirty="0">
+                <a:solidFill>
+                  <a:schemeClr val="accent1"/>
+                </a:solidFill>
+                <a:latin typeface="+mj-lt"/>
+                <a:ea typeface="+mj-ea"/>
+                <a:cs typeface="+mj-cs"/>
+              </a:defRPr>
+            </a:lvl1pPr>
+            <a:lvl2pPr marL="457200" indent="0">
+              <a:buNone/>
+              <a:defRPr sz="1200"/>
+            </a:lvl2pPr>
+            <a:lvl3pPr marL="914400" indent="0">
+              <a:buNone/>
+              <a:defRPr sz="1000"/>
+            </a:lvl3pPr>
+            <a:lvl4pPr marL="1371600" indent="0">
+              <a:buNone/>
+              <a:defRPr sz="900"/>
+            </a:lvl4pPr>
+            <a:lvl5pPr marL="1828800" indent="0">
+              <a:buNone/>
+              <a:defRPr sz="900"/>
+            </a:lvl5pPr>
+            <a:lvl6pPr marL="2286000" indent="0">
+              <a:buNone/>
+              <a:defRPr sz="900"/>
+            </a:lvl6pPr>
+            <a:lvl7pPr marL="2743200" indent="0">
+              <a:buNone/>
+              <a:defRPr sz="900"/>
+            </a:lvl7pPr>
+            <a:lvl8pPr marL="3200400" indent="0">
+              <a:buNone/>
+              <a:defRPr sz="900"/>
+            </a:lvl8pPr>
+            <a:lvl9pPr marL="3657600" indent="0">
+              <a:buNone/>
+              <a:defRPr sz="900"/>
+            </a:lvl9pPr>
+          </a:lstStyle>
+          <a:p>
+            <a:pPr lvl="0"/>
+            <a:r>
+              <a:rPr lang="en-US" smtClean="0"/>
+              <a:t>Edit Master text styles</a:t>
+            </a:r>
+          </a:p>
+        </p:txBody>
+      </p:sp>
+      <p:sp>
+        <p:nvSpPr>
+          <p:cNvPr id="10" name="Text Placeholder 3"/>
+          <p:cNvSpPr>
+            <a:spLocks noGrp="1"/>
+          </p:cNvSpPr>
+          <p:nvPr>
+            <p:ph type="body" sz="half" idx="2"/>
+          </p:nvPr>
+        </p:nvSpPr>
+        <p:spPr>
+          <a:xfrm>
+            <a:off x="1154954" y="4350657"/>
+            <a:ext cx="8825659" cy="1676400"/>
+          </a:xfrm>
+        </p:spPr>
+        <p:txBody>
+          <a:bodyPr anchor="ctr">
+            <a:normAutofit/>
+          </a:bodyPr>
+          <a:lstStyle>
+            <a:lvl1pPr marL="0" indent="0">
+              <a:buNone/>
+              <a:defRPr sz="1800"/>
+            </a:lvl1pPr>
+            <a:lvl2pPr marL="457200" indent="0">
+              <a:buNone/>
+              <a:defRPr sz="1200"/>
+            </a:lvl2pPr>
+            <a:lvl3pPr marL="914400" indent="0">
+              <a:buNone/>
+              <a:defRPr sz="1000"/>
+            </a:lvl3pPr>
+            <a:lvl4pPr marL="1371600" indent="0">
+              <a:buNone/>
+              <a:defRPr sz="900"/>
+            </a:lvl4pPr>
+            <a:lvl5pPr marL="1828800" indent="0">
+              <a:buNone/>
+              <a:defRPr sz="900"/>
+            </a:lvl5pPr>
+            <a:lvl6pPr marL="2286000" indent="0">
+              <a:buNone/>
+              <a:defRPr sz="900"/>
+            </a:lvl6pPr>
+            <a:lvl7pPr marL="2743200" indent="0">
+              <a:buNone/>
+              <a:defRPr sz="900"/>
+            </a:lvl7pPr>
+            <a:lvl8pPr marL="3200400" indent="0">
+              <a:buNone/>
+              <a:defRPr sz="900"/>
+            </a:lvl8pPr>
+            <a:lvl9pPr marL="3657600" indent="0">
+              <a:buNone/>
+              <a:defRPr sz="900"/>
+            </a:lvl9pPr>
+          </a:lstStyle>
+          <a:p>
+            <a:pPr lvl="0"/>
+            <a:r>
+              <a:rPr lang="en-US" smtClean="0"/>
+              <a:t>Edit Master text styles</a:t>
+            </a:r>
+          </a:p>
+        </p:txBody>
+      </p:sp>
+      <p:sp>
+        <p:nvSpPr>
+          <p:cNvPr id="4" name="Date Placeholder 3"/>
+          <p:cNvSpPr>
+            <a:spLocks noGrp="1"/>
+          </p:cNvSpPr>
+          <p:nvPr>
+            <p:ph type="dt" sz="half" idx="10"/>
+          </p:nvPr>
+        </p:nvSpPr>
+        <p:spPr/>
+        <p:txBody>
+          <a:bodyPr/>
+          <a:lstStyle/>
+          <a:p>
+            <a:fld id="{F475391B-CAB0-48AB-BB3A-E843B1163B6B}" type="datetimeFigureOut">
+              <a:rPr lang="en-ZA" smtClean="0"/>
+              <a:t>2026/09/18</a:t>
+            </a:fld>
+            <a:endParaRPr lang="en-ZA"/>
+          </a:p>
+        </p:txBody>
+      </p:sp>
+      <p:sp>
+        <p:nvSpPr>
+          <p:cNvPr id="5" name="Footer Placeholder 4"/>
+          <p:cNvSpPr>
+            <a:spLocks noGrp="1"/>
+          </p:cNvSpPr>
+          <p:nvPr>
+            <p:ph type="ftr" sz="quarter" idx="11"/>
+          </p:nvPr>
+        </p:nvSpPr>
+        <p:spPr/>
+        <p:txBody>
+          <a:bodyPr/>
+          <a:lstStyle/>
+          <a:p>
+            <a:endParaRPr lang="en-ZA"/>
+          </a:p>
+        </p:txBody>
+      </p:sp>
+      <p:sp>
+        <p:nvSpPr>
+          <p:cNvPr id="6" name="Slide Number Placeholder 5"/>
+          <p:cNvSpPr>
+            <a:spLocks noGrp="1"/>
+          </p:cNvSpPr>
+          <p:nvPr>
+            <p:ph type="sldNum" sz="quarter" idx="12"/>
+          </p:nvPr>
+        </p:nvSpPr>
+        <p:spPr/>
+        <p:txBody>
+          <a:bodyPr/>
+          <a:lstStyle/>
+          <a:p>
+            <a:fld id="{4D7B34C8-07E8-487E-933E-E1E99116B26C}" type="slidenum">
+              <a:rPr lang="en-ZA" smtClean="0"/>
+              <a:t>‹#›</a:t>
+            </a:fld>
+            <a:endParaRPr lang="en-ZA"/>
+          </a:p>
+        </p:txBody>
+      </p:sp>
+      <p:sp>
+        <p:nvSpPr>
+          <p:cNvPr id="9" name="TextBox 8"/>
+          <p:cNvSpPr txBox="1"/>
+          <p:nvPr/>
+        </p:nvSpPr>
+        <p:spPr>
+          <a:xfrm>
+            <a:off x="898295" y="971253"/>
+            <a:ext cx="801912" cy="1969770"/>
+          </a:xfrm>
+          <a:prstGeom prst="rect">
+            <a:avLst/>
+          </a:prstGeom>
+          <a:noFill/>
+        </p:spPr>
+        <p:txBody>
+          <a:bodyPr wrap="square" rtlCol="0">
+            <a:spAutoFit/>
+          </a:bodyPr>
+          <a:lstStyle>
+            <a:defPPr>
+              <a:defRPr lang="en-US"/>
+            </a:defPPr>
+            <a:lvl1pPr algn="r">
+              <a:defRPr sz="12200" b="0" i="0">
+                <a:solidFill>
+                  <a:schemeClr val="accent1"/>
+                </a:solidFill>
+                <a:latin typeface="Arial"/>
+                <a:ea typeface="+mj-ea"/>
+                <a:cs typeface="+mj-cs"/>
+              </a:defRPr>
+            </a:lvl1pPr>
+          </a:lstStyle>
+          <a:p>
+            <a:pPr lvl="0"/>
+            <a:r>
+              <a:rPr lang="en-US" dirty="0"/>
+              <a:t>“</a:t>
+            </a:r>
+          </a:p>
+        </p:txBody>
+      </p:sp>
+      <p:sp>
+        <p:nvSpPr>
+          <p:cNvPr id="13" name="TextBox 12"/>
+          <p:cNvSpPr txBox="1"/>
+          <p:nvPr/>
+        </p:nvSpPr>
+        <p:spPr>
+          <a:xfrm>
+            <a:off x="9330490" y="2613787"/>
+            <a:ext cx="801912" cy="1969770"/>
+          </a:xfrm>
+          <a:prstGeom prst="rect">
+            <a:avLst/>
+          </a:prstGeom>
+          <a:noFill/>
+        </p:spPr>
+        <p:txBody>
+          <a:bodyPr wrap="square" rtlCol="0">
+            <a:spAutoFit/>
+          </a:bodyPr>
+          <a:lstStyle>
+            <a:defPPr>
+              <a:defRPr lang="en-US"/>
+            </a:defPPr>
+            <a:lvl1pPr algn="r">
+              <a:defRPr sz="12200" b="0" i="0">
+                <a:solidFill>
+                  <a:schemeClr val="accent1"/>
+                </a:solidFill>
+                <a:latin typeface="Arial"/>
+                <a:ea typeface="+mj-ea"/>
+                <a:cs typeface="+mj-cs"/>
+              </a:defRPr>
+            </a:lvl1pPr>
+          </a:lstStyle>
+          <a:p>
+            <a:pPr lvl="0"/>
+            <a:r>
+              <a:rPr lang="en-US" dirty="0"/>
+              <a:t>”</a:t>
+            </a:r>
+          </a:p>
+        </p:txBody>
+      </p:sp>
+    </p:spTree>
+    <p:extLst>
+      <p:ext uri="{BB962C8B-B14F-4D97-AF65-F5344CB8AC3E}">
+        <p14:creationId xmlns:p14="http://schemas.microsoft.com/office/powerpoint/2010/main" val="4152248545"/>
+      </p:ext>
+    </p:extLst>
+  </p:cSld>
+  <p:clrMapOvr>
+    <a:masterClrMapping/>
+  </p:clrMapOvr>
+</p:sldLayout>
+</file>
+
+<file path=ppt/slideLayouts/slideLayout13.xml><?xml version="1.0" encoding="utf-8"?>
+<p:sldLayout xmlns:a="http://schemas.openxmlformats.org/drawingml/2006/main" xmlns:r="http://schemas.openxmlformats.org/officeDocument/2006/relationships" xmlns:p="http://schemas.openxmlformats.org/presentationml/2006/main" preserve="1">
+  <p:cSld name="Name Card">
+    <p:spTree>
+      <p:nvGrpSpPr>
+        <p:cNvPr id="1" name=""/>
+        <p:cNvGrpSpPr/>
+        <p:nvPr/>
+      </p:nvGrpSpPr>
+      <p:grpSpPr>
+        <a:xfrm>
+          <a:off x="0" y="0"/>
+          <a:ext cx="0" cy="0"/>
+          <a:chOff x="0" y="0"/>
+          <a:chExt cx="0" cy="0"/>
+        </a:xfrm>
+      </p:grpSpPr>
+      <p:sp>
+        <p:nvSpPr>
+          <p:cNvPr id="2" name="Title 1"/>
+          <p:cNvSpPr>
+            <a:spLocks noGrp="1"/>
+          </p:cNvSpPr>
+          <p:nvPr>
+            <p:ph type="title"/>
+          </p:nvPr>
+        </p:nvSpPr>
+        <p:spPr>
+          <a:xfrm>
+            <a:off x="1154954" y="3124201"/>
+            <a:ext cx="8825660" cy="1653180"/>
+          </a:xfrm>
+        </p:spPr>
+        <p:txBody>
+          <a:bodyPr anchor="b"/>
+          <a:lstStyle>
+            <a:lvl1pPr algn="l">
+              <a:defRPr sz="4000" b="0" cap="none"/>
+            </a:lvl1pPr>
+          </a:lstStyle>
+          <a:p>
+            <a:r>
+              <a:rPr lang="en-US" smtClean="0"/>
+              <a:t>Click to edit Master title style</a:t>
+            </a:r>
+            <a:endParaRPr lang="en-US" dirty="0"/>
+          </a:p>
+        </p:txBody>
+      </p:sp>
+      <p:sp>
+        <p:nvSpPr>
+          <p:cNvPr id="3" name="Text Placeholder 2"/>
+          <p:cNvSpPr>
+            <a:spLocks noGrp="1"/>
+          </p:cNvSpPr>
+          <p:nvPr>
+            <p:ph type="body" idx="1"/>
+          </p:nvPr>
+        </p:nvSpPr>
+        <p:spPr>
+          <a:xfrm>
+            <a:off x="1154954" y="4777381"/>
+            <a:ext cx="8825659" cy="860400"/>
+          </a:xfrm>
+        </p:spPr>
+        <p:txBody>
+          <a:bodyPr anchor="t"/>
+          <a:lstStyle>
+            <a:lvl1pPr marL="0" indent="0" algn="l">
+              <a:buNone/>
+              <a:defRPr sz="2000" cap="none">
+                <a:solidFill>
+                  <a:schemeClr val="accent1"/>
+                </a:solidFill>
+              </a:defRPr>
+            </a:lvl1pPr>
+            <a:lvl2pPr marL="457200" indent="0">
+              <a:buNone/>
+              <a:defRPr sz="1800">
+                <a:solidFill>
+                  <a:schemeClr val="tx1">
+                    <a:tint val="75000"/>
+                  </a:schemeClr>
+                </a:solidFill>
+              </a:defRPr>
+            </a:lvl2pPr>
+            <a:lvl3pPr marL="914400" indent="0">
+              <a:buNone/>
+              <a:defRPr sz="1600">
+                <a:solidFill>
+                  <a:schemeClr val="tx1">
+                    <a:tint val="75000"/>
+                  </a:schemeClr>
+                </a:solidFill>
+              </a:defRPr>
+            </a:lvl3pPr>
+            <a:lvl4pPr marL="1371600" indent="0">
+              <a:buNone/>
+              <a:defRPr sz="1400">
+                <a:solidFill>
+                  <a:schemeClr val="tx1">
+                    <a:tint val="75000"/>
+                  </a:schemeClr>
+                </a:solidFill>
+              </a:defRPr>
+            </a:lvl4pPr>
+            <a:lvl5pPr marL="1828800" indent="0">
+              <a:buNone/>
+              <a:defRPr sz="1400">
+                <a:solidFill>
+                  <a:schemeClr val="tx1">
+                    <a:tint val="75000"/>
+                  </a:schemeClr>
+                </a:solidFill>
+              </a:defRPr>
+            </a:lvl5pPr>
+            <a:lvl6pPr marL="2286000" indent="0">
+              <a:buNone/>
+              <a:defRPr sz="1400">
+                <a:solidFill>
+                  <a:schemeClr val="tx1">
+                    <a:tint val="75000"/>
+                  </a:schemeClr>
+                </a:solidFill>
+              </a:defRPr>
+            </a:lvl6pPr>
+            <a:lvl7pPr marL="2743200" indent="0">
+              <a:buNone/>
+              <a:defRPr sz="1400">
+                <a:solidFill>
+                  <a:schemeClr val="tx1">
+                    <a:tint val="75000"/>
+                  </a:schemeClr>
+                </a:solidFill>
+              </a:defRPr>
+            </a:lvl7pPr>
+            <a:lvl8pPr marL="3200400" indent="0">
+              <a:buNone/>
+              <a:defRPr sz="1400">
+                <a:solidFill>
+                  <a:schemeClr val="tx1">
+                    <a:tint val="75000"/>
+                  </a:schemeClr>
+                </a:solidFill>
+              </a:defRPr>
+            </a:lvl8pPr>
+            <a:lvl9pPr marL="3657600" indent="0">
+              <a:buNone/>
+              <a:defRPr sz="1400">
+                <a:solidFill>
+                  <a:schemeClr val="tx1">
+                    <a:tint val="75000"/>
+                  </a:schemeClr>
+                </a:solidFill>
+              </a:defRPr>
+            </a:lvl9pPr>
+          </a:lstStyle>
+          <a:p>
+            <a:pPr lvl="0"/>
+            <a:r>
+              <a:rPr lang="en-US" smtClean="0"/>
+              <a:t>Edit Master text styles</a:t>
+            </a:r>
+          </a:p>
+        </p:txBody>
+      </p:sp>
+      <p:sp>
+        <p:nvSpPr>
+          <p:cNvPr id="4" name="Date Placeholder 3"/>
+          <p:cNvSpPr>
+            <a:spLocks noGrp="1"/>
+          </p:cNvSpPr>
+          <p:nvPr>
+            <p:ph type="dt" sz="half" idx="10"/>
+          </p:nvPr>
+        </p:nvSpPr>
+        <p:spPr/>
+        <p:txBody>
+          <a:bodyPr/>
+          <a:lstStyle/>
+          <a:p>
+            <a:fld id="{F475391B-CAB0-48AB-BB3A-E843B1163B6B}" type="datetimeFigureOut">
+              <a:rPr lang="en-ZA" smtClean="0"/>
+              <a:t>2026/09/18</a:t>
+            </a:fld>
+            <a:endParaRPr lang="en-ZA"/>
+          </a:p>
+        </p:txBody>
+      </p:sp>
+      <p:sp>
+        <p:nvSpPr>
+          <p:cNvPr id="5" name="Footer Placeholder 4"/>
+          <p:cNvSpPr>
+            <a:spLocks noGrp="1"/>
+          </p:cNvSpPr>
+          <p:nvPr>
+            <p:ph type="ftr" sz="quarter" idx="11"/>
+          </p:nvPr>
+        </p:nvSpPr>
+        <p:spPr/>
+        <p:txBody>
+          <a:bodyPr/>
+          <a:lstStyle/>
+          <a:p>
+            <a:endParaRPr lang="en-ZA"/>
+          </a:p>
+        </p:txBody>
+      </p:sp>
+      <p:sp>
+        <p:nvSpPr>
+          <p:cNvPr id="6" name="Slide Number Placeholder 5"/>
+          <p:cNvSpPr>
+            <a:spLocks noGrp="1"/>
+          </p:cNvSpPr>
+          <p:nvPr>
+            <p:ph type="sldNum" sz="quarter" idx="12"/>
+          </p:nvPr>
+        </p:nvSpPr>
+        <p:spPr/>
+        <p:txBody>
+          <a:bodyPr/>
+          <a:lstStyle/>
+          <a:p>
+            <a:fld id="{4D7B34C8-07E8-487E-933E-E1E99116B26C}" type="slidenum">
+              <a:rPr lang="en-ZA" smtClean="0"/>
+              <a:t>‹#›</a:t>
+            </a:fld>
+            <a:endParaRPr lang="en-ZA"/>
+          </a:p>
+        </p:txBody>
+      </p:sp>
+    </p:spTree>
+    <p:extLst>
+      <p:ext uri="{BB962C8B-B14F-4D97-AF65-F5344CB8AC3E}">
+        <p14:creationId xmlns:p14="http://schemas.microsoft.com/office/powerpoint/2010/main" val="2827570407"/>
+      </p:ext>
+    </p:extLst>
+  </p:cSld>
+  <p:clrMapOvr>
+    <a:masterClrMapping/>
+  </p:clrMapOvr>
+</p:sldLayout>
+</file>
+
+<file path=ppt/slideLayouts/slideLayout14.xml><?xml version="1.0" encoding="utf-8"?>
+<p:sldLayout xmlns:a="http://schemas.openxmlformats.org/drawingml/2006/main" xmlns:r="http://schemas.openxmlformats.org/officeDocument/2006/relationships" xmlns:p="http://schemas.openxmlformats.org/presentationml/2006/main" preserve="1">
+  <p:cSld name="3 Column">
+    <p:spTree>
+      <p:nvGrpSpPr>
+        <p:cNvPr id="1" name=""/>
+        <p:cNvGrpSpPr/>
+        <p:nvPr/>
+      </p:nvGrpSpPr>
+      <p:grpSpPr>
+        <a:xfrm>
+          <a:off x="0" y="0"/>
+          <a:ext cx="0" cy="0"/>
+          <a:chOff x="0" y="0"/>
+          <a:chExt cx="0" cy="0"/>
+        </a:xfrm>
+      </p:grpSpPr>
+      <p:sp>
+        <p:nvSpPr>
+          <p:cNvPr id="2" name="Title 1"/>
+          <p:cNvSpPr>
+            <a:spLocks noGrp="1"/>
+          </p:cNvSpPr>
+          <p:nvPr>
+            <p:ph type="title"/>
+          </p:nvPr>
+        </p:nvSpPr>
+        <p:spPr/>
+        <p:txBody>
+          <a:bodyPr/>
+          <a:lstStyle>
+            <a:lvl1pPr>
+              <a:defRPr sz="4200"/>
+            </a:lvl1pPr>
+          </a:lstStyle>
+          <a:p>
+            <a:r>
+              <a:rPr lang="en-US" smtClean="0"/>
+              <a:t>Click to edit Master title style</a:t>
+            </a:r>
+            <a:endParaRPr lang="en-US" dirty="0"/>
+          </a:p>
+        </p:txBody>
+      </p:sp>
+      <p:sp>
+        <p:nvSpPr>
+          <p:cNvPr id="3" name="Text Placeholder 2"/>
+          <p:cNvSpPr>
+            <a:spLocks noGrp="1"/>
+          </p:cNvSpPr>
+          <p:nvPr>
+            <p:ph type="body" idx="1"/>
+          </p:nvPr>
+        </p:nvSpPr>
+        <p:spPr>
+          <a:xfrm>
+            <a:off x="632947" y="1981200"/>
+            <a:ext cx="2946866" cy="576262"/>
+          </a:xfrm>
+        </p:spPr>
+        <p:txBody>
+          <a:bodyPr anchor="b">
+            <a:noAutofit/>
+          </a:bodyPr>
+          <a:lstStyle>
+            <a:lvl1pPr marL="0" indent="0">
+              <a:buNone/>
+              <a:defRPr sz="2400" b="0">
+                <a:solidFill>
+                  <a:schemeClr val="accent1"/>
+                </a:solidFill>
+              </a:defRPr>
+            </a:lvl1pPr>
+            <a:lvl2pPr marL="457200" indent="0">
+              <a:buNone/>
+              <a:defRPr sz="2000" b="1"/>
+            </a:lvl2pPr>
+            <a:lvl3pPr marL="914400" indent="0">
+              <a:buNone/>
+              <a:defRPr sz="1800" b="1"/>
+            </a:lvl3pPr>
+            <a:lvl4pPr marL="1371600" indent="0">
+              <a:buNone/>
+              <a:defRPr sz="1600" b="1"/>
+            </a:lvl4pPr>
+            <a:lvl5pPr marL="1828800" indent="0">
+              <a:buNone/>
+              <a:defRPr sz="1600" b="1"/>
+            </a:lvl5pPr>
+            <a:lvl6pPr marL="2286000" indent="0">
+              <a:buNone/>
+              <a:defRPr sz="1600" b="1"/>
+            </a:lvl6pPr>
+            <a:lvl7pPr marL="2743200" indent="0">
+              <a:buNone/>
+              <a:defRPr sz="1600" b="1"/>
+            </a:lvl7pPr>
+            <a:lvl8pPr marL="3200400" indent="0">
+              <a:buNone/>
+              <a:defRPr sz="1600" b="1"/>
+            </a:lvl8pPr>
+            <a:lvl9pPr marL="3657600" indent="0">
+              <a:buNone/>
+              <a:defRPr sz="1600" b="1"/>
+            </a:lvl9pPr>
+          </a:lstStyle>
+          <a:p>
+            <a:pPr lvl="0"/>
+            <a:r>
+              <a:rPr lang="en-US" smtClean="0"/>
+              <a:t>Edit Master text styles</a:t>
+            </a:r>
+          </a:p>
+        </p:txBody>
+      </p:sp>
+      <p:sp>
+        <p:nvSpPr>
+          <p:cNvPr id="16" name="Text Placeholder 3"/>
+          <p:cNvSpPr>
+            <a:spLocks noGrp="1"/>
+          </p:cNvSpPr>
+          <p:nvPr>
+            <p:ph type="body" sz="half" idx="15"/>
+          </p:nvPr>
+        </p:nvSpPr>
+        <p:spPr>
+          <a:xfrm>
+            <a:off x="652463" y="2667000"/>
+            <a:ext cx="2927350" cy="3589338"/>
+          </a:xfrm>
+        </p:spPr>
+        <p:txBody>
+          <a:bodyPr anchor="t">
+            <a:normAutofit/>
+          </a:bodyPr>
+          <a:lstStyle>
+            <a:lvl1pPr marL="0" indent="0">
+              <a:buNone/>
+              <a:defRPr sz="1400"/>
+            </a:lvl1pPr>
+            <a:lvl2pPr marL="457200" indent="0">
+              <a:buNone/>
+              <a:defRPr sz="1200"/>
+            </a:lvl2pPr>
+            <a:lvl3pPr marL="914400" indent="0">
+              <a:buNone/>
+              <a:defRPr sz="1000"/>
+            </a:lvl3pPr>
+            <a:lvl4pPr marL="1371600" indent="0">
+              <a:buNone/>
+              <a:defRPr sz="900"/>
+            </a:lvl4pPr>
+            <a:lvl5pPr marL="1828800" indent="0">
+              <a:buNone/>
+              <a:defRPr sz="900"/>
+            </a:lvl5pPr>
+            <a:lvl6pPr marL="2286000" indent="0">
+              <a:buNone/>
+              <a:defRPr sz="900"/>
+            </a:lvl6pPr>
+            <a:lvl7pPr marL="2743200" indent="0">
+              <a:buNone/>
+              <a:defRPr sz="900"/>
+            </a:lvl7pPr>
+            <a:lvl8pPr marL="3200400" indent="0">
+              <a:buNone/>
+              <a:defRPr sz="900"/>
+            </a:lvl8pPr>
+            <a:lvl9pPr marL="3657600" indent="0">
+              <a:buNone/>
+              <a:defRPr sz="900"/>
+            </a:lvl9pPr>
+          </a:lstStyle>
+          <a:p>
+            <a:pPr lvl="0"/>
+            <a:r>
+              <a:rPr lang="en-US" smtClean="0"/>
+              <a:t>Edit Master text styles</a:t>
+            </a:r>
+          </a:p>
+        </p:txBody>
+      </p:sp>
+      <p:sp>
+        <p:nvSpPr>
+          <p:cNvPr id="5" name="Text Placeholder 4"/>
+          <p:cNvSpPr>
+            <a:spLocks noGrp="1"/>
+          </p:cNvSpPr>
+          <p:nvPr>
+            <p:ph type="body" sz="quarter" idx="3"/>
+          </p:nvPr>
+        </p:nvSpPr>
+        <p:spPr>
+          <a:xfrm>
+            <a:off x="3883659" y="1981200"/>
+            <a:ext cx="2936241" cy="576262"/>
+          </a:xfrm>
+        </p:spPr>
+        <p:txBody>
+          <a:bodyPr anchor="b">
+            <a:noAutofit/>
+          </a:bodyPr>
+          <a:lstStyle>
+            <a:lvl1pPr marL="0" indent="0">
+              <a:buNone/>
+              <a:defRPr sz="2400" b="0">
+                <a:solidFill>
+                  <a:schemeClr val="accent1"/>
+                </a:solidFill>
+              </a:defRPr>
+            </a:lvl1pPr>
+            <a:lvl2pPr marL="457200" indent="0">
+              <a:buNone/>
+              <a:defRPr sz="2000" b="1"/>
+            </a:lvl2pPr>
+            <a:lvl3pPr marL="914400" indent="0">
+              <a:buNone/>
+              <a:defRPr sz="1800" b="1"/>
+            </a:lvl3pPr>
+            <a:lvl4pPr marL="1371600" indent="0">
+              <a:buNone/>
+              <a:defRPr sz="1600" b="1"/>
+            </a:lvl4pPr>
+            <a:lvl5pPr marL="1828800" indent="0">
+              <a:buNone/>
+              <a:defRPr sz="1600" b="1"/>
+            </a:lvl5pPr>
+            <a:lvl6pPr marL="2286000" indent="0">
+              <a:buNone/>
+              <a:defRPr sz="1600" b="1"/>
+            </a:lvl6pPr>
+            <a:lvl7pPr marL="2743200" indent="0">
+              <a:buNone/>
+              <a:defRPr sz="1600" b="1"/>
+            </a:lvl7pPr>
+            <a:lvl8pPr marL="3200400" indent="0">
+              <a:buNone/>
+              <a:defRPr sz="1600" b="1"/>
+            </a:lvl8pPr>
+            <a:lvl9pPr marL="3657600" indent="0">
+              <a:buNone/>
+              <a:defRPr sz="1600" b="1"/>
+            </a:lvl9pPr>
+          </a:lstStyle>
+          <a:p>
+            <a:pPr lvl="0"/>
+            <a:r>
+              <a:rPr lang="en-US" smtClean="0"/>
+              <a:t>Edit Master text styles</a:t>
+            </a:r>
+          </a:p>
+        </p:txBody>
+      </p:sp>
+      <p:sp>
+        <p:nvSpPr>
+          <p:cNvPr id="19" name="Text Placeholder 3"/>
+          <p:cNvSpPr>
+            <a:spLocks noGrp="1"/>
+          </p:cNvSpPr>
+          <p:nvPr>
+            <p:ph type="body" sz="half" idx="16"/>
+          </p:nvPr>
+        </p:nvSpPr>
+        <p:spPr>
+          <a:xfrm>
+            <a:off x="3873106" y="2667000"/>
+            <a:ext cx="2946794" cy="3589338"/>
+          </a:xfrm>
+        </p:spPr>
+        <p:txBody>
+          <a:bodyPr anchor="t">
+            <a:normAutofit/>
+          </a:bodyPr>
+          <a:lstStyle>
+            <a:lvl1pPr marL="0" indent="0">
+              <a:buNone/>
+              <a:defRPr sz="1400"/>
+            </a:lvl1pPr>
+            <a:lvl2pPr marL="457200" indent="0">
+              <a:buNone/>
+              <a:defRPr sz="1200"/>
+            </a:lvl2pPr>
+            <a:lvl3pPr marL="914400" indent="0">
+              <a:buNone/>
+              <a:defRPr sz="1000"/>
+            </a:lvl3pPr>
+            <a:lvl4pPr marL="1371600" indent="0">
+              <a:buNone/>
+              <a:defRPr sz="900"/>
+            </a:lvl4pPr>
+            <a:lvl5pPr marL="1828800" indent="0">
+              <a:buNone/>
+              <a:defRPr sz="900"/>
+            </a:lvl5pPr>
+            <a:lvl6pPr marL="2286000" indent="0">
+              <a:buNone/>
+              <a:defRPr sz="900"/>
+            </a:lvl6pPr>
+            <a:lvl7pPr marL="2743200" indent="0">
+              <a:buNone/>
+              <a:defRPr sz="900"/>
+            </a:lvl7pPr>
+            <a:lvl8pPr marL="3200400" indent="0">
+              <a:buNone/>
+              <a:defRPr sz="900"/>
+            </a:lvl8pPr>
+            <a:lvl9pPr marL="3657600" indent="0">
+              <a:buNone/>
+              <a:defRPr sz="900"/>
+            </a:lvl9pPr>
+          </a:lstStyle>
+          <a:p>
+            <a:pPr lvl="0"/>
+            <a:r>
+              <a:rPr lang="en-US" smtClean="0"/>
+              <a:t>Edit Master text styles</a:t>
+            </a:r>
+          </a:p>
+        </p:txBody>
+      </p:sp>
+      <p:sp>
+        <p:nvSpPr>
+          <p:cNvPr id="14" name="Text Placeholder 4"/>
+          <p:cNvSpPr>
+            <a:spLocks noGrp="1"/>
+          </p:cNvSpPr>
+          <p:nvPr>
+            <p:ph type="body" sz="quarter" idx="13"/>
+          </p:nvPr>
+        </p:nvSpPr>
+        <p:spPr>
+          <a:xfrm>
+            <a:off x="7124700" y="1981200"/>
+            <a:ext cx="2932113" cy="576262"/>
+          </a:xfrm>
+        </p:spPr>
+        <p:txBody>
+          <a:bodyPr anchor="b">
+            <a:noAutofit/>
+          </a:bodyPr>
+          <a:lstStyle>
+            <a:lvl1pPr marL="0" indent="0">
+              <a:buNone/>
+              <a:defRPr sz="2400" b="0">
+                <a:solidFill>
+                  <a:schemeClr val="accent1"/>
+                </a:solidFill>
+              </a:defRPr>
+            </a:lvl1pPr>
+            <a:lvl2pPr marL="457200" indent="0">
+              <a:buNone/>
+              <a:defRPr sz="2000" b="1"/>
+            </a:lvl2pPr>
+            <a:lvl3pPr marL="914400" indent="0">
+              <a:buNone/>
+              <a:defRPr sz="1800" b="1"/>
+            </a:lvl3pPr>
+            <a:lvl4pPr marL="1371600" indent="0">
+              <a:buNone/>
+              <a:defRPr sz="1600" b="1"/>
+            </a:lvl4pPr>
+            <a:lvl5pPr marL="1828800" indent="0">
+              <a:buNone/>
+              <a:defRPr sz="1600" b="1"/>
+            </a:lvl5pPr>
+            <a:lvl6pPr marL="2286000" indent="0">
+              <a:buNone/>
+              <a:defRPr sz="1600" b="1"/>
+            </a:lvl6pPr>
+            <a:lvl7pPr marL="2743200" indent="0">
+              <a:buNone/>
+              <a:defRPr sz="1600" b="1"/>
+            </a:lvl7pPr>
+            <a:lvl8pPr marL="3200400" indent="0">
+              <a:buNone/>
+              <a:defRPr sz="1600" b="1"/>
+            </a:lvl8pPr>
+            <a:lvl9pPr marL="3657600" indent="0">
+              <a:buNone/>
+              <a:defRPr sz="1600" b="1"/>
+            </a:lvl9pPr>
+          </a:lstStyle>
+          <a:p>
+            <a:pPr lvl="0"/>
+            <a:r>
+              <a:rPr lang="en-US" smtClean="0"/>
+              <a:t>Edit Master text styles</a:t>
+            </a:r>
+          </a:p>
+        </p:txBody>
+      </p:sp>
+      <p:sp>
+        <p:nvSpPr>
+          <p:cNvPr id="20" name="Text Placeholder 3"/>
+          <p:cNvSpPr>
+            <a:spLocks noGrp="1"/>
+          </p:cNvSpPr>
+          <p:nvPr>
+            <p:ph type="body" sz="half" idx="17"/>
+          </p:nvPr>
+        </p:nvSpPr>
+        <p:spPr>
+          <a:xfrm>
+            <a:off x="7124700" y="2667000"/>
+            <a:ext cx="2932113" cy="3589338"/>
+          </a:xfrm>
+        </p:spPr>
+        <p:txBody>
+          <a:bodyPr anchor="t">
+            <a:normAutofit/>
+          </a:bodyPr>
+          <a:lstStyle>
+            <a:lvl1pPr marL="0" indent="0">
+              <a:buNone/>
+              <a:defRPr sz="1400"/>
+            </a:lvl1pPr>
+            <a:lvl2pPr marL="457200" indent="0">
+              <a:buNone/>
+              <a:defRPr sz="1200"/>
+            </a:lvl2pPr>
+            <a:lvl3pPr marL="914400" indent="0">
+              <a:buNone/>
+              <a:defRPr sz="1000"/>
+            </a:lvl3pPr>
+            <a:lvl4pPr marL="1371600" indent="0">
+              <a:buNone/>
+              <a:defRPr sz="900"/>
+            </a:lvl4pPr>
+            <a:lvl5pPr marL="1828800" indent="0">
+              <a:buNone/>
+              <a:defRPr sz="900"/>
+            </a:lvl5pPr>
+            <a:lvl6pPr marL="2286000" indent="0">
+              <a:buNone/>
+              <a:defRPr sz="900"/>
+            </a:lvl6pPr>
+            <a:lvl7pPr marL="2743200" indent="0">
+              <a:buNone/>
+              <a:defRPr sz="900"/>
+            </a:lvl7pPr>
+            <a:lvl8pPr marL="3200400" indent="0">
+              <a:buNone/>
+              <a:defRPr sz="900"/>
+            </a:lvl8pPr>
+            <a:lvl9pPr marL="3657600" indent="0">
+              <a:buNone/>
+              <a:defRPr sz="900"/>
+            </a:lvl9pPr>
+          </a:lstStyle>
+          <a:p>
+            <a:pPr lvl="0"/>
+            <a:r>
+              <a:rPr lang="en-US" smtClean="0"/>
+              <a:t>Edit Master text styles</a:t>
+            </a:r>
+          </a:p>
+        </p:txBody>
+      </p:sp>
+      <p:cxnSp>
+        <p:nvCxnSpPr>
+          <p:cNvPr id="17" name="Straight Connector 16"/>
+          <p:cNvCxnSpPr/>
+          <p:nvPr/>
+        </p:nvCxnSpPr>
+        <p:spPr>
+          <a:xfrm>
+            <a:off x="3726142" y="2133600"/>
+            <a:ext cx="0" cy="3962400"/>
+          </a:xfrm>
+          <a:prstGeom prst="line">
+            <a:avLst/>
+          </a:prstGeom>
+          <a:ln w="12700" cmpd="sng">
+            <a:solidFill>
+              <a:schemeClr val="accent1">
+                <a:alpha val="40000"/>
+              </a:schemeClr>
+            </a:solidFill>
+          </a:ln>
+        </p:spPr>
+        <p:style>
+          <a:lnRef idx="2">
+            <a:schemeClr val="accent1"/>
+          </a:lnRef>
+          <a:fillRef idx="0">
+            <a:schemeClr val="accent1"/>
+          </a:fillRef>
+          <a:effectRef idx="1">
+            <a:schemeClr val="accent1"/>
+          </a:effectRef>
+          <a:fontRef idx="minor">
+            <a:schemeClr val="tx1"/>
+          </a:fontRef>
+        </p:style>
+      </p:cxnSp>
+      <p:cxnSp>
+        <p:nvCxnSpPr>
+          <p:cNvPr id="18" name="Straight Connector 17"/>
+          <p:cNvCxnSpPr/>
+          <p:nvPr/>
+        </p:nvCxnSpPr>
+        <p:spPr>
+          <a:xfrm>
+            <a:off x="6962227" y="2133600"/>
+            <a:ext cx="0" cy="3966882"/>
+          </a:xfrm>
+          <a:prstGeom prst="line">
+            <a:avLst/>
+          </a:prstGeom>
+          <a:ln w="12700" cmpd="sng">
+            <a:solidFill>
+              <a:schemeClr val="accent1">
+                <a:alpha val="40000"/>
+              </a:schemeClr>
+            </a:solidFill>
+          </a:ln>
+        </p:spPr>
+        <p:style>
+          <a:lnRef idx="2">
+            <a:schemeClr val="accent1"/>
+          </a:lnRef>
+          <a:fillRef idx="0">
+            <a:schemeClr val="accent1"/>
+          </a:fillRef>
+          <a:effectRef idx="1">
+            <a:schemeClr val="accent1"/>
+          </a:effectRef>
+          <a:fontRef idx="minor">
+            <a:schemeClr val="tx1"/>
+          </a:fontRef>
+        </p:style>
+      </p:cxnSp>
+      <p:sp>
+        <p:nvSpPr>
+          <p:cNvPr id="7" name="Date Placeholder 3"/>
+          <p:cNvSpPr>
+            <a:spLocks noGrp="1"/>
+          </p:cNvSpPr>
+          <p:nvPr>
+            <p:ph type="dt" sz="half" idx="10"/>
+          </p:nvPr>
+        </p:nvSpPr>
+        <p:spPr/>
+        <p:txBody>
+          <a:bodyPr/>
+          <a:lstStyle/>
+          <a:p>
+            <a:fld id="{F475391B-CAB0-48AB-BB3A-E843B1163B6B}" type="datetimeFigureOut">
+              <a:rPr lang="en-ZA" smtClean="0"/>
+              <a:t>2026/09/18</a:t>
+            </a:fld>
+            <a:endParaRPr lang="en-ZA"/>
+          </a:p>
+        </p:txBody>
+      </p:sp>
+      <p:sp>
+        <p:nvSpPr>
+          <p:cNvPr id="4" name="Footer Placeholder 4"/>
+          <p:cNvSpPr>
+            <a:spLocks noGrp="1"/>
+          </p:cNvSpPr>
+          <p:nvPr>
+            <p:ph type="ftr" sz="quarter" idx="11"/>
+          </p:nvPr>
+        </p:nvSpPr>
+        <p:spPr/>
+        <p:txBody>
+          <a:bodyPr/>
+          <a:lstStyle/>
+          <a:p>
+            <a:endParaRPr lang="en-ZA"/>
+          </a:p>
+        </p:txBody>
+      </p:sp>
+      <p:sp>
+        <p:nvSpPr>
+          <p:cNvPr id="6" name="Slide Number Placeholder 5"/>
+          <p:cNvSpPr>
+            <a:spLocks noGrp="1"/>
+          </p:cNvSpPr>
+          <p:nvPr>
+            <p:ph type="sldNum" sz="quarter" idx="12"/>
+          </p:nvPr>
+        </p:nvSpPr>
+        <p:spPr/>
+        <p:txBody>
+          <a:bodyPr/>
+          <a:lstStyle/>
+          <a:p>
+            <a:fld id="{4D7B34C8-07E8-487E-933E-E1E99116B26C}" type="slidenum">
+              <a:rPr lang="en-ZA" smtClean="0"/>
+              <a:t>‹#›</a:t>
+            </a:fld>
+            <a:endParaRPr lang="en-ZA"/>
+          </a:p>
+        </p:txBody>
+      </p:sp>
+    </p:spTree>
+    <p:extLst>
+      <p:ext uri="{BB962C8B-B14F-4D97-AF65-F5344CB8AC3E}">
+        <p14:creationId xmlns:p14="http://schemas.microsoft.com/office/powerpoint/2010/main" val="3233180809"/>
+      </p:ext>
+    </p:extLst>
+  </p:cSld>
+  <p:clrMapOvr>
+    <a:masterClrMapping/>
+  </p:clrMapOvr>
+</p:sldLayout>
+</file>
+
+<file path=ppt/slideLayouts/slideLayout15.xml><?xml version="1.0" encoding="utf-8"?>
+<p:sldLayout xmlns:a="http://schemas.openxmlformats.org/drawingml/2006/main" xmlns:r="http://schemas.openxmlformats.org/officeDocument/2006/relationships" xmlns:p="http://schemas.openxmlformats.org/presentationml/2006/main" preserve="1">
+  <p:cSld name="3 Picture Column">
+    <p:spTree>
+      <p:nvGrpSpPr>
+        <p:cNvPr id="1" name=""/>
+        <p:cNvGrpSpPr/>
+        <p:nvPr/>
+      </p:nvGrpSpPr>
+      <p:grpSpPr>
+        <a:xfrm>
+          <a:off x="0" y="0"/>
+          <a:ext cx="0" cy="0"/>
+          <a:chOff x="0" y="0"/>
+          <a:chExt cx="0" cy="0"/>
+        </a:xfrm>
+      </p:grpSpPr>
+      <p:sp>
+        <p:nvSpPr>
+          <p:cNvPr id="2" name="Title 1"/>
+          <p:cNvSpPr>
+            <a:spLocks noGrp="1"/>
+          </p:cNvSpPr>
+          <p:nvPr>
+            <p:ph type="title"/>
+          </p:nvPr>
+        </p:nvSpPr>
+        <p:spPr/>
+        <p:txBody>
+          <a:bodyPr/>
+          <a:lstStyle>
+            <a:lvl1pPr>
+              <a:defRPr sz="4200"/>
+            </a:lvl1pPr>
+          </a:lstStyle>
+          <a:p>
+            <a:r>
+              <a:rPr lang="en-US" smtClean="0"/>
+              <a:t>Click to edit Master title style</a:t>
+            </a:r>
+            <a:endParaRPr lang="en-US" dirty="0"/>
+          </a:p>
+        </p:txBody>
+      </p:sp>
+      <p:sp>
+        <p:nvSpPr>
+          <p:cNvPr id="3" name="Text Placeholder 2"/>
+          <p:cNvSpPr>
+            <a:spLocks noGrp="1"/>
+          </p:cNvSpPr>
+          <p:nvPr>
+            <p:ph type="body" idx="1"/>
+          </p:nvPr>
+        </p:nvSpPr>
+        <p:spPr>
+          <a:xfrm>
+            <a:off x="652463" y="4250949"/>
+            <a:ext cx="2940050" cy="576262"/>
+          </a:xfrm>
+        </p:spPr>
+        <p:txBody>
+          <a:bodyPr anchor="b">
+            <a:noAutofit/>
+          </a:bodyPr>
+          <a:lstStyle>
+            <a:lvl1pPr marL="0" indent="0">
+              <a:buNone/>
+              <a:defRPr sz="2400" b="0">
+                <a:solidFill>
+                  <a:schemeClr val="accent1"/>
+                </a:solidFill>
+              </a:defRPr>
+            </a:lvl1pPr>
+            <a:lvl2pPr marL="457200" indent="0">
+              <a:buNone/>
+              <a:defRPr sz="2000" b="1"/>
+            </a:lvl2pPr>
+            <a:lvl3pPr marL="914400" indent="0">
+              <a:buNone/>
+              <a:defRPr sz="1800" b="1"/>
+            </a:lvl3pPr>
+            <a:lvl4pPr marL="1371600" indent="0">
+              <a:buNone/>
+              <a:defRPr sz="1600" b="1"/>
+            </a:lvl4pPr>
+            <a:lvl5pPr marL="1828800" indent="0">
+              <a:buNone/>
+              <a:defRPr sz="1600" b="1"/>
+            </a:lvl5pPr>
+            <a:lvl6pPr marL="2286000" indent="0">
+              <a:buNone/>
+              <a:defRPr sz="1600" b="1"/>
+            </a:lvl6pPr>
+            <a:lvl7pPr marL="2743200" indent="0">
+              <a:buNone/>
+              <a:defRPr sz="1600" b="1"/>
+            </a:lvl7pPr>
+            <a:lvl8pPr marL="3200400" indent="0">
+              <a:buNone/>
+              <a:defRPr sz="1600" b="1"/>
+            </a:lvl8pPr>
+            <a:lvl9pPr marL="3657600" indent="0">
+              <a:buNone/>
+              <a:defRPr sz="1600" b="1"/>
+            </a:lvl9pPr>
+          </a:lstStyle>
+          <a:p>
+            <a:pPr lvl="0"/>
+            <a:r>
+              <a:rPr lang="en-US" smtClean="0"/>
+              <a:t>Edit Master text styles</a:t>
+            </a:r>
+          </a:p>
+        </p:txBody>
+      </p:sp>
+      <p:sp>
+        <p:nvSpPr>
+          <p:cNvPr id="29" name="Picture Placeholder 2"/>
+          <p:cNvSpPr>
+            <a:spLocks noGrp="1" noChangeAspect="1"/>
+          </p:cNvSpPr>
+          <p:nvPr>
+            <p:ph type="pic" idx="15"/>
+          </p:nvPr>
+        </p:nvSpPr>
+        <p:spPr>
+          <a:xfrm>
+            <a:off x="652463" y="2209800"/>
+            <a:ext cx="2940050" cy="1524000"/>
+          </a:xfrm>
+          <a:prstGeom prst="roundRect">
+            <a:avLst>
+              <a:gd name="adj" fmla="val 1858"/>
+            </a:avLst>
+          </a:prstGeom>
+          <a:effectLst>
+            <a:outerShdw blurRad="50800" dist="50800" dir="5400000" algn="tl" rotWithShape="0">
+              <a:srgbClr val="000000">
+                <a:alpha val="43000"/>
+              </a:srgbClr>
+            </a:outerShdw>
+          </a:effectLst>
+        </p:spPr>
+        <p:txBody>
+          <a:bodyPr anchor="t">
+            <a:normAutofit/>
+          </a:bodyPr>
+          <a:lstStyle>
+            <a:lvl1pPr marL="0" indent="0" algn="ctr">
+              <a:buNone/>
+              <a:defRPr sz="1600"/>
+            </a:lvl1pPr>
+            <a:lvl2pPr marL="457200" indent="0">
+              <a:buNone/>
+              <a:defRPr sz="1600"/>
+            </a:lvl2pPr>
+            <a:lvl3pPr marL="914400" indent="0">
+              <a:buNone/>
+              <a:defRPr sz="1600"/>
+            </a:lvl3pPr>
+            <a:lvl4pPr marL="1371600" indent="0">
+              <a:buNone/>
+              <a:defRPr sz="1600"/>
+            </a:lvl4pPr>
+            <a:lvl5pPr marL="1828800" indent="0">
+              <a:buNone/>
+              <a:defRPr sz="1600"/>
+            </a:lvl5pPr>
+            <a:lvl6pPr marL="2286000" indent="0">
+              <a:buNone/>
+              <a:defRPr sz="1600"/>
+            </a:lvl6pPr>
+            <a:lvl7pPr marL="2743200" indent="0">
+              <a:buNone/>
+              <a:defRPr sz="1600"/>
+            </a:lvl7pPr>
+            <a:lvl8pPr marL="3200400" indent="0">
+              <a:buNone/>
+              <a:defRPr sz="1600"/>
+            </a:lvl8pPr>
+            <a:lvl9pPr marL="3657600" indent="0">
+              <a:buNone/>
+              <a:defRPr sz="1600"/>
+            </a:lvl9pPr>
+          </a:lstStyle>
+          <a:p>
+            <a:r>
+              <a:rPr lang="en-US" smtClean="0"/>
+              <a:t>Click icon to add picture</a:t>
+            </a:r>
+            <a:endParaRPr lang="en-US" dirty="0"/>
+          </a:p>
+        </p:txBody>
+      </p:sp>
+      <p:sp>
+        <p:nvSpPr>
+          <p:cNvPr id="22" name="Text Placeholder 3"/>
+          <p:cNvSpPr>
+            <a:spLocks noGrp="1"/>
+          </p:cNvSpPr>
+          <p:nvPr>
+            <p:ph type="body" sz="half" idx="18"/>
+          </p:nvPr>
+        </p:nvSpPr>
+        <p:spPr>
+          <a:xfrm>
+            <a:off x="652463" y="4827211"/>
+            <a:ext cx="2940050" cy="659189"/>
+          </a:xfrm>
+        </p:spPr>
+        <p:txBody>
+          <a:bodyPr anchor="t">
+            <a:normAutofit/>
+          </a:bodyPr>
+          <a:lstStyle>
+            <a:lvl1pPr marL="0" indent="0">
+              <a:buNone/>
+              <a:defRPr sz="1400"/>
+            </a:lvl1pPr>
+            <a:lvl2pPr marL="457200" indent="0">
+              <a:buNone/>
+              <a:defRPr sz="1200"/>
+            </a:lvl2pPr>
+            <a:lvl3pPr marL="914400" indent="0">
+              <a:buNone/>
+              <a:defRPr sz="1000"/>
+            </a:lvl3pPr>
+            <a:lvl4pPr marL="1371600" indent="0">
+              <a:buNone/>
+              <a:defRPr sz="900"/>
+            </a:lvl4pPr>
+            <a:lvl5pPr marL="1828800" indent="0">
+              <a:buNone/>
+              <a:defRPr sz="900"/>
+            </a:lvl5pPr>
+            <a:lvl6pPr marL="2286000" indent="0">
+              <a:buNone/>
+              <a:defRPr sz="900"/>
+            </a:lvl6pPr>
+            <a:lvl7pPr marL="2743200" indent="0">
+              <a:buNone/>
+              <a:defRPr sz="900"/>
+            </a:lvl7pPr>
+            <a:lvl8pPr marL="3200400" indent="0">
+              <a:buNone/>
+              <a:defRPr sz="900"/>
+            </a:lvl8pPr>
+            <a:lvl9pPr marL="3657600" indent="0">
+              <a:buNone/>
+              <a:defRPr sz="900"/>
+            </a:lvl9pPr>
+          </a:lstStyle>
+          <a:p>
+            <a:pPr lvl="0"/>
+            <a:r>
+              <a:rPr lang="en-US" smtClean="0"/>
+              <a:t>Edit Master text styles</a:t>
+            </a:r>
+          </a:p>
+        </p:txBody>
+      </p:sp>
+      <p:sp>
+        <p:nvSpPr>
+          <p:cNvPr id="5" name="Text Placeholder 4"/>
+          <p:cNvSpPr>
+            <a:spLocks noGrp="1"/>
+          </p:cNvSpPr>
+          <p:nvPr>
+            <p:ph type="body" sz="quarter" idx="3"/>
+          </p:nvPr>
+        </p:nvSpPr>
+        <p:spPr>
+          <a:xfrm>
+            <a:off x="3889375" y="4250949"/>
+            <a:ext cx="2930525" cy="576262"/>
+          </a:xfrm>
+        </p:spPr>
+        <p:txBody>
+          <a:bodyPr anchor="b">
+            <a:noAutofit/>
+          </a:bodyPr>
+          <a:lstStyle>
+            <a:lvl1pPr marL="0" indent="0">
+              <a:buNone/>
+              <a:defRPr sz="2400" b="0">
+                <a:solidFill>
+                  <a:schemeClr val="accent1"/>
+                </a:solidFill>
+              </a:defRPr>
+            </a:lvl1pPr>
+            <a:lvl2pPr marL="457200" indent="0">
+              <a:buNone/>
+              <a:defRPr sz="2000" b="1"/>
+            </a:lvl2pPr>
+            <a:lvl3pPr marL="914400" indent="0">
+              <a:buNone/>
+              <a:defRPr sz="1800" b="1"/>
+            </a:lvl3pPr>
+            <a:lvl4pPr marL="1371600" indent="0">
+              <a:buNone/>
+              <a:defRPr sz="1600" b="1"/>
+            </a:lvl4pPr>
+            <a:lvl5pPr marL="1828800" indent="0">
+              <a:buNone/>
+              <a:defRPr sz="1600" b="1"/>
+            </a:lvl5pPr>
+            <a:lvl6pPr marL="2286000" indent="0">
+              <a:buNone/>
+              <a:defRPr sz="1600" b="1"/>
+            </a:lvl6pPr>
+            <a:lvl7pPr marL="2743200" indent="0">
+              <a:buNone/>
+              <a:defRPr sz="1600" b="1"/>
+            </a:lvl7pPr>
+            <a:lvl8pPr marL="3200400" indent="0">
+              <a:buNone/>
+              <a:defRPr sz="1600" b="1"/>
+            </a:lvl8pPr>
+            <a:lvl9pPr marL="3657600" indent="0">
+              <a:buNone/>
+              <a:defRPr sz="1600" b="1"/>
+            </a:lvl9pPr>
+          </a:lstStyle>
+          <a:p>
+            <a:pPr lvl="0"/>
+            <a:r>
+              <a:rPr lang="en-US" smtClean="0"/>
+              <a:t>Edit Master text styles</a:t>
+            </a:r>
+          </a:p>
+        </p:txBody>
+      </p:sp>
+      <p:sp>
+        <p:nvSpPr>
+          <p:cNvPr id="30" name="Picture Placeholder 2"/>
+          <p:cNvSpPr>
+            <a:spLocks noGrp="1" noChangeAspect="1"/>
+          </p:cNvSpPr>
+          <p:nvPr>
+            <p:ph type="pic" idx="21"/>
+          </p:nvPr>
+        </p:nvSpPr>
+        <p:spPr>
+          <a:xfrm>
+            <a:off x="3889374" y="2209800"/>
+            <a:ext cx="2930525" cy="1524000"/>
+          </a:xfrm>
+          <a:prstGeom prst="roundRect">
+            <a:avLst>
+              <a:gd name="adj" fmla="val 1858"/>
+            </a:avLst>
+          </a:prstGeom>
+          <a:effectLst>
+            <a:outerShdw blurRad="50800" dist="50800" dir="5400000" algn="tl" rotWithShape="0">
+              <a:srgbClr val="000000">
+                <a:alpha val="43000"/>
+              </a:srgbClr>
+            </a:outerShdw>
+          </a:effectLst>
+        </p:spPr>
+        <p:txBody>
+          <a:bodyPr anchor="t">
+            <a:normAutofit/>
+          </a:bodyPr>
+          <a:lstStyle>
+            <a:lvl1pPr marL="0" indent="0" algn="ctr">
+              <a:buNone/>
+              <a:defRPr sz="1600"/>
+            </a:lvl1pPr>
+            <a:lvl2pPr marL="457200" indent="0">
+              <a:buNone/>
+              <a:defRPr sz="1600"/>
+            </a:lvl2pPr>
+            <a:lvl3pPr marL="914400" indent="0">
+              <a:buNone/>
+              <a:defRPr sz="1600"/>
+            </a:lvl3pPr>
+            <a:lvl4pPr marL="1371600" indent="0">
+              <a:buNone/>
+              <a:defRPr sz="1600"/>
+            </a:lvl4pPr>
+            <a:lvl5pPr marL="1828800" indent="0">
+              <a:buNone/>
+              <a:defRPr sz="1600"/>
+            </a:lvl5pPr>
+            <a:lvl6pPr marL="2286000" indent="0">
+              <a:buNone/>
+              <a:defRPr sz="1600"/>
+            </a:lvl6pPr>
+            <a:lvl7pPr marL="2743200" indent="0">
+              <a:buNone/>
+              <a:defRPr sz="1600"/>
+            </a:lvl7pPr>
+            <a:lvl8pPr marL="3200400" indent="0">
+              <a:buNone/>
+              <a:defRPr sz="1600"/>
+            </a:lvl8pPr>
+            <a:lvl9pPr marL="3657600" indent="0">
+              <a:buNone/>
+              <a:defRPr sz="1600"/>
+            </a:lvl9pPr>
+          </a:lstStyle>
+          <a:p>
+            <a:r>
+              <a:rPr lang="en-US" smtClean="0"/>
+              <a:t>Click icon to add picture</a:t>
+            </a:r>
+            <a:endParaRPr lang="en-US" dirty="0"/>
+          </a:p>
+        </p:txBody>
+      </p:sp>
+      <p:sp>
+        <p:nvSpPr>
+          <p:cNvPr id="23" name="Text Placeholder 3"/>
+          <p:cNvSpPr>
+            <a:spLocks noGrp="1"/>
+          </p:cNvSpPr>
+          <p:nvPr>
+            <p:ph type="body" sz="half" idx="19"/>
+          </p:nvPr>
+        </p:nvSpPr>
+        <p:spPr>
+          <a:xfrm>
+            <a:off x="3888022" y="4827210"/>
+            <a:ext cx="2934406" cy="659189"/>
+          </a:xfrm>
+        </p:spPr>
+        <p:txBody>
+          <a:bodyPr anchor="t">
+            <a:normAutofit/>
+          </a:bodyPr>
+          <a:lstStyle>
+            <a:lvl1pPr marL="0" indent="0">
+              <a:buNone/>
+              <a:defRPr sz="1400"/>
+            </a:lvl1pPr>
+            <a:lvl2pPr marL="457200" indent="0">
+              <a:buNone/>
+              <a:defRPr sz="1200"/>
+            </a:lvl2pPr>
+            <a:lvl3pPr marL="914400" indent="0">
+              <a:buNone/>
+              <a:defRPr sz="1000"/>
+            </a:lvl3pPr>
+            <a:lvl4pPr marL="1371600" indent="0">
+              <a:buNone/>
+              <a:defRPr sz="900"/>
+            </a:lvl4pPr>
+            <a:lvl5pPr marL="1828800" indent="0">
+              <a:buNone/>
+              <a:defRPr sz="900"/>
+            </a:lvl5pPr>
+            <a:lvl6pPr marL="2286000" indent="0">
+              <a:buNone/>
+              <a:defRPr sz="900"/>
+            </a:lvl6pPr>
+            <a:lvl7pPr marL="2743200" indent="0">
+              <a:buNone/>
+              <a:defRPr sz="900"/>
+            </a:lvl7pPr>
+            <a:lvl8pPr marL="3200400" indent="0">
+              <a:buNone/>
+              <a:defRPr sz="900"/>
+            </a:lvl8pPr>
+            <a:lvl9pPr marL="3657600" indent="0">
+              <a:buNone/>
+              <a:defRPr sz="900"/>
+            </a:lvl9pPr>
+          </a:lstStyle>
+          <a:p>
+            <a:pPr lvl="0"/>
+            <a:r>
+              <a:rPr lang="en-US" smtClean="0"/>
+              <a:t>Edit Master text styles</a:t>
+            </a:r>
+          </a:p>
+        </p:txBody>
+      </p:sp>
+      <p:sp>
+        <p:nvSpPr>
+          <p:cNvPr id="14" name="Text Placeholder 4"/>
+          <p:cNvSpPr>
+            <a:spLocks noGrp="1"/>
+          </p:cNvSpPr>
+          <p:nvPr>
+            <p:ph type="body" sz="quarter" idx="13"/>
+          </p:nvPr>
+        </p:nvSpPr>
+        <p:spPr>
+          <a:xfrm>
+            <a:off x="7124700" y="4250949"/>
+            <a:ext cx="2932113" cy="576262"/>
+          </a:xfrm>
+        </p:spPr>
+        <p:txBody>
+          <a:bodyPr anchor="b">
+            <a:noAutofit/>
+          </a:bodyPr>
+          <a:lstStyle>
+            <a:lvl1pPr marL="0" indent="0">
+              <a:buNone/>
+              <a:defRPr sz="2400" b="0">
+                <a:solidFill>
+                  <a:schemeClr val="accent1"/>
+                </a:solidFill>
+              </a:defRPr>
+            </a:lvl1pPr>
+            <a:lvl2pPr marL="457200" indent="0">
+              <a:buNone/>
+              <a:defRPr sz="2000" b="1"/>
+            </a:lvl2pPr>
+            <a:lvl3pPr marL="914400" indent="0">
+              <a:buNone/>
+              <a:defRPr sz="1800" b="1"/>
+            </a:lvl3pPr>
+            <a:lvl4pPr marL="1371600" indent="0">
+              <a:buNone/>
+              <a:defRPr sz="1600" b="1"/>
+            </a:lvl4pPr>
+            <a:lvl5pPr marL="1828800" indent="0">
+              <a:buNone/>
+              <a:defRPr sz="1600" b="1"/>
+            </a:lvl5pPr>
+            <a:lvl6pPr marL="2286000" indent="0">
+              <a:buNone/>
+              <a:defRPr sz="1600" b="1"/>
+            </a:lvl6pPr>
+            <a:lvl7pPr marL="2743200" indent="0">
+              <a:buNone/>
+              <a:defRPr sz="1600" b="1"/>
+            </a:lvl7pPr>
+            <a:lvl8pPr marL="3200400" indent="0">
+              <a:buNone/>
+              <a:defRPr sz="1600" b="1"/>
+            </a:lvl8pPr>
+            <a:lvl9pPr marL="3657600" indent="0">
+              <a:buNone/>
+              <a:defRPr sz="1600" b="1"/>
+            </a:lvl9pPr>
+          </a:lstStyle>
+          <a:p>
+            <a:pPr lvl="0"/>
+            <a:r>
+              <a:rPr lang="en-US" smtClean="0"/>
+              <a:t>Edit Master text styles</a:t>
+            </a:r>
+          </a:p>
+        </p:txBody>
+      </p:sp>
+      <p:sp>
+        <p:nvSpPr>
+          <p:cNvPr id="31" name="Picture Placeholder 2"/>
+          <p:cNvSpPr>
+            <a:spLocks noGrp="1" noChangeAspect="1"/>
+          </p:cNvSpPr>
+          <p:nvPr>
+            <p:ph type="pic" idx="22"/>
+          </p:nvPr>
+        </p:nvSpPr>
+        <p:spPr>
+          <a:xfrm>
+            <a:off x="7124699" y="2209800"/>
+            <a:ext cx="2932113" cy="1524000"/>
+          </a:xfrm>
+          <a:prstGeom prst="roundRect">
+            <a:avLst>
+              <a:gd name="adj" fmla="val 1858"/>
+            </a:avLst>
+          </a:prstGeom>
+          <a:effectLst>
+            <a:outerShdw blurRad="50800" dist="50800" dir="5400000" algn="tl" rotWithShape="0">
+              <a:srgbClr val="000000">
+                <a:alpha val="43000"/>
+              </a:srgbClr>
+            </a:outerShdw>
+          </a:effectLst>
+        </p:spPr>
+        <p:txBody>
+          <a:bodyPr anchor="t">
+            <a:normAutofit/>
+          </a:bodyPr>
+          <a:lstStyle>
+            <a:lvl1pPr marL="0" indent="0" algn="ctr">
+              <a:buNone/>
+              <a:defRPr sz="1600"/>
+            </a:lvl1pPr>
+            <a:lvl2pPr marL="457200" indent="0">
+              <a:buNone/>
+              <a:defRPr sz="1600"/>
+            </a:lvl2pPr>
+            <a:lvl3pPr marL="914400" indent="0">
+              <a:buNone/>
+              <a:defRPr sz="1600"/>
+            </a:lvl3pPr>
+            <a:lvl4pPr marL="1371600" indent="0">
+              <a:buNone/>
+              <a:defRPr sz="1600"/>
+            </a:lvl4pPr>
+            <a:lvl5pPr marL="1828800" indent="0">
+              <a:buNone/>
+              <a:defRPr sz="1600"/>
+            </a:lvl5pPr>
+            <a:lvl6pPr marL="2286000" indent="0">
+              <a:buNone/>
+              <a:defRPr sz="1600"/>
+            </a:lvl6pPr>
+            <a:lvl7pPr marL="2743200" indent="0">
+              <a:buNone/>
+              <a:defRPr sz="1600"/>
+            </a:lvl7pPr>
+            <a:lvl8pPr marL="3200400" indent="0">
+              <a:buNone/>
+              <a:defRPr sz="1600"/>
+            </a:lvl8pPr>
+            <a:lvl9pPr marL="3657600" indent="0">
+              <a:buNone/>
+              <a:defRPr sz="1600"/>
+            </a:lvl9pPr>
+          </a:lstStyle>
+          <a:p>
+            <a:r>
+              <a:rPr lang="en-US" smtClean="0"/>
+              <a:t>Click icon to add picture</a:t>
+            </a:r>
+            <a:endParaRPr lang="en-US" dirty="0"/>
+          </a:p>
+        </p:txBody>
+      </p:sp>
+      <p:sp>
+        <p:nvSpPr>
+          <p:cNvPr id="24" name="Text Placeholder 3"/>
+          <p:cNvSpPr>
+            <a:spLocks noGrp="1"/>
+          </p:cNvSpPr>
+          <p:nvPr>
+            <p:ph type="body" sz="half" idx="20"/>
+          </p:nvPr>
+        </p:nvSpPr>
+        <p:spPr>
+          <a:xfrm>
+            <a:off x="7124575" y="4827208"/>
+            <a:ext cx="2935997" cy="659189"/>
+          </a:xfrm>
+        </p:spPr>
+        <p:txBody>
+          <a:bodyPr anchor="t">
+            <a:normAutofit/>
+          </a:bodyPr>
+          <a:lstStyle>
+            <a:lvl1pPr marL="0" indent="0">
+              <a:buNone/>
+              <a:defRPr sz="1400"/>
+            </a:lvl1pPr>
+            <a:lvl2pPr marL="457200" indent="0">
+              <a:buNone/>
+              <a:defRPr sz="1200"/>
+            </a:lvl2pPr>
+            <a:lvl3pPr marL="914400" indent="0">
+              <a:buNone/>
+              <a:defRPr sz="1000"/>
+            </a:lvl3pPr>
+            <a:lvl4pPr marL="1371600" indent="0">
+              <a:buNone/>
+              <a:defRPr sz="900"/>
+            </a:lvl4pPr>
+            <a:lvl5pPr marL="1828800" indent="0">
+              <a:buNone/>
+              <a:defRPr sz="900"/>
+            </a:lvl5pPr>
+            <a:lvl6pPr marL="2286000" indent="0">
+              <a:buNone/>
+              <a:defRPr sz="900"/>
+            </a:lvl6pPr>
+            <a:lvl7pPr marL="2743200" indent="0">
+              <a:buNone/>
+              <a:defRPr sz="900"/>
+            </a:lvl7pPr>
+            <a:lvl8pPr marL="3200400" indent="0">
+              <a:buNone/>
+              <a:defRPr sz="900"/>
+            </a:lvl8pPr>
+            <a:lvl9pPr marL="3657600" indent="0">
+              <a:buNone/>
+              <a:defRPr sz="900"/>
+            </a:lvl9pPr>
+          </a:lstStyle>
+          <a:p>
+            <a:pPr lvl="0"/>
+            <a:r>
+              <a:rPr lang="en-US" smtClean="0"/>
+              <a:t>Edit Master text styles</a:t>
+            </a:r>
+          </a:p>
+        </p:txBody>
+      </p:sp>
+      <p:cxnSp>
+        <p:nvCxnSpPr>
+          <p:cNvPr id="17" name="Straight Connector 16"/>
+          <p:cNvCxnSpPr/>
+          <p:nvPr/>
+        </p:nvCxnSpPr>
+        <p:spPr>
+          <a:xfrm>
+            <a:off x="3726142" y="2133600"/>
+            <a:ext cx="0" cy="3962400"/>
+          </a:xfrm>
+          <a:prstGeom prst="line">
+            <a:avLst/>
+          </a:prstGeom>
+          <a:ln w="12700" cmpd="sng">
+            <a:solidFill>
+              <a:schemeClr val="accent1">
+                <a:alpha val="40000"/>
+              </a:schemeClr>
+            </a:solidFill>
+          </a:ln>
+        </p:spPr>
+        <p:style>
+          <a:lnRef idx="2">
+            <a:schemeClr val="accent1"/>
+          </a:lnRef>
+          <a:fillRef idx="0">
+            <a:schemeClr val="accent1"/>
+          </a:fillRef>
+          <a:effectRef idx="1">
+            <a:schemeClr val="accent1"/>
+          </a:effectRef>
+          <a:fontRef idx="minor">
+            <a:schemeClr val="tx1"/>
+          </a:fontRef>
+        </p:style>
+      </p:cxnSp>
+      <p:cxnSp>
+        <p:nvCxnSpPr>
+          <p:cNvPr id="18" name="Straight Connector 17"/>
+          <p:cNvCxnSpPr/>
+          <p:nvPr/>
+        </p:nvCxnSpPr>
+        <p:spPr>
+          <a:xfrm>
+            <a:off x="6962227" y="2133600"/>
+            <a:ext cx="0" cy="3966882"/>
+          </a:xfrm>
+          <a:prstGeom prst="line">
+            <a:avLst/>
+          </a:prstGeom>
+          <a:ln w="12700" cmpd="sng">
+            <a:solidFill>
+              <a:schemeClr val="accent1">
+                <a:alpha val="40000"/>
+              </a:schemeClr>
+            </a:solidFill>
+          </a:ln>
+        </p:spPr>
+        <p:style>
+          <a:lnRef idx="2">
+            <a:schemeClr val="accent1"/>
+          </a:lnRef>
+          <a:fillRef idx="0">
+            <a:schemeClr val="accent1"/>
+          </a:fillRef>
+          <a:effectRef idx="1">
+            <a:schemeClr val="accent1"/>
+          </a:effectRef>
+          <a:fontRef idx="minor">
+            <a:schemeClr val="tx1"/>
+          </a:fontRef>
+        </p:style>
+      </p:cxnSp>
+      <p:sp>
+        <p:nvSpPr>
+          <p:cNvPr id="7" name="Date Placeholder 3"/>
+          <p:cNvSpPr>
+            <a:spLocks noGrp="1"/>
+          </p:cNvSpPr>
+          <p:nvPr>
+            <p:ph type="dt" sz="half" idx="10"/>
+          </p:nvPr>
+        </p:nvSpPr>
+        <p:spPr/>
+        <p:txBody>
+          <a:bodyPr/>
+          <a:lstStyle/>
+          <a:p>
+            <a:fld id="{F475391B-CAB0-48AB-BB3A-E843B1163B6B}" type="datetimeFigureOut">
+              <a:rPr lang="en-ZA" smtClean="0"/>
+              <a:t>2026/09/18</a:t>
+            </a:fld>
+            <a:endParaRPr lang="en-ZA"/>
+          </a:p>
+        </p:txBody>
+      </p:sp>
+      <p:sp>
+        <p:nvSpPr>
+          <p:cNvPr id="4" name="Footer Placeholder 4"/>
+          <p:cNvSpPr>
+            <a:spLocks noGrp="1"/>
+          </p:cNvSpPr>
+          <p:nvPr>
+            <p:ph type="ftr" sz="quarter" idx="11"/>
+          </p:nvPr>
+        </p:nvSpPr>
+        <p:spPr/>
+        <p:txBody>
+          <a:bodyPr/>
+          <a:lstStyle/>
+          <a:p>
+            <a:endParaRPr lang="en-ZA"/>
+          </a:p>
+        </p:txBody>
+      </p:sp>
+      <p:sp>
+        <p:nvSpPr>
+          <p:cNvPr id="6" name="Slide Number Placeholder 5"/>
+          <p:cNvSpPr>
+            <a:spLocks noGrp="1"/>
+          </p:cNvSpPr>
+          <p:nvPr>
+            <p:ph type="sldNum" sz="quarter" idx="12"/>
+          </p:nvPr>
+        </p:nvSpPr>
+        <p:spPr/>
+        <p:txBody>
+          <a:bodyPr/>
+          <a:lstStyle/>
+          <a:p>
+            <a:fld id="{4D7B34C8-07E8-487E-933E-E1E99116B26C}" type="slidenum">
+              <a:rPr lang="en-ZA" smtClean="0"/>
+              <a:t>‹#›</a:t>
+            </a:fld>
+            <a:endParaRPr lang="en-ZA"/>
+          </a:p>
+        </p:txBody>
+      </p:sp>
+    </p:spTree>
+    <p:extLst>
+      <p:ext uri="{BB962C8B-B14F-4D97-AF65-F5344CB8AC3E}">
+        <p14:creationId xmlns:p14="http://schemas.microsoft.com/office/powerpoint/2010/main" val="1785740220"/>
+      </p:ext>
+    </p:extLst>
+  </p:cSld>
+  <p:clrMapOvr>
+    <a:masterClrMapping/>
+  </p:clrMapOvr>
+</p:sldLayout>
+</file>
+
+<file path=ppt/slideLayouts/slideLayout16.xml><?xml version="1.0" encoding="utf-8"?>
 <p:sldLayout xmlns:a="http://schemas.openxmlformats.org/drawingml/2006/main" xmlns:r="http://schemas.openxmlformats.org/officeDocument/2006/relationships" xmlns:p="http://schemas.openxmlformats.org/presentationml/2006/main" type="vertTx" preserve="1">
   <p:cSld name="Title and Vertical Text">
     <p:spTree>
@@ -339,7 +2922,7 @@
               <a:rPr lang="en-US" smtClean="0"/>
               <a:t>Click to edit Master title style</a:t>
             </a:r>
-            <a:endParaRPr lang="en-ZA"/>
+            <a:endParaRPr lang="en-US" dirty="0"/>
           </a:p>
         </p:txBody>
       </p:sp>
@@ -355,7 +2938,7 @@
         </p:nvSpPr>
         <p:spPr/>
         <p:txBody>
-          <a:bodyPr vert="eaVert"/>
+          <a:bodyPr vert="eaVert" anchor="t" anchorCtr="0"/>
           <a:lstStyle/>
           <a:p>
             <a:pPr lvl="0"/>
@@ -391,7 +2974,7 @@
               <a:rPr lang="en-US" smtClean="0"/>
               <a:t>Fifth level</a:t>
             </a:r>
-            <a:endParaRPr lang="en-ZA"/>
+            <a:endParaRPr lang="en-US" dirty="0"/>
           </a:p>
         </p:txBody>
       </p:sp>
@@ -412,7 +2995,7 @@
           <a:p>
             <a:fld id="{F475391B-CAB0-48AB-BB3A-E843B1163B6B}" type="datetimeFigureOut">
               <a:rPr lang="en-ZA" smtClean="0"/>
-              <a:t>2026/09/17</a:t>
+              <a:t>2026/09/18</a:t>
             </a:fld>
             <a:endParaRPr lang="en-ZA"/>
           </a:p>
@@ -463,7 +3046,7 @@
     </p:spTree>
     <p:extLst>
       <p:ext uri="{BB962C8B-B14F-4D97-AF65-F5344CB8AC3E}">
-        <p14:creationId xmlns:p14="http://schemas.microsoft.com/office/powerpoint/2010/main" val="1844575027"/>
+        <p14:creationId xmlns:p14="http://schemas.microsoft.com/office/powerpoint/2010/main" val="4177778087"/>
       </p:ext>
     </p:extLst>
   </p:cSld>
@@ -473,7 +3056,7 @@
 </p:sldLayout>
 </file>
 
-<file path=ppt/slideLayouts/slideLayout11.xml><?xml version="1.0" encoding="utf-8"?>
+<file path=ppt/slideLayouts/slideLayout17.xml><?xml version="1.0" encoding="utf-8"?>
 <p:sldLayout xmlns:a="http://schemas.openxmlformats.org/drawingml/2006/main" xmlns:r="http://schemas.openxmlformats.org/officeDocument/2006/relationships" xmlns:p="http://schemas.openxmlformats.org/presentationml/2006/main" type="vertTitleAndTx" preserve="1">
   <p:cSld name="Vertical Title and Text">
     <p:spTree>
@@ -502,19 +3085,19 @@
         </p:nvSpPr>
         <p:spPr>
           <a:xfrm>
-            <a:off x="8724900" y="365125"/>
-            <a:ext cx="2628900" cy="5811838"/>
+            <a:off x="8304212" y="430213"/>
+            <a:ext cx="1752601" cy="5826125"/>
           </a:xfrm>
         </p:spPr>
         <p:txBody>
-          <a:bodyPr vert="eaVert"/>
+          <a:bodyPr vert="eaVert" anchor="b" anchorCtr="0"/>
           <a:lstStyle/>
           <a:p>
             <a:r>
               <a:rPr lang="en-US" smtClean="0"/>
               <a:t>Click to edit Master title style</a:t>
             </a:r>
-            <a:endParaRPr lang="en-ZA"/>
+            <a:endParaRPr lang="en-US" dirty="0"/>
           </a:p>
         </p:txBody>
       </p:sp>
@@ -530,8 +3113,8 @@
         </p:nvSpPr>
         <p:spPr>
           <a:xfrm>
-            <a:off x="838200" y="365125"/>
-            <a:ext cx="7734300" cy="5811838"/>
+            <a:off x="652463" y="887414"/>
+            <a:ext cx="7423149" cy="5368924"/>
           </a:xfrm>
         </p:spPr>
         <p:txBody>
@@ -571,7 +3154,7 @@
               <a:rPr lang="en-US" smtClean="0"/>
               <a:t>Fifth level</a:t>
             </a:r>
-            <a:endParaRPr lang="en-ZA"/>
+            <a:endParaRPr lang="en-US" dirty="0"/>
           </a:p>
         </p:txBody>
       </p:sp>
@@ -592,7 +3175,7 @@
           <a:p>
             <a:fld id="{F475391B-CAB0-48AB-BB3A-E843B1163B6B}" type="datetimeFigureOut">
               <a:rPr lang="en-ZA" smtClean="0"/>
-              <a:t>2026/09/17</a:t>
+              <a:t>2026/09/18</a:t>
             </a:fld>
             <a:endParaRPr lang="en-ZA"/>
           </a:p>
@@ -643,7 +3226,7 @@
     </p:spTree>
     <p:extLst>
       <p:ext uri="{BB962C8B-B14F-4D97-AF65-F5344CB8AC3E}">
-        <p14:creationId xmlns:p14="http://schemas.microsoft.com/office/powerpoint/2010/main" val="2078751886"/>
+        <p14:creationId xmlns:p14="http://schemas.microsoft.com/office/powerpoint/2010/main" val="1089027362"/>
       </p:ext>
     </p:extLst>
   </p:cSld>
@@ -689,7 +3272,7 @@
               <a:rPr lang="en-US" smtClean="0"/>
               <a:t>Click to edit Master title style</a:t>
             </a:r>
-            <a:endParaRPr lang="en-ZA"/>
+            <a:endParaRPr lang="en-US" dirty="0"/>
           </a:p>
         </p:txBody>
       </p:sp>
@@ -741,7 +3324,7 @@
               <a:rPr lang="en-US" smtClean="0"/>
               <a:t>Fifth level</a:t>
             </a:r>
-            <a:endParaRPr lang="en-ZA"/>
+            <a:endParaRPr lang="en-US" dirty="0"/>
           </a:p>
         </p:txBody>
       </p:sp>
@@ -762,7 +3345,7 @@
           <a:p>
             <a:fld id="{F475391B-CAB0-48AB-BB3A-E843B1163B6B}" type="datetimeFigureOut">
               <a:rPr lang="en-ZA" smtClean="0"/>
-              <a:t>2026/09/17</a:t>
+              <a:t>2026/09/18</a:t>
             </a:fld>
             <a:endParaRPr lang="en-ZA"/>
           </a:p>
@@ -813,7 +3396,7 @@
     </p:spTree>
     <p:extLst>
       <p:ext uri="{BB962C8B-B14F-4D97-AF65-F5344CB8AC3E}">
-        <p14:creationId xmlns:p14="http://schemas.microsoft.com/office/powerpoint/2010/main" val="775806205"/>
+        <p14:creationId xmlns:p14="http://schemas.microsoft.com/office/powerpoint/2010/main" val="671499409"/>
       </p:ext>
     </p:extLst>
   </p:cSld>
@@ -852,15 +3435,15 @@
         </p:nvSpPr>
         <p:spPr>
           <a:xfrm>
-            <a:off x="831850" y="1709738"/>
-            <a:ext cx="10515600" cy="2852737"/>
+            <a:off x="1154956" y="2861733"/>
+            <a:ext cx="8825657" cy="1915647"/>
           </a:xfrm>
         </p:spPr>
         <p:txBody>
           <a:bodyPr anchor="b"/>
           <a:lstStyle>
-            <a:lvl1pPr>
-              <a:defRPr sz="6000"/>
+            <a:lvl1pPr algn="l">
+              <a:defRPr sz="4000" b="0" cap="none"/>
             </a:lvl1pPr>
           </a:lstStyle>
           <a:p>
@@ -868,7 +3451,7 @@
               <a:rPr lang="en-US" smtClean="0"/>
               <a:t>Click to edit Master title style</a:t>
             </a:r>
-            <a:endParaRPr lang="en-ZA"/>
+            <a:endParaRPr lang="en-US" dirty="0"/>
           </a:p>
         </p:txBody>
       </p:sp>
@@ -884,26 +3467,24 @@
         </p:nvSpPr>
         <p:spPr>
           <a:xfrm>
-            <a:off x="831850" y="4589463"/>
-            <a:ext cx="10515600" cy="1500187"/>
+            <a:off x="1154955" y="4777381"/>
+            <a:ext cx="8825658" cy="860400"/>
           </a:xfrm>
         </p:spPr>
         <p:txBody>
-          <a:bodyPr/>
+          <a:bodyPr anchor="t"/>
           <a:lstStyle>
-            <a:lvl1pPr marL="0" indent="0">
-              <a:buNone/>
-              <a:defRPr sz="2400">
+            <a:lvl1pPr marL="0" indent="0" algn="l">
+              <a:buNone/>
+              <a:defRPr sz="2000" cap="all">
                 <a:solidFill>
-                  <a:schemeClr val="tx1">
-                    <a:tint val="75000"/>
-                  </a:schemeClr>
+                  <a:schemeClr val="accent1"/>
                 </a:solidFill>
               </a:defRPr>
             </a:lvl1pPr>
             <a:lvl2pPr marL="457200" indent="0">
               <a:buNone/>
-              <a:defRPr sz="2000">
+              <a:defRPr sz="1800">
                 <a:solidFill>
                   <a:schemeClr val="tx1">
                     <a:tint val="75000"/>
@@ -913,7 +3494,7 @@
             </a:lvl2pPr>
             <a:lvl3pPr marL="914400" indent="0">
               <a:buNone/>
-              <a:defRPr sz="1800">
+              <a:defRPr sz="1600">
                 <a:solidFill>
                   <a:schemeClr val="tx1">
                     <a:tint val="75000"/>
@@ -923,7 +3504,7 @@
             </a:lvl3pPr>
             <a:lvl4pPr marL="1371600" indent="0">
               <a:buNone/>
-              <a:defRPr sz="1600">
+              <a:defRPr sz="1400">
                 <a:solidFill>
                   <a:schemeClr val="tx1">
                     <a:tint val="75000"/>
@@ -933,7 +3514,7 @@
             </a:lvl4pPr>
             <a:lvl5pPr marL="1828800" indent="0">
               <a:buNone/>
-              <a:defRPr sz="1600">
+              <a:defRPr sz="1400">
                 <a:solidFill>
                   <a:schemeClr val="tx1">
                     <a:tint val="75000"/>
@@ -943,7 +3524,7 @@
             </a:lvl5pPr>
             <a:lvl6pPr marL="2286000" indent="0">
               <a:buNone/>
-              <a:defRPr sz="1600">
+              <a:defRPr sz="1400">
                 <a:solidFill>
                   <a:schemeClr val="tx1">
                     <a:tint val="75000"/>
@@ -953,7 +3534,7 @@
             </a:lvl6pPr>
             <a:lvl7pPr marL="2743200" indent="0">
               <a:buNone/>
-              <a:defRPr sz="1600">
+              <a:defRPr sz="1400">
                 <a:solidFill>
                   <a:schemeClr val="tx1">
                     <a:tint val="75000"/>
@@ -963,7 +3544,7 @@
             </a:lvl7pPr>
             <a:lvl8pPr marL="3200400" indent="0">
               <a:buNone/>
-              <a:defRPr sz="1600">
+              <a:defRPr sz="1400">
                 <a:solidFill>
                   <a:schemeClr val="tx1">
                     <a:tint val="75000"/>
@@ -973,7 +3554,7 @@
             </a:lvl8pPr>
             <a:lvl9pPr marL="3657600" indent="0">
               <a:buNone/>
-              <a:defRPr sz="1600">
+              <a:defRPr sz="1400">
                 <a:solidFill>
                   <a:schemeClr val="tx1">
                     <a:tint val="75000"/>
@@ -1008,7 +3589,7 @@
           <a:p>
             <a:fld id="{F475391B-CAB0-48AB-BB3A-E843B1163B6B}" type="datetimeFigureOut">
               <a:rPr lang="en-ZA" smtClean="0"/>
-              <a:t>2026/09/17</a:t>
+              <a:t>2026/09/18</a:t>
             </a:fld>
             <a:endParaRPr lang="en-ZA"/>
           </a:p>
@@ -1059,7 +3640,7 @@
     </p:spTree>
     <p:extLst>
       <p:ext uri="{BB962C8B-B14F-4D97-AF65-F5344CB8AC3E}">
-        <p14:creationId xmlns:p14="http://schemas.microsoft.com/office/powerpoint/2010/main" val="2609398772"/>
+        <p14:creationId xmlns:p14="http://schemas.microsoft.com/office/powerpoint/2010/main" val="1587901161"/>
       </p:ext>
     </p:extLst>
   </p:cSld>
@@ -1105,7 +3686,7 @@
               <a:rPr lang="en-US" smtClean="0"/>
               <a:t>Click to edit Master title style</a:t>
             </a:r>
-            <a:endParaRPr lang="en-ZA"/>
+            <a:endParaRPr lang="en-US" dirty="0"/>
           </a:p>
         </p:txBody>
       </p:sp>
@@ -1121,13 +3702,43 @@
         </p:nvSpPr>
         <p:spPr>
           <a:xfrm>
-            <a:off x="838200" y="1825625"/>
-            <a:ext cx="5181600" cy="4351338"/>
+            <a:off x="1103312" y="2060575"/>
+            <a:ext cx="4396339" cy="4195763"/>
           </a:xfrm>
         </p:spPr>
         <p:txBody>
-          <a:bodyPr/>
-          <a:lstStyle/>
+          <a:bodyPr>
+            <a:normAutofit/>
+          </a:bodyPr>
+          <a:lstStyle>
+            <a:lvl1pPr>
+              <a:defRPr sz="1800"/>
+            </a:lvl1pPr>
+            <a:lvl2pPr>
+              <a:defRPr sz="1600"/>
+            </a:lvl2pPr>
+            <a:lvl3pPr>
+              <a:defRPr sz="1400"/>
+            </a:lvl3pPr>
+            <a:lvl4pPr>
+              <a:defRPr sz="1200"/>
+            </a:lvl4pPr>
+            <a:lvl5pPr>
+              <a:defRPr sz="1200"/>
+            </a:lvl5pPr>
+            <a:lvl6pPr>
+              <a:defRPr sz="1200"/>
+            </a:lvl6pPr>
+            <a:lvl7pPr>
+              <a:defRPr sz="1200"/>
+            </a:lvl7pPr>
+            <a:lvl8pPr>
+              <a:defRPr sz="1200"/>
+            </a:lvl8pPr>
+            <a:lvl9pPr>
+              <a:defRPr sz="1200"/>
+            </a:lvl9pPr>
+          </a:lstStyle>
           <a:p>
             <a:pPr lvl="0"/>
             <a:r>
@@ -1162,7 +3773,7 @@
               <a:rPr lang="en-US" smtClean="0"/>
               <a:t>Fifth level</a:t>
             </a:r>
-            <a:endParaRPr lang="en-ZA"/>
+            <a:endParaRPr lang="en-US" dirty="0"/>
           </a:p>
         </p:txBody>
       </p:sp>
@@ -1178,13 +3789,43 @@
         </p:nvSpPr>
         <p:spPr>
           <a:xfrm>
-            <a:off x="6172200" y="1825625"/>
-            <a:ext cx="5181600" cy="4351338"/>
+            <a:off x="5654493" y="2056092"/>
+            <a:ext cx="4396341" cy="4200245"/>
           </a:xfrm>
         </p:spPr>
         <p:txBody>
-          <a:bodyPr/>
-          <a:lstStyle/>
+          <a:bodyPr>
+            <a:normAutofit/>
+          </a:bodyPr>
+          <a:lstStyle>
+            <a:lvl1pPr>
+              <a:defRPr sz="1800"/>
+            </a:lvl1pPr>
+            <a:lvl2pPr>
+              <a:defRPr sz="1600"/>
+            </a:lvl2pPr>
+            <a:lvl3pPr>
+              <a:defRPr sz="1400"/>
+            </a:lvl3pPr>
+            <a:lvl4pPr>
+              <a:defRPr sz="1200"/>
+            </a:lvl4pPr>
+            <a:lvl5pPr>
+              <a:defRPr sz="1200"/>
+            </a:lvl5pPr>
+            <a:lvl6pPr>
+              <a:defRPr sz="1200"/>
+            </a:lvl6pPr>
+            <a:lvl7pPr>
+              <a:defRPr sz="1200"/>
+            </a:lvl7pPr>
+            <a:lvl8pPr>
+              <a:defRPr sz="1200"/>
+            </a:lvl8pPr>
+            <a:lvl9pPr>
+              <a:defRPr sz="1200"/>
+            </a:lvl9pPr>
+          </a:lstStyle>
           <a:p>
             <a:pPr lvl="0"/>
             <a:r>
@@ -1219,7 +3860,7 @@
               <a:rPr lang="en-US" smtClean="0"/>
               <a:t>Fifth level</a:t>
             </a:r>
-            <a:endParaRPr lang="en-ZA"/>
+            <a:endParaRPr lang="en-US" dirty="0"/>
           </a:p>
         </p:txBody>
       </p:sp>
@@ -1240,7 +3881,7 @@
           <a:p>
             <a:fld id="{F475391B-CAB0-48AB-BB3A-E843B1163B6B}" type="datetimeFigureOut">
               <a:rPr lang="en-ZA" smtClean="0"/>
-              <a:t>2026/09/17</a:t>
+              <a:t>2026/09/18</a:t>
             </a:fld>
             <a:endParaRPr lang="en-ZA"/>
           </a:p>
@@ -1291,7 +3932,7 @@
     </p:spTree>
     <p:extLst>
       <p:ext uri="{BB962C8B-B14F-4D97-AF65-F5344CB8AC3E}">
-        <p14:creationId xmlns:p14="http://schemas.microsoft.com/office/powerpoint/2010/main" val="1025666"/>
+        <p14:creationId xmlns:p14="http://schemas.microsoft.com/office/powerpoint/2010/main" val="1534429287"/>
       </p:ext>
     </p:extLst>
   </p:cSld>
@@ -1328,46 +3969,51 @@
             <p:ph type="title"/>
           </p:nvPr>
         </p:nvSpPr>
+        <p:spPr/>
+        <p:txBody>
+          <a:bodyPr/>
+          <a:lstStyle>
+            <a:lvl1pPr>
+              <a:defRPr/>
+            </a:lvl1pPr>
+          </a:lstStyle>
+          <a:p>
+            <a:r>
+              <a:rPr lang="en-US" smtClean="0"/>
+              <a:t>Click to edit Master title style</a:t>
+            </a:r>
+            <a:endParaRPr lang="en-US" dirty="0"/>
+          </a:p>
+        </p:txBody>
+      </p:sp>
+      <p:sp>
+        <p:nvSpPr>
+          <p:cNvPr id="3" name="Text Placeholder 2"/>
+          <p:cNvSpPr>
+            <a:spLocks noGrp="1"/>
+          </p:cNvSpPr>
+          <p:nvPr>
+            <p:ph type="body" idx="1"/>
+          </p:nvPr>
+        </p:nvSpPr>
         <p:spPr>
           <a:xfrm>
-            <a:off x="839788" y="365125"/>
-            <a:ext cx="10515600" cy="1325563"/>
+            <a:off x="1103313" y="1905000"/>
+            <a:ext cx="4396338" cy="576262"/>
           </a:xfrm>
         </p:spPr>
         <p:txBody>
-          <a:bodyPr/>
-          <a:lstStyle/>
-          <a:p>
-            <a:r>
-              <a:rPr lang="en-US" smtClean="0"/>
-              <a:t>Click to edit Master title style</a:t>
-            </a:r>
-            <a:endParaRPr lang="en-ZA"/>
-          </a:p>
-        </p:txBody>
-      </p:sp>
-      <p:sp>
-        <p:nvSpPr>
-          <p:cNvPr id="3" name="Text Placeholder 2"/>
-          <p:cNvSpPr>
-            <a:spLocks noGrp="1"/>
-          </p:cNvSpPr>
-          <p:nvPr>
-            <p:ph type="body" idx="1"/>
-          </p:nvPr>
-        </p:nvSpPr>
-        <p:spPr>
-          <a:xfrm>
-            <a:off x="839788" y="1681163"/>
-            <a:ext cx="5157787" cy="823912"/>
-          </a:xfrm>
-        </p:spPr>
-        <p:txBody>
-          <a:bodyPr anchor="b"/>
+          <a:bodyPr anchor="b">
+            <a:noAutofit/>
+          </a:bodyPr>
           <a:lstStyle>
             <a:lvl1pPr marL="0" indent="0">
               <a:buNone/>
-              <a:defRPr sz="2400" b="1"/>
+              <a:defRPr sz="2400" b="0">
+                <a:solidFill>
+                  <a:schemeClr val="accent1"/>
+                </a:solidFill>
+              </a:defRPr>
             </a:lvl1pPr>
             <a:lvl2pPr marL="457200" indent="0">
               <a:buNone/>
@@ -1423,13 +4069,43 @@
         </p:nvSpPr>
         <p:spPr>
           <a:xfrm>
-            <a:off x="839788" y="2505075"/>
-            <a:ext cx="5157787" cy="3684588"/>
+            <a:off x="1103312" y="2514600"/>
+            <a:ext cx="4396339" cy="3741738"/>
           </a:xfrm>
         </p:spPr>
         <p:txBody>
-          <a:bodyPr/>
-          <a:lstStyle/>
+          <a:bodyPr>
+            <a:normAutofit/>
+          </a:bodyPr>
+          <a:lstStyle>
+            <a:lvl1pPr>
+              <a:defRPr sz="1800"/>
+            </a:lvl1pPr>
+            <a:lvl2pPr>
+              <a:defRPr sz="1600"/>
+            </a:lvl2pPr>
+            <a:lvl3pPr>
+              <a:defRPr sz="1400"/>
+            </a:lvl3pPr>
+            <a:lvl4pPr>
+              <a:defRPr sz="1200"/>
+            </a:lvl4pPr>
+            <a:lvl5pPr>
+              <a:defRPr sz="1200"/>
+            </a:lvl5pPr>
+            <a:lvl6pPr>
+              <a:defRPr sz="1200"/>
+            </a:lvl6pPr>
+            <a:lvl7pPr>
+              <a:defRPr sz="1200"/>
+            </a:lvl7pPr>
+            <a:lvl8pPr>
+              <a:defRPr sz="1200"/>
+            </a:lvl8pPr>
+            <a:lvl9pPr>
+              <a:defRPr sz="1200"/>
+            </a:lvl9pPr>
+          </a:lstStyle>
           <a:p>
             <a:pPr lvl="0"/>
             <a:r>
@@ -1464,7 +4140,7 @@
               <a:rPr lang="en-US" smtClean="0"/>
               <a:t>Fifth level</a:t>
             </a:r>
-            <a:endParaRPr lang="en-ZA"/>
+            <a:endParaRPr lang="en-US" dirty="0"/>
           </a:p>
         </p:txBody>
       </p:sp>
@@ -1480,16 +4156,22 @@
         </p:nvSpPr>
         <p:spPr>
           <a:xfrm>
-            <a:off x="6172200" y="1681163"/>
-            <a:ext cx="5183188" cy="823912"/>
+            <a:off x="5654495" y="1905000"/>
+            <a:ext cx="4396339" cy="576262"/>
           </a:xfrm>
         </p:spPr>
         <p:txBody>
-          <a:bodyPr anchor="b"/>
+          <a:bodyPr anchor="b">
+            <a:noAutofit/>
+          </a:bodyPr>
           <a:lstStyle>
             <a:lvl1pPr marL="0" indent="0">
               <a:buNone/>
-              <a:defRPr sz="2400" b="1"/>
+              <a:defRPr sz="2400" b="0">
+                <a:solidFill>
+                  <a:schemeClr val="accent1"/>
+                </a:solidFill>
+              </a:defRPr>
             </a:lvl1pPr>
             <a:lvl2pPr marL="457200" indent="0">
               <a:buNone/>
@@ -1545,13 +4227,43 @@
         </p:nvSpPr>
         <p:spPr>
           <a:xfrm>
-            <a:off x="6172200" y="2505075"/>
-            <a:ext cx="5183188" cy="3684588"/>
+            <a:off x="5654495" y="2514600"/>
+            <a:ext cx="4396339" cy="3741738"/>
           </a:xfrm>
         </p:spPr>
         <p:txBody>
-          <a:bodyPr/>
-          <a:lstStyle/>
+          <a:bodyPr>
+            <a:normAutofit/>
+          </a:bodyPr>
+          <a:lstStyle>
+            <a:lvl1pPr>
+              <a:defRPr sz="1800"/>
+            </a:lvl1pPr>
+            <a:lvl2pPr>
+              <a:defRPr sz="1600"/>
+            </a:lvl2pPr>
+            <a:lvl3pPr>
+              <a:defRPr sz="1400"/>
+            </a:lvl3pPr>
+            <a:lvl4pPr>
+              <a:defRPr sz="1200"/>
+            </a:lvl4pPr>
+            <a:lvl5pPr>
+              <a:defRPr sz="1200"/>
+            </a:lvl5pPr>
+            <a:lvl6pPr>
+              <a:defRPr sz="1200"/>
+            </a:lvl6pPr>
+            <a:lvl7pPr>
+              <a:defRPr sz="1200"/>
+            </a:lvl7pPr>
+            <a:lvl8pPr>
+              <a:defRPr sz="1200"/>
+            </a:lvl8pPr>
+            <a:lvl9pPr>
+              <a:defRPr sz="1200"/>
+            </a:lvl9pPr>
+          </a:lstStyle>
           <a:p>
             <a:pPr lvl="0"/>
             <a:r>
@@ -1586,7 +4298,7 @@
               <a:rPr lang="en-US" smtClean="0"/>
               <a:t>Fifth level</a:t>
             </a:r>
-            <a:endParaRPr lang="en-ZA"/>
+            <a:endParaRPr lang="en-US" dirty="0"/>
           </a:p>
         </p:txBody>
       </p:sp>
@@ -1607,7 +4319,7 @@
           <a:p>
             <a:fld id="{F475391B-CAB0-48AB-BB3A-E843B1163B6B}" type="datetimeFigureOut">
               <a:rPr lang="en-ZA" smtClean="0"/>
-              <a:t>2026/09/17</a:t>
+              <a:t>2026/09/18</a:t>
             </a:fld>
             <a:endParaRPr lang="en-ZA"/>
           </a:p>
@@ -1658,7 +4370,7 @@
     </p:spTree>
     <p:extLst>
       <p:ext uri="{BB962C8B-B14F-4D97-AF65-F5344CB8AC3E}">
-        <p14:creationId xmlns:p14="http://schemas.microsoft.com/office/powerpoint/2010/main" val="883048970"/>
+        <p14:creationId xmlns:p14="http://schemas.microsoft.com/office/powerpoint/2010/main" val="4189635248"/>
       </p:ext>
     </p:extLst>
   </p:cSld>
@@ -1704,13 +4416,13 @@
               <a:rPr lang="en-US" smtClean="0"/>
               <a:t>Click to edit Master title style</a:t>
             </a:r>
-            <a:endParaRPr lang="en-ZA"/>
-          </a:p>
-        </p:txBody>
-      </p:sp>
-      <p:sp>
-        <p:nvSpPr>
-          <p:cNvPr id="3" name="Date Placeholder 2"/>
+            <a:endParaRPr lang="en-US" dirty="0"/>
+          </a:p>
+        </p:txBody>
+      </p:sp>
+      <p:sp>
+        <p:nvSpPr>
+          <p:cNvPr id="7" name="Date Placeholder 2"/>
           <p:cNvSpPr>
             <a:spLocks noGrp="1"/>
           </p:cNvSpPr>
@@ -1725,7 +4437,7 @@
           <a:p>
             <a:fld id="{F475391B-CAB0-48AB-BB3A-E843B1163B6B}" type="datetimeFigureOut">
               <a:rPr lang="en-ZA" smtClean="0"/>
-              <a:t>2026/09/17</a:t>
+              <a:t>2026/09/18</a:t>
             </a:fld>
             <a:endParaRPr lang="en-ZA"/>
           </a:p>
@@ -1733,7 +4445,7 @@
       </p:sp>
       <p:sp>
         <p:nvSpPr>
-          <p:cNvPr id="4" name="Footer Placeholder 3"/>
+          <p:cNvPr id="5" name="Footer Placeholder 3"/>
           <p:cNvSpPr>
             <a:spLocks noGrp="1"/>
           </p:cNvSpPr>
@@ -1752,7 +4464,7 @@
       </p:sp>
       <p:sp>
         <p:nvSpPr>
-          <p:cNvPr id="5" name="Slide Number Placeholder 4"/>
+          <p:cNvPr id="6" name="Slide Number Placeholder 4"/>
           <p:cNvSpPr>
             <a:spLocks noGrp="1"/>
           </p:cNvSpPr>
@@ -1776,7 +4488,7 @@
     </p:spTree>
     <p:extLst>
       <p:ext uri="{BB962C8B-B14F-4D97-AF65-F5344CB8AC3E}">
-        <p14:creationId xmlns:p14="http://schemas.microsoft.com/office/powerpoint/2010/main" val="3552092355"/>
+        <p14:creationId xmlns:p14="http://schemas.microsoft.com/office/powerpoint/2010/main" val="160726579"/>
       </p:ext>
     </p:extLst>
   </p:cSld>
@@ -1805,7 +4517,7 @@
       </p:grpSpPr>
       <p:sp>
         <p:nvSpPr>
-          <p:cNvPr id="2" name="Date Placeholder 1"/>
+          <p:cNvPr id="7" name="Date Placeholder 1"/>
           <p:cNvSpPr>
             <a:spLocks noGrp="1"/>
           </p:cNvSpPr>
@@ -1820,7 +4532,7 @@
           <a:p>
             <a:fld id="{F475391B-CAB0-48AB-BB3A-E843B1163B6B}" type="datetimeFigureOut">
               <a:rPr lang="en-ZA" smtClean="0"/>
-              <a:t>2026/09/17</a:t>
+              <a:t>2026/09/18</a:t>
             </a:fld>
             <a:endParaRPr lang="en-ZA"/>
           </a:p>
@@ -1828,7 +4540,7 @@
       </p:sp>
       <p:sp>
         <p:nvSpPr>
-          <p:cNvPr id="3" name="Footer Placeholder 2"/>
+          <p:cNvPr id="5" name="Footer Placeholder 2"/>
           <p:cNvSpPr>
             <a:spLocks noGrp="1"/>
           </p:cNvSpPr>
@@ -1847,7 +4559,7 @@
       </p:sp>
       <p:sp>
         <p:nvSpPr>
-          <p:cNvPr id="4" name="Slide Number Placeholder 3"/>
+          <p:cNvPr id="6" name="Slide Number Placeholder 3"/>
           <p:cNvSpPr>
             <a:spLocks noGrp="1"/>
           </p:cNvSpPr>
@@ -1871,7 +4583,7 @@
     </p:spTree>
     <p:extLst>
       <p:ext uri="{BB962C8B-B14F-4D97-AF65-F5344CB8AC3E}">
-        <p14:creationId xmlns:p14="http://schemas.microsoft.com/office/powerpoint/2010/main" val="1599319285"/>
+        <p14:creationId xmlns:p14="http://schemas.microsoft.com/office/powerpoint/2010/main" val="1737889754"/>
       </p:ext>
     </p:extLst>
   </p:cSld>
@@ -1910,15 +4622,15 @@
         </p:nvSpPr>
         <p:spPr>
           <a:xfrm>
-            <a:off x="839788" y="457200"/>
-            <a:ext cx="3932237" cy="1600200"/>
+            <a:off x="1154954" y="1447800"/>
+            <a:ext cx="3401064" cy="1447800"/>
           </a:xfrm>
         </p:spPr>
         <p:txBody>
           <a:bodyPr anchor="b"/>
           <a:lstStyle>
-            <a:lvl1pPr>
-              <a:defRPr sz="3200"/>
+            <a:lvl1pPr algn="l">
+              <a:defRPr sz="2400" b="0"/>
             </a:lvl1pPr>
           </a:lstStyle>
           <a:p>
@@ -1926,7 +4638,7 @@
               <a:rPr lang="en-US" smtClean="0"/>
               <a:t>Click to edit Master title style</a:t>
             </a:r>
-            <a:endParaRPr lang="en-ZA"/>
+            <a:endParaRPr lang="en-US" dirty="0"/>
           </a:p>
         </p:txBody>
       </p:sp>
@@ -1942,39 +4654,41 @@
         </p:nvSpPr>
         <p:spPr>
           <a:xfrm>
-            <a:off x="5183188" y="987425"/>
-            <a:ext cx="6172200" cy="4873625"/>
+            <a:off x="4784616" y="1447800"/>
+            <a:ext cx="5195997" cy="4572000"/>
           </a:xfrm>
         </p:spPr>
         <p:txBody>
-          <a:bodyPr/>
+          <a:bodyPr anchor="ctr">
+            <a:normAutofit/>
+          </a:bodyPr>
           <a:lstStyle>
             <a:lvl1pPr>
-              <a:defRPr sz="3200"/>
+              <a:defRPr sz="2000"/>
             </a:lvl1pPr>
             <a:lvl2pPr>
-              <a:defRPr sz="2800"/>
+              <a:defRPr sz="1800"/>
             </a:lvl2pPr>
             <a:lvl3pPr>
-              <a:defRPr sz="2400"/>
+              <a:defRPr sz="1600"/>
             </a:lvl3pPr>
             <a:lvl4pPr>
-              <a:defRPr sz="2000"/>
+              <a:defRPr sz="1400"/>
             </a:lvl4pPr>
             <a:lvl5pPr>
-              <a:defRPr sz="2000"/>
+              <a:defRPr sz="1400"/>
             </a:lvl5pPr>
             <a:lvl6pPr>
-              <a:defRPr sz="2000"/>
+              <a:defRPr sz="1400"/>
             </a:lvl6pPr>
             <a:lvl7pPr>
-              <a:defRPr sz="2000"/>
+              <a:defRPr sz="1400"/>
             </a:lvl7pPr>
             <a:lvl8pPr>
-              <a:defRPr sz="2000"/>
+              <a:defRPr sz="1400"/>
             </a:lvl8pPr>
             <a:lvl9pPr>
-              <a:defRPr sz="2000"/>
+              <a:defRPr sz="1400"/>
             </a:lvl9pPr>
           </a:lstStyle>
           <a:p>
@@ -2011,7 +4725,7 @@
               <a:rPr lang="en-US" smtClean="0"/>
               <a:t>Fifth level</a:t>
             </a:r>
-            <a:endParaRPr lang="en-ZA"/>
+            <a:endParaRPr lang="en-US" dirty="0"/>
           </a:p>
         </p:txBody>
       </p:sp>
@@ -2027,8 +4741,8 @@
         </p:nvSpPr>
         <p:spPr>
           <a:xfrm>
-            <a:off x="839788" y="2057400"/>
-            <a:ext cx="3932237" cy="3811588"/>
+            <a:off x="1154954" y="3129280"/>
+            <a:ext cx="3401063" cy="2895599"/>
           </a:xfrm>
         </p:spPr>
         <p:txBody>
@@ -2036,39 +4750,39 @@
           <a:lstStyle>
             <a:lvl1pPr marL="0" indent="0">
               <a:buNone/>
-              <a:defRPr sz="1600"/>
+              <a:defRPr sz="1400"/>
             </a:lvl1pPr>
             <a:lvl2pPr marL="457200" indent="0">
               <a:buNone/>
-              <a:defRPr sz="1400"/>
+              <a:defRPr sz="1200"/>
             </a:lvl2pPr>
             <a:lvl3pPr marL="914400" indent="0">
               <a:buNone/>
-              <a:defRPr sz="1200"/>
+              <a:defRPr sz="1000"/>
             </a:lvl3pPr>
             <a:lvl4pPr marL="1371600" indent="0">
               <a:buNone/>
-              <a:defRPr sz="1000"/>
+              <a:defRPr sz="900"/>
             </a:lvl4pPr>
             <a:lvl5pPr marL="1828800" indent="0">
               <a:buNone/>
-              <a:defRPr sz="1000"/>
+              <a:defRPr sz="900"/>
             </a:lvl5pPr>
             <a:lvl6pPr marL="2286000" indent="0">
               <a:buNone/>
-              <a:defRPr sz="1000"/>
+              <a:defRPr sz="900"/>
             </a:lvl6pPr>
             <a:lvl7pPr marL="2743200" indent="0">
               <a:buNone/>
-              <a:defRPr sz="1000"/>
+              <a:defRPr sz="900"/>
             </a:lvl7pPr>
             <a:lvl8pPr marL="3200400" indent="0">
               <a:buNone/>
-              <a:defRPr sz="1000"/>
+              <a:defRPr sz="900"/>
             </a:lvl8pPr>
             <a:lvl9pPr marL="3657600" indent="0">
               <a:buNone/>
-              <a:defRPr sz="1000"/>
+              <a:defRPr sz="900"/>
             </a:lvl9pPr>
           </a:lstStyle>
           <a:p>
@@ -2082,7 +4796,7 @@
       </p:sp>
       <p:sp>
         <p:nvSpPr>
-          <p:cNvPr id="5" name="Date Placeholder 4"/>
+          <p:cNvPr id="7" name="Date Placeholder 4"/>
           <p:cNvSpPr>
             <a:spLocks noGrp="1"/>
           </p:cNvSpPr>
@@ -2097,7 +4811,7 @@
           <a:p>
             <a:fld id="{F475391B-CAB0-48AB-BB3A-E843B1163B6B}" type="datetimeFigureOut">
               <a:rPr lang="en-ZA" smtClean="0"/>
-              <a:t>2026/09/17</a:t>
+              <a:t>2026/09/18</a:t>
             </a:fld>
             <a:endParaRPr lang="en-ZA"/>
           </a:p>
@@ -2105,7 +4819,7 @@
       </p:sp>
       <p:sp>
         <p:nvSpPr>
-          <p:cNvPr id="6" name="Footer Placeholder 5"/>
+          <p:cNvPr id="5" name="Footer Placeholder 5"/>
           <p:cNvSpPr>
             <a:spLocks noGrp="1"/>
           </p:cNvSpPr>
@@ -2124,7 +4838,7 @@
       </p:sp>
       <p:sp>
         <p:nvSpPr>
-          <p:cNvPr id="7" name="Slide Number Placeholder 6"/>
+          <p:cNvPr id="6" name="Slide Number Placeholder 6"/>
           <p:cNvSpPr>
             <a:spLocks noGrp="1"/>
           </p:cNvSpPr>
@@ -2148,7 +4862,7 @@
     </p:spTree>
     <p:extLst>
       <p:ext uri="{BB962C8B-B14F-4D97-AF65-F5344CB8AC3E}">
-        <p14:creationId xmlns:p14="http://schemas.microsoft.com/office/powerpoint/2010/main" val="2860796416"/>
+        <p14:creationId xmlns:p14="http://schemas.microsoft.com/office/powerpoint/2010/main" val="2146859856"/>
       </p:ext>
     </p:extLst>
   </p:cSld>
@@ -2187,15 +4901,17 @@
         </p:nvSpPr>
         <p:spPr>
           <a:xfrm>
-            <a:off x="839788" y="457200"/>
-            <a:ext cx="3932237" cy="1600200"/>
+            <a:off x="1153907" y="1854192"/>
+            <a:ext cx="5092906" cy="1574808"/>
           </a:xfrm>
         </p:spPr>
         <p:txBody>
-          <a:bodyPr anchor="b"/>
+          <a:bodyPr anchor="b">
+            <a:normAutofit/>
+          </a:bodyPr>
           <a:lstStyle>
-            <a:lvl1pPr>
-              <a:defRPr sz="3200"/>
+            <a:lvl1pPr algn="l">
+              <a:defRPr sz="3600" b="0"/>
             </a:lvl1pPr>
           </a:lstStyle>
           <a:p>
@@ -2203,7 +4919,7 @@
               <a:rPr lang="en-US" smtClean="0"/>
               <a:t>Click to edit Master title style</a:t>
             </a:r>
-            <a:endParaRPr lang="en-ZA"/>
+            <a:endParaRPr lang="en-US" dirty="0"/>
           </a:p>
         </p:txBody>
       </p:sp>
@@ -2211,7 +4927,7 @@
         <p:nvSpPr>
           <p:cNvPr id="3" name="Picture Placeholder 2"/>
           <p:cNvSpPr>
-            <a:spLocks noGrp="1"/>
+            <a:spLocks noGrp="1" noChangeAspect="1"/>
           </p:cNvSpPr>
           <p:nvPr>
             <p:ph type="pic" idx="1"/>
@@ -2219,112 +4935,132 @@
         </p:nvSpPr>
         <p:spPr>
           <a:xfrm>
-            <a:off x="5183188" y="987425"/>
-            <a:ext cx="6172200" cy="4873625"/>
+            <a:off x="6949546" y="1143000"/>
+            <a:ext cx="3200400" cy="4572000"/>
           </a:xfrm>
+          <a:prstGeom prst="roundRect">
+            <a:avLst>
+              <a:gd name="adj" fmla="val 1858"/>
+            </a:avLst>
+          </a:prstGeom>
+          <a:effectLst>
+            <a:outerShdw blurRad="50800" dist="50800" dir="5400000" algn="tl" rotWithShape="0">
+              <a:srgbClr val="000000">
+                <a:alpha val="43000"/>
+              </a:srgbClr>
+            </a:outerShdw>
+          </a:effectLst>
         </p:spPr>
         <p:txBody>
-          <a:bodyPr/>
+          <a:bodyPr anchor="t">
+            <a:normAutofit/>
+          </a:bodyPr>
           <a:lstStyle>
-            <a:lvl1pPr marL="0" indent="0">
-              <a:buNone/>
-              <a:defRPr sz="3200"/>
-            </a:lvl1pPr>
-            <a:lvl2pPr marL="457200" indent="0">
-              <a:buNone/>
-              <a:defRPr sz="2800"/>
-            </a:lvl2pPr>
-            <a:lvl3pPr marL="914400" indent="0">
-              <a:buNone/>
-              <a:defRPr sz="2400"/>
-            </a:lvl3pPr>
-            <a:lvl4pPr marL="1371600" indent="0">
-              <a:buNone/>
-              <a:defRPr sz="2000"/>
-            </a:lvl4pPr>
-            <a:lvl5pPr marL="1828800" indent="0">
-              <a:buNone/>
-              <a:defRPr sz="2000"/>
-            </a:lvl5pPr>
-            <a:lvl6pPr marL="2286000" indent="0">
-              <a:buNone/>
-              <a:defRPr sz="2000"/>
-            </a:lvl6pPr>
-            <a:lvl7pPr marL="2743200" indent="0">
-              <a:buNone/>
-              <a:defRPr sz="2000"/>
-            </a:lvl7pPr>
-            <a:lvl8pPr marL="3200400" indent="0">
-              <a:buNone/>
-              <a:defRPr sz="2000"/>
-            </a:lvl8pPr>
-            <a:lvl9pPr marL="3657600" indent="0">
-              <a:buNone/>
-              <a:defRPr sz="2000"/>
-            </a:lvl9pPr>
-          </a:lstStyle>
-          <a:p>
-            <a:endParaRPr lang="en-ZA"/>
-          </a:p>
-        </p:txBody>
-      </p:sp>
-      <p:sp>
-        <p:nvSpPr>
-          <p:cNvPr id="4" name="Text Placeholder 3"/>
-          <p:cNvSpPr>
-            <a:spLocks noGrp="1"/>
-          </p:cNvSpPr>
-          <p:nvPr>
-            <p:ph type="body" sz="half" idx="2"/>
-          </p:nvPr>
-        </p:nvSpPr>
-        <p:spPr>
-          <a:xfrm>
-            <a:off x="839788" y="2057400"/>
-            <a:ext cx="3932237" cy="3811588"/>
-          </a:xfrm>
-        </p:spPr>
-        <p:txBody>
-          <a:bodyPr/>
-          <a:lstStyle>
-            <a:lvl1pPr marL="0" indent="0">
+            <a:lvl1pPr marL="0" indent="0" algn="ctr">
               <a:buNone/>
               <a:defRPr sz="1600"/>
             </a:lvl1pPr>
             <a:lvl2pPr marL="457200" indent="0">
               <a:buNone/>
-              <a:defRPr sz="1400"/>
+              <a:defRPr sz="1600"/>
             </a:lvl2pPr>
             <a:lvl3pPr marL="914400" indent="0">
               <a:buNone/>
-              <a:defRPr sz="1200"/>
+              <a:defRPr sz="1600"/>
             </a:lvl3pPr>
             <a:lvl4pPr marL="1371600" indent="0">
               <a:buNone/>
-              <a:defRPr sz="1000"/>
+              <a:defRPr sz="1600"/>
             </a:lvl4pPr>
             <a:lvl5pPr marL="1828800" indent="0">
               <a:buNone/>
-              <a:defRPr sz="1000"/>
+              <a:defRPr sz="1600"/>
             </a:lvl5pPr>
             <a:lvl6pPr marL="2286000" indent="0">
               <a:buNone/>
-              <a:defRPr sz="1000"/>
+              <a:defRPr sz="1600"/>
             </a:lvl6pPr>
             <a:lvl7pPr marL="2743200" indent="0">
               <a:buNone/>
-              <a:defRPr sz="1000"/>
+              <a:defRPr sz="1600"/>
             </a:lvl7pPr>
             <a:lvl8pPr marL="3200400" indent="0">
               <a:buNone/>
-              <a:defRPr sz="1000"/>
+              <a:defRPr sz="1600"/>
             </a:lvl8pPr>
             <a:lvl9pPr marL="3657600" indent="0">
               <a:buNone/>
-              <a:defRPr sz="1000"/>
+              <a:defRPr sz="1600"/>
             </a:lvl9pPr>
           </a:lstStyle>
           <a:p>
+            <a:r>
+              <a:rPr lang="en-US" smtClean="0"/>
+              <a:t>Click icon to add picture</a:t>
+            </a:r>
+            <a:endParaRPr lang="en-US" dirty="0"/>
+          </a:p>
+        </p:txBody>
+      </p:sp>
+      <p:sp>
+        <p:nvSpPr>
+          <p:cNvPr id="4" name="Text Placeholder 3"/>
+          <p:cNvSpPr>
+            <a:spLocks noGrp="1"/>
+          </p:cNvSpPr>
+          <p:nvPr>
+            <p:ph type="body" sz="half" idx="2"/>
+          </p:nvPr>
+        </p:nvSpPr>
+        <p:spPr>
+          <a:xfrm>
+            <a:off x="1154954" y="3657600"/>
+            <a:ext cx="5084979" cy="1371600"/>
+          </a:xfrm>
+        </p:spPr>
+        <p:txBody>
+          <a:bodyPr>
+            <a:normAutofit/>
+          </a:bodyPr>
+          <a:lstStyle>
+            <a:lvl1pPr marL="0" indent="0">
+              <a:buNone/>
+              <a:defRPr sz="1400"/>
+            </a:lvl1pPr>
+            <a:lvl2pPr marL="457200" indent="0">
+              <a:buNone/>
+              <a:defRPr sz="1200"/>
+            </a:lvl2pPr>
+            <a:lvl3pPr marL="914400" indent="0">
+              <a:buNone/>
+              <a:defRPr sz="1000"/>
+            </a:lvl3pPr>
+            <a:lvl4pPr marL="1371600" indent="0">
+              <a:buNone/>
+              <a:defRPr sz="900"/>
+            </a:lvl4pPr>
+            <a:lvl5pPr marL="1828800" indent="0">
+              <a:buNone/>
+              <a:defRPr sz="900"/>
+            </a:lvl5pPr>
+            <a:lvl6pPr marL="2286000" indent="0">
+              <a:buNone/>
+              <a:defRPr sz="900"/>
+            </a:lvl6pPr>
+            <a:lvl7pPr marL="2743200" indent="0">
+              <a:buNone/>
+              <a:defRPr sz="900"/>
+            </a:lvl7pPr>
+            <a:lvl8pPr marL="3200400" indent="0">
+              <a:buNone/>
+              <a:defRPr sz="900"/>
+            </a:lvl8pPr>
+            <a:lvl9pPr marL="3657600" indent="0">
+              <a:buNone/>
+              <a:defRPr sz="900"/>
+            </a:lvl9pPr>
+          </a:lstStyle>
+          <a:p>
             <a:pPr lvl="0"/>
             <a:r>
               <a:rPr lang="en-US" smtClean="0"/>
@@ -2350,7 +5086,7 @@
           <a:p>
             <a:fld id="{F475391B-CAB0-48AB-BB3A-E843B1163B6B}" type="datetimeFigureOut">
               <a:rPr lang="en-ZA" smtClean="0"/>
-              <a:t>2026/09/17</a:t>
+              <a:t>2026/09/18</a:t>
             </a:fld>
             <a:endParaRPr lang="en-ZA"/>
           </a:p>
@@ -2401,7 +5137,7 @@
     </p:spTree>
     <p:extLst>
       <p:ext uri="{BB962C8B-B14F-4D97-AF65-F5344CB8AC3E}">
-        <p14:creationId xmlns:p14="http://schemas.microsoft.com/office/powerpoint/2010/main" val="2170127354"/>
+        <p14:creationId xmlns:p14="http://schemas.microsoft.com/office/powerpoint/2010/main" val="1686220985"/>
       </p:ext>
     </p:extLst>
   </p:cSld>
@@ -2415,8 +5151,8 @@
 <p:sldMaster xmlns:a="http://schemas.openxmlformats.org/drawingml/2006/main" xmlns:r="http://schemas.openxmlformats.org/officeDocument/2006/relationships" xmlns:p="http://schemas.openxmlformats.org/presentationml/2006/main">
   <p:cSld>
     <p:bg>
-      <p:bgRef idx="1001">
-        <a:schemeClr val="bg1"/>
+      <p:bgRef idx="1003">
+        <a:schemeClr val="bg2"/>
       </p:bgRef>
     </p:bg>
     <p:spTree>
@@ -2433,125 +5169,420 @@
           <a:chExt cx="0" cy="0"/>
         </a:xfrm>
       </p:grpSpPr>
-      <p:sp>
-        <p:nvSpPr>
-          <p:cNvPr id="2" name="Title Placeholder 1"/>
-          <p:cNvSpPr>
-            <a:spLocks noGrp="1"/>
-          </p:cNvSpPr>
-          <p:nvPr>
-            <p:ph type="title"/>
-          </p:nvPr>
-        </p:nvSpPr>
+      <p:pic>
+        <p:nvPicPr>
+          <p:cNvPr id="8" name="Picture 7"/>
+          <p:cNvPicPr>
+            <a:picLocks noChangeAspect="1"/>
+          </p:cNvPicPr>
+          <p:nvPr/>
+        </p:nvPicPr>
+        <p:blipFill rotWithShape="1">
+          <a:blip r:embed="rId19">
+            <a:extLst>
+              <a:ext uri="{28A0092B-C50C-407E-A947-70E740481C1C}">
+                <a14:useLocalDpi xmlns:a14="http://schemas.microsoft.com/office/drawing/2010/main" val="0"/>
+              </a:ext>
+            </a:extLst>
+          </a:blip>
+          <a:srcRect l="3613"/>
+          <a:stretch/>
+        </p:blipFill>
         <p:spPr>
           <a:xfrm>
-            <a:off x="838200" y="365125"/>
-            <a:ext cx="10515600" cy="1325563"/>
+            <a:off x="0" y="2669685"/>
+            <a:ext cx="4037012" cy="4188315"/>
           </a:xfrm>
           <a:prstGeom prst="rect">
             <a:avLst/>
           </a:prstGeom>
         </p:spPr>
-        <p:txBody>
-          <a:bodyPr vert="horz" lIns="91440" tIns="45720" rIns="91440" bIns="45720" rtlCol="0" anchor="ctr">
-            <a:normAutofit/>
-          </a:bodyPr>
-          <a:lstStyle/>
-          <a:p>
-            <a:r>
-              <a:rPr lang="en-US" smtClean="0"/>
-              <a:t>Click to edit Master title style</a:t>
-            </a:r>
-            <a:endParaRPr lang="en-ZA"/>
-          </a:p>
-        </p:txBody>
-      </p:sp>
-      <p:sp>
-        <p:nvSpPr>
-          <p:cNvPr id="3" name="Text Placeholder 2"/>
-          <p:cNvSpPr>
-            <a:spLocks noGrp="1"/>
-          </p:cNvSpPr>
-          <p:nvPr>
-            <p:ph type="body" idx="1"/>
-          </p:nvPr>
-        </p:nvSpPr>
+      </p:pic>
+      <p:pic>
+        <p:nvPicPr>
+          <p:cNvPr id="7" name="Picture 6"/>
+          <p:cNvPicPr>
+            <a:picLocks noChangeAspect="1"/>
+          </p:cNvPicPr>
+          <p:nvPr/>
+        </p:nvPicPr>
+        <p:blipFill rotWithShape="1">
+          <a:blip r:embed="rId20">
+            <a:extLst>
+              <a:ext uri="{28A0092B-C50C-407E-A947-70E740481C1C}">
+                <a14:useLocalDpi xmlns:a14="http://schemas.microsoft.com/office/drawing/2010/main" val="0"/>
+              </a:ext>
+            </a:extLst>
+          </a:blip>
+          <a:srcRect l="35640"/>
+          <a:stretch/>
+        </p:blipFill>
         <p:spPr>
           <a:xfrm>
-            <a:off x="838200" y="1825625"/>
-            <a:ext cx="10515600" cy="4351338"/>
+            <a:off x="0" y="2892347"/>
+            <a:ext cx="1522412" cy="2365453"/>
           </a:xfrm>
           <a:prstGeom prst="rect">
             <a:avLst/>
           </a:prstGeom>
         </p:spPr>
-        <p:txBody>
-          <a:bodyPr vert="horz" lIns="91440" tIns="45720" rIns="91440" bIns="45720" rtlCol="0">
-            <a:normAutofit/>
-          </a:bodyPr>
-          <a:lstStyle/>
-          <a:p>
-            <a:pPr lvl="0"/>
-            <a:r>
-              <a:rPr lang="en-US" smtClean="0"/>
-              <a:t>Edit Master text styles</a:t>
-            </a:r>
-          </a:p>
-          <a:p>
-            <a:pPr lvl="1"/>
-            <a:r>
-              <a:rPr lang="en-US" smtClean="0"/>
-              <a:t>Second level</a:t>
-            </a:r>
-          </a:p>
-          <a:p>
-            <a:pPr lvl="2"/>
-            <a:r>
-              <a:rPr lang="en-US" smtClean="0"/>
-              <a:t>Third level</a:t>
-            </a:r>
-          </a:p>
-          <a:p>
-            <a:pPr lvl="3"/>
-            <a:r>
-              <a:rPr lang="en-US" smtClean="0"/>
-              <a:t>Fourth level</a:t>
-            </a:r>
-          </a:p>
-          <a:p>
-            <a:pPr lvl="4"/>
-            <a:r>
-              <a:rPr lang="en-US" smtClean="0"/>
-              <a:t>Fifth level</a:t>
-            </a:r>
-            <a:endParaRPr lang="en-ZA"/>
-          </a:p>
-        </p:txBody>
-      </p:sp>
-      <p:sp>
-        <p:nvSpPr>
-          <p:cNvPr id="4" name="Date Placeholder 3"/>
-          <p:cNvSpPr>
-            <a:spLocks noGrp="1"/>
-          </p:cNvSpPr>
-          <p:nvPr>
-            <p:ph type="dt" sz="half" idx="2"/>
-          </p:nvPr>
+      </p:pic>
+      <p:sp>
+        <p:nvSpPr>
+          <p:cNvPr id="16" name="Oval 15"/>
+          <p:cNvSpPr/>
+          <p:nvPr/>
         </p:nvSpPr>
         <p:spPr>
           <a:xfrm>
-            <a:off x="838200" y="6356350"/>
-            <a:ext cx="2743200" cy="365125"/>
+            <a:off x="8609012" y="1676400"/>
+            <a:ext cx="2819400" cy="2819400"/>
+          </a:xfrm>
+          <a:prstGeom prst="ellipse">
+            <a:avLst/>
+          </a:prstGeom>
+          <a:gradFill flip="none" rotWithShape="1">
+            <a:gsLst>
+              <a:gs pos="0">
+                <a:schemeClr val="bg2">
+                  <a:lumMod val="40000"/>
+                  <a:lumOff val="60000"/>
+                  <a:alpha val="7000"/>
+                </a:schemeClr>
+              </a:gs>
+              <a:gs pos="69000">
+                <a:schemeClr val="bg2">
+                  <a:lumMod val="40000"/>
+                  <a:lumOff val="60000"/>
+                  <a:alpha val="0"/>
+                </a:schemeClr>
+              </a:gs>
+              <a:gs pos="36000">
+                <a:schemeClr val="bg2">
+                  <a:lumMod val="40000"/>
+                  <a:lumOff val="60000"/>
+                  <a:alpha val="6000"/>
+                </a:schemeClr>
+              </a:gs>
+            </a:gsLst>
+            <a:path path="circle">
+              <a:fillToRect l="50000" t="50000" r="50000" b="50000"/>
+            </a:path>
+            <a:tileRect/>
+          </a:gradFill>
+          <a:ln>
+            <a:noFill/>
+          </a:ln>
+          <a:effectLst/>
+        </p:spPr>
+        <p:style>
+          <a:lnRef idx="1">
+            <a:schemeClr val="accent1"/>
+          </a:lnRef>
+          <a:fillRef idx="3">
+            <a:schemeClr val="accent1"/>
+          </a:fillRef>
+          <a:effectRef idx="2">
+            <a:schemeClr val="accent1"/>
+          </a:effectRef>
+          <a:fontRef idx="minor">
+            <a:schemeClr val="lt1"/>
+          </a:fontRef>
+        </p:style>
+      </p:sp>
+      <p:pic>
+        <p:nvPicPr>
+          <p:cNvPr id="9" name="Picture 8"/>
+          <p:cNvPicPr>
+            <a:picLocks noChangeAspect="1"/>
+          </p:cNvPicPr>
+          <p:nvPr/>
+        </p:nvPicPr>
+        <p:blipFill rotWithShape="1">
+          <a:blip r:embed="rId21">
+            <a:extLst>
+              <a:ext uri="{28A0092B-C50C-407E-A947-70E740481C1C}">
+                <a14:useLocalDpi xmlns:a14="http://schemas.microsoft.com/office/drawing/2010/main" val="0"/>
+              </a:ext>
+            </a:extLst>
+          </a:blip>
+          <a:srcRect t="28813"/>
+          <a:stretch/>
+        </p:blipFill>
+        <p:spPr>
+          <a:xfrm>
+            <a:off x="7999412" y="0"/>
+            <a:ext cx="1603387" cy="1141407"/>
           </a:xfrm>
           <a:prstGeom prst="rect">
             <a:avLst/>
           </a:prstGeom>
         </p:spPr>
-        <p:txBody>
-          <a:bodyPr vert="horz" lIns="91440" tIns="45720" rIns="91440" bIns="45720" rtlCol="0" anchor="ctr"/>
+      </p:pic>
+      <p:pic>
+        <p:nvPicPr>
+          <p:cNvPr id="10" name="Picture 9"/>
+          <p:cNvPicPr>
+            <a:picLocks noChangeAspect="1"/>
+          </p:cNvPicPr>
+          <p:nvPr/>
+        </p:nvPicPr>
+        <p:blipFill rotWithShape="1">
+          <a:blip r:embed="rId22">
+            <a:extLst>
+              <a:ext uri="{28A0092B-C50C-407E-A947-70E740481C1C}">
+                <a14:useLocalDpi xmlns:a14="http://schemas.microsoft.com/office/drawing/2010/main" val="0"/>
+              </a:ext>
+            </a:extLst>
+          </a:blip>
+          <a:srcRect b="23320"/>
+          <a:stretch/>
+        </p:blipFill>
+        <p:spPr>
+          <a:xfrm>
+            <a:off x="8609012" y="6096000"/>
+            <a:ext cx="993734" cy="762000"/>
+          </a:xfrm>
+          <a:prstGeom prst="rect">
+            <a:avLst/>
+          </a:prstGeom>
+        </p:spPr>
+      </p:pic>
+      <p:sp>
+        <p:nvSpPr>
+          <p:cNvPr id="14" name="Rectangle 13"/>
+          <p:cNvSpPr/>
+          <p:nvPr/>
+        </p:nvSpPr>
+        <p:spPr>
+          <a:xfrm>
+            <a:off x="10437812" y="0"/>
+            <a:ext cx="685800" cy="1143000"/>
+          </a:xfrm>
+          <a:prstGeom prst="rect">
+            <a:avLst/>
+          </a:prstGeom>
+          <a:solidFill>
+            <a:schemeClr val="accent1"/>
+          </a:solidFill>
+          <a:ln>
+            <a:noFill/>
+          </a:ln>
+        </p:spPr>
+        <p:style>
+          <a:lnRef idx="1">
+            <a:schemeClr val="accent1"/>
+          </a:lnRef>
+          <a:fillRef idx="3">
+            <a:schemeClr val="accent1"/>
+          </a:fillRef>
+          <a:effectRef idx="2">
+            <a:schemeClr val="accent1"/>
+          </a:effectRef>
+          <a:fontRef idx="minor">
+            <a:schemeClr val="lt1"/>
+          </a:fontRef>
+        </p:style>
+      </p:sp>
+      <p:sp>
+        <p:nvSpPr>
+          <p:cNvPr id="2" name="Title Placeholder 1"/>
+          <p:cNvSpPr>
+            <a:spLocks noGrp="1"/>
+          </p:cNvSpPr>
+          <p:nvPr>
+            <p:ph type="title"/>
+          </p:nvPr>
+        </p:nvSpPr>
+        <p:spPr>
+          <a:xfrm>
+            <a:off x="646111" y="452718"/>
+            <a:ext cx="9404723" cy="1400530"/>
+          </a:xfrm>
+          <a:prstGeom prst="rect">
+            <a:avLst/>
+          </a:prstGeom>
+        </p:spPr>
+        <p:txBody>
+          <a:bodyPr vert="horz" lIns="91440" tIns="45720" rIns="91440" bIns="45720" rtlCol="0" anchor="t">
+            <a:noAutofit/>
+          </a:bodyPr>
+          <a:lstStyle/>
+          <a:p>
+            <a:r>
+              <a:rPr lang="en-US" smtClean="0"/>
+              <a:t>Click to edit Master title style</a:t>
+            </a:r>
+            <a:endParaRPr lang="en-US" dirty="0"/>
+          </a:p>
+        </p:txBody>
+      </p:sp>
+      <p:sp>
+        <p:nvSpPr>
+          <p:cNvPr id="3" name="Text Placeholder 2"/>
+          <p:cNvSpPr>
+            <a:spLocks noGrp="1"/>
+          </p:cNvSpPr>
+          <p:nvPr>
+            <p:ph type="body" idx="1"/>
+          </p:nvPr>
+        </p:nvSpPr>
+        <p:spPr>
+          <a:xfrm>
+            <a:off x="1103312" y="2052918"/>
+            <a:ext cx="8946541" cy="4195481"/>
+          </a:xfrm>
+          <a:prstGeom prst="rect">
+            <a:avLst/>
+          </a:prstGeom>
+        </p:spPr>
+        <p:txBody>
+          <a:bodyPr vert="horz" lIns="91440" tIns="45720" rIns="91440" bIns="45720" rtlCol="0">
+            <a:normAutofit/>
+          </a:bodyPr>
+          <a:lstStyle/>
+          <a:p>
+            <a:pPr lvl="0"/>
+            <a:r>
+              <a:rPr lang="en-US" smtClean="0"/>
+              <a:t>Edit Master text styles</a:t>
+            </a:r>
+          </a:p>
+          <a:p>
+            <a:pPr lvl="1"/>
+            <a:r>
+              <a:rPr lang="en-US" smtClean="0"/>
+              <a:t>Second level</a:t>
+            </a:r>
+          </a:p>
+          <a:p>
+            <a:pPr lvl="2"/>
+            <a:r>
+              <a:rPr lang="en-US" smtClean="0"/>
+              <a:t>Third level</a:t>
+            </a:r>
+          </a:p>
+          <a:p>
+            <a:pPr lvl="3"/>
+            <a:r>
+              <a:rPr lang="en-US" smtClean="0"/>
+              <a:t>Fourth level</a:t>
+            </a:r>
+          </a:p>
+          <a:p>
+            <a:pPr lvl="4"/>
+            <a:r>
+              <a:rPr lang="en-US" smtClean="0"/>
+              <a:t>Fifth level</a:t>
+            </a:r>
+            <a:endParaRPr lang="en-US" dirty="0"/>
+          </a:p>
+        </p:txBody>
+      </p:sp>
+      <p:sp>
+        <p:nvSpPr>
+          <p:cNvPr id="4" name="Date Placeholder 3"/>
+          <p:cNvSpPr>
+            <a:spLocks noGrp="1"/>
+          </p:cNvSpPr>
+          <p:nvPr>
+            <p:ph type="dt" sz="half" idx="2"/>
+          </p:nvPr>
+        </p:nvSpPr>
+        <p:spPr>
+          <a:xfrm rot="5400000">
+            <a:off x="10155639" y="1790701"/>
+            <a:ext cx="990599" cy="304799"/>
+          </a:xfrm>
+          <a:prstGeom prst="rect">
+            <a:avLst/>
+          </a:prstGeom>
+        </p:spPr>
+        <p:txBody>
+          <a:bodyPr vert="horz" lIns="91440" tIns="45720" rIns="91440" bIns="45720" rtlCol="0" anchor="t"/>
           <a:lstStyle>
             <a:lvl1pPr algn="l">
-              <a:defRPr sz="1200">
+              <a:defRPr sz="1100" b="0" i="0">
+                <a:solidFill>
+                  <a:schemeClr val="tx1">
+                    <a:tint val="75000"/>
+                    <a:alpha val="60000"/>
+                  </a:schemeClr>
+                </a:solidFill>
+              </a:defRPr>
+            </a:lvl1pPr>
+          </a:lstStyle>
+          <a:p>
+            <a:fld id="{F475391B-CAB0-48AB-BB3A-E843B1163B6B}" type="datetimeFigureOut">
+              <a:rPr lang="en-ZA" smtClean="0"/>
+              <a:t>2026/09/18</a:t>
+            </a:fld>
+            <a:endParaRPr lang="en-ZA"/>
+          </a:p>
+        </p:txBody>
+      </p:sp>
+      <p:sp>
+        <p:nvSpPr>
+          <p:cNvPr id="5" name="Footer Placeholder 4"/>
+          <p:cNvSpPr>
+            <a:spLocks noGrp="1"/>
+          </p:cNvSpPr>
+          <p:nvPr>
+            <p:ph type="ftr" sz="quarter" idx="3"/>
+          </p:nvPr>
+        </p:nvSpPr>
+        <p:spPr>
+          <a:xfrm rot="5400000">
+            <a:off x="8951573" y="3225297"/>
+            <a:ext cx="3859795" cy="304801"/>
+          </a:xfrm>
+          <a:prstGeom prst="rect">
+            <a:avLst/>
+          </a:prstGeom>
+        </p:spPr>
+        <p:txBody>
+          <a:bodyPr vert="horz" lIns="91440" tIns="45720" rIns="91440" bIns="45720" rtlCol="0" anchor="b"/>
+          <a:lstStyle>
+            <a:lvl1pPr algn="l">
+              <a:defRPr sz="1100" b="0" i="0">
+                <a:solidFill>
+                  <a:schemeClr val="tx1">
+                    <a:tint val="75000"/>
+                    <a:alpha val="60000"/>
+                  </a:schemeClr>
+                </a:solidFill>
+              </a:defRPr>
+            </a:lvl1pPr>
+          </a:lstStyle>
+          <a:p>
+            <a:endParaRPr lang="en-ZA"/>
+          </a:p>
+        </p:txBody>
+      </p:sp>
+      <p:sp>
+        <p:nvSpPr>
+          <p:cNvPr id="6" name="Slide Number Placeholder 5"/>
+          <p:cNvSpPr>
+            <a:spLocks noGrp="1"/>
+          </p:cNvSpPr>
+          <p:nvPr>
+            <p:ph type="sldNum" sz="quarter" idx="4"/>
+          </p:nvPr>
+        </p:nvSpPr>
+        <p:spPr>
+          <a:xfrm>
+            <a:off x="10352540" y="295729"/>
+            <a:ext cx="838199" cy="767687"/>
+          </a:xfrm>
+          <a:prstGeom prst="rect">
+            <a:avLst/>
+          </a:prstGeom>
+        </p:spPr>
+        <p:txBody>
+          <a:bodyPr vert="horz" lIns="91440" tIns="45720" rIns="91440" bIns="45720" rtlCol="0" anchor="b"/>
+          <a:lstStyle>
+            <a:lvl1pPr algn="ctr">
+              <a:defRPr sz="2800" b="0" i="0">
                 <a:solidFill>
                   <a:schemeClr val="tx1">
                     <a:tint val="75000"/>
@@ -2561,84 +5592,6 @@
             </a:lvl1pPr>
           </a:lstStyle>
           <a:p>
-            <a:fld id="{F475391B-CAB0-48AB-BB3A-E843B1163B6B}" type="datetimeFigureOut">
-              <a:rPr lang="en-ZA" smtClean="0"/>
-              <a:t>2026/09/17</a:t>
-            </a:fld>
-            <a:endParaRPr lang="en-ZA"/>
-          </a:p>
-        </p:txBody>
-      </p:sp>
-      <p:sp>
-        <p:nvSpPr>
-          <p:cNvPr id="5" name="Footer Placeholder 4"/>
-          <p:cNvSpPr>
-            <a:spLocks noGrp="1"/>
-          </p:cNvSpPr>
-          <p:nvPr>
-            <p:ph type="ftr" sz="quarter" idx="3"/>
-          </p:nvPr>
-        </p:nvSpPr>
-        <p:spPr>
-          <a:xfrm>
-            <a:off x="4038600" y="6356350"/>
-            <a:ext cx="4114800" cy="365125"/>
-          </a:xfrm>
-          <a:prstGeom prst="rect">
-            <a:avLst/>
-          </a:prstGeom>
-        </p:spPr>
-        <p:txBody>
-          <a:bodyPr vert="horz" lIns="91440" tIns="45720" rIns="91440" bIns="45720" rtlCol="0" anchor="ctr"/>
-          <a:lstStyle>
-            <a:lvl1pPr algn="ctr">
-              <a:defRPr sz="1200">
-                <a:solidFill>
-                  <a:schemeClr val="tx1">
-                    <a:tint val="75000"/>
-                  </a:schemeClr>
-                </a:solidFill>
-              </a:defRPr>
-            </a:lvl1pPr>
-          </a:lstStyle>
-          <a:p>
-            <a:endParaRPr lang="en-ZA"/>
-          </a:p>
-        </p:txBody>
-      </p:sp>
-      <p:sp>
-        <p:nvSpPr>
-          <p:cNvPr id="6" name="Slide Number Placeholder 5"/>
-          <p:cNvSpPr>
-            <a:spLocks noGrp="1"/>
-          </p:cNvSpPr>
-          <p:nvPr>
-            <p:ph type="sldNum" sz="quarter" idx="4"/>
-          </p:nvPr>
-        </p:nvSpPr>
-        <p:spPr>
-          <a:xfrm>
-            <a:off x="8610600" y="6356350"/>
-            <a:ext cx="2743200" cy="365125"/>
-          </a:xfrm>
-          <a:prstGeom prst="rect">
-            <a:avLst/>
-          </a:prstGeom>
-        </p:spPr>
-        <p:txBody>
-          <a:bodyPr vert="horz" lIns="91440" tIns="45720" rIns="91440" bIns="45720" rtlCol="0" anchor="ctr"/>
-          <a:lstStyle>
-            <a:lvl1pPr algn="r">
-              <a:defRPr sz="1200">
-                <a:solidFill>
-                  <a:schemeClr val="tx1">
-                    <a:tint val="75000"/>
-                  </a:schemeClr>
-                </a:solidFill>
-              </a:defRPr>
-            </a:lvl1pPr>
-          </a:lstStyle>
-          <a:p>
             <a:fld id="{4D7B34C8-07E8-487E-933E-E1E99116B26C}" type="slidenum">
               <a:rPr lang="en-ZA" smtClean="0"/>
               <a:t>‹#›</a:t>
@@ -2650,35 +5603,118 @@
     </p:spTree>
     <p:extLst>
       <p:ext uri="{BB962C8B-B14F-4D97-AF65-F5344CB8AC3E}">
-        <p14:creationId xmlns:p14="http://schemas.microsoft.com/office/powerpoint/2010/main" val="976104357"/>
+        <p14:creationId xmlns:p14="http://schemas.microsoft.com/office/powerpoint/2010/main" val="3824220417"/>
       </p:ext>
     </p:extLst>
   </p:cSld>
-  <p:clrMap bg1="lt1" tx1="dk1" bg2="lt2" tx2="dk2" accent1="accent1" accent2="accent2" accent3="accent3" accent4="accent4" accent5="accent5" accent6="accent6" hlink="hlink" folHlink="folHlink"/>
+  <p:clrMap bg1="dk1" tx1="lt1" bg2="dk2" tx2="lt2" accent1="accent1" accent2="accent2" accent3="accent3" accent4="accent4" accent5="accent5" accent6="accent6" hlink="hlink" folHlink="folHlink"/>
   <p:sldLayoutIdLst>
-    <p:sldLayoutId id="2147483649" r:id="rId1"/>
-    <p:sldLayoutId id="2147483650" r:id="rId2"/>
-    <p:sldLayoutId id="2147483651" r:id="rId3"/>
-    <p:sldLayoutId id="2147483652" r:id="rId4"/>
-    <p:sldLayoutId id="2147483653" r:id="rId5"/>
-    <p:sldLayoutId id="2147483654" r:id="rId6"/>
-    <p:sldLayoutId id="2147483655" r:id="rId7"/>
-    <p:sldLayoutId id="2147483656" r:id="rId8"/>
-    <p:sldLayoutId id="2147483657" r:id="rId9"/>
-    <p:sldLayoutId id="2147483658" r:id="rId10"/>
-    <p:sldLayoutId id="2147483659" r:id="rId11"/>
+    <p:sldLayoutId id="2147483709" r:id="rId1"/>
+    <p:sldLayoutId id="2147483710" r:id="rId2"/>
+    <p:sldLayoutId id="2147483711" r:id="rId3"/>
+    <p:sldLayoutId id="2147483712" r:id="rId4"/>
+    <p:sldLayoutId id="2147483713" r:id="rId5"/>
+    <p:sldLayoutId id="2147483714" r:id="rId6"/>
+    <p:sldLayoutId id="2147483715" r:id="rId7"/>
+    <p:sldLayoutId id="2147483716" r:id="rId8"/>
+    <p:sldLayoutId id="2147483717" r:id="rId9"/>
+    <p:sldLayoutId id="2147483718" r:id="rId10"/>
+    <p:sldLayoutId id="2147483719" r:id="rId11"/>
+    <p:sldLayoutId id="2147483720" r:id="rId12"/>
+    <p:sldLayoutId id="2147483721" r:id="rId13"/>
+    <p:sldLayoutId id="2147483722" r:id="rId14"/>
+    <p:sldLayoutId id="2147483723" r:id="rId15"/>
+    <p:sldLayoutId id="2147483724" r:id="rId16"/>
+    <p:sldLayoutId id="2147483725" r:id="rId17"/>
   </p:sldLayoutIdLst>
   <p:txStyles>
     <p:titleStyle>
-      <a:lvl1pPr algn="l" defTabSz="914400" rtl="0" eaLnBrk="1" latinLnBrk="0" hangingPunct="1">
-        <a:lnSpc>
-          <a:spcPct val="90000"/>
-        </a:lnSpc>
+      <a:lvl1pPr algn="l" defTabSz="457200" rtl="0" eaLnBrk="1" latinLnBrk="0" hangingPunct="1">
         <a:spcBef>
           <a:spcPct val="0"/>
         </a:spcBef>
         <a:buNone/>
-        <a:defRPr sz="4400" kern="1200">
+        <a:defRPr sz="4200" b="0" i="0" kern="1200">
+          <a:solidFill>
+            <a:schemeClr val="tx2"/>
+          </a:solidFill>
+          <a:latin typeface="+mj-lt"/>
+          <a:ea typeface="+mj-ea"/>
+          <a:cs typeface="+mj-cs"/>
+        </a:defRPr>
+      </a:lvl1pPr>
+      <a:lvl2pPr eaLnBrk="1" hangingPunct="1">
+        <a:defRPr>
+          <a:solidFill>
+            <a:schemeClr val="tx2"/>
+          </a:solidFill>
+        </a:defRPr>
+      </a:lvl2pPr>
+      <a:lvl3pPr eaLnBrk="1" hangingPunct="1">
+        <a:defRPr>
+          <a:solidFill>
+            <a:schemeClr val="tx2"/>
+          </a:solidFill>
+        </a:defRPr>
+      </a:lvl3pPr>
+      <a:lvl4pPr eaLnBrk="1" hangingPunct="1">
+        <a:defRPr>
+          <a:solidFill>
+            <a:schemeClr val="tx2"/>
+          </a:solidFill>
+        </a:defRPr>
+      </a:lvl4pPr>
+      <a:lvl5pPr eaLnBrk="1" hangingPunct="1">
+        <a:defRPr>
+          <a:solidFill>
+            <a:schemeClr val="tx2"/>
+          </a:solidFill>
+        </a:defRPr>
+      </a:lvl5pPr>
+      <a:lvl6pPr eaLnBrk="1" hangingPunct="1">
+        <a:defRPr>
+          <a:solidFill>
+            <a:schemeClr val="tx2"/>
+          </a:solidFill>
+        </a:defRPr>
+      </a:lvl6pPr>
+      <a:lvl7pPr eaLnBrk="1" hangingPunct="1">
+        <a:defRPr>
+          <a:solidFill>
+            <a:schemeClr val="tx2"/>
+          </a:solidFill>
+        </a:defRPr>
+      </a:lvl7pPr>
+      <a:lvl8pPr eaLnBrk="1" hangingPunct="1">
+        <a:defRPr>
+          <a:solidFill>
+            <a:schemeClr val="tx2"/>
+          </a:solidFill>
+        </a:defRPr>
+      </a:lvl8pPr>
+      <a:lvl9pPr eaLnBrk="1" hangingPunct="1">
+        <a:defRPr>
+          <a:solidFill>
+            <a:schemeClr val="tx2"/>
+          </a:solidFill>
+        </a:defRPr>
+      </a:lvl9pPr>
+    </p:titleStyle>
+    <p:bodyStyle>
+      <a:lvl1pPr marL="342900" indent="-342900" algn="l" defTabSz="457200" rtl="0" eaLnBrk="1" latinLnBrk="0" hangingPunct="1">
+        <a:spcBef>
+          <a:spcPts val="1000"/>
+        </a:spcBef>
+        <a:spcAft>
+          <a:spcPts val="0"/>
+        </a:spcAft>
+        <a:buClr>
+          <a:schemeClr val="accent1"/>
+        </a:buClr>
+        <a:buSzPct val="80000"/>
+        <a:buFont typeface="Wingdings 3" charset="2"/>
+        <a:buChar char=""/>
+        <a:defRPr sz="2000" b="0" i="0" kern="1200">
           <a:solidFill>
             <a:schemeClr val="tx1"/>
           </a:solidFill>
@@ -2687,18 +5723,189 @@
           <a:cs typeface="+mj-cs"/>
         </a:defRPr>
       </a:lvl1pPr>
-    </p:titleStyle>
-    <p:bodyStyle>
-      <a:lvl1pPr marL="228600" indent="-228600" algn="l" defTabSz="914400" rtl="0" eaLnBrk="1" latinLnBrk="0" hangingPunct="1">
-        <a:lnSpc>
-          <a:spcPct val="90000"/>
-        </a:lnSpc>
+      <a:lvl2pPr marL="742950" indent="-285750" algn="l" defTabSz="457200" rtl="0" eaLnBrk="1" latinLnBrk="0" hangingPunct="1">
         <a:spcBef>
           <a:spcPts val="1000"/>
         </a:spcBef>
-        <a:buFont typeface="Arial" panose="020B0604020202020204" pitchFamily="34" charset="0"/>
-        <a:buChar char="•"/>
-        <a:defRPr sz="2800" kern="1200">
+        <a:spcAft>
+          <a:spcPts val="0"/>
+        </a:spcAft>
+        <a:buClr>
+          <a:schemeClr val="accent1"/>
+        </a:buClr>
+        <a:buSzPct val="80000"/>
+        <a:buFont typeface="Wingdings 3" charset="2"/>
+        <a:buChar char=""/>
+        <a:defRPr sz="1800" b="0" i="0" kern="1200">
+          <a:solidFill>
+            <a:schemeClr val="tx1"/>
+          </a:solidFill>
+          <a:latin typeface="+mj-lt"/>
+          <a:ea typeface="+mj-ea"/>
+          <a:cs typeface="+mj-cs"/>
+        </a:defRPr>
+      </a:lvl2pPr>
+      <a:lvl3pPr marL="1143000" indent="-228600" algn="l" defTabSz="457200" rtl="0" eaLnBrk="1" latinLnBrk="0" hangingPunct="1">
+        <a:spcBef>
+          <a:spcPts val="1000"/>
+        </a:spcBef>
+        <a:spcAft>
+          <a:spcPts val="0"/>
+        </a:spcAft>
+        <a:buClr>
+          <a:schemeClr val="accent1"/>
+        </a:buClr>
+        <a:buSzPct val="80000"/>
+        <a:buFont typeface="Wingdings 3" charset="2"/>
+        <a:buChar char=""/>
+        <a:defRPr sz="1600" b="0" i="0" kern="1200">
+          <a:solidFill>
+            <a:schemeClr val="tx1"/>
+          </a:solidFill>
+          <a:latin typeface="+mj-lt"/>
+          <a:ea typeface="+mj-ea"/>
+          <a:cs typeface="+mj-cs"/>
+        </a:defRPr>
+      </a:lvl3pPr>
+      <a:lvl4pPr marL="1600200" indent="-228600" algn="l" defTabSz="457200" rtl="0" eaLnBrk="1" latinLnBrk="0" hangingPunct="1">
+        <a:spcBef>
+          <a:spcPts val="1000"/>
+        </a:spcBef>
+        <a:spcAft>
+          <a:spcPts val="0"/>
+        </a:spcAft>
+        <a:buClr>
+          <a:schemeClr val="accent1"/>
+        </a:buClr>
+        <a:buSzPct val="80000"/>
+        <a:buFont typeface="Wingdings 3" charset="2"/>
+        <a:buChar char=""/>
+        <a:defRPr sz="1400" b="0" i="0" kern="1200">
+          <a:solidFill>
+            <a:schemeClr val="tx1"/>
+          </a:solidFill>
+          <a:latin typeface="+mj-lt"/>
+          <a:ea typeface="+mj-ea"/>
+          <a:cs typeface="+mj-cs"/>
+        </a:defRPr>
+      </a:lvl4pPr>
+      <a:lvl5pPr marL="2057400" indent="-228600" algn="l" defTabSz="457200" rtl="0" eaLnBrk="1" latinLnBrk="0" hangingPunct="1">
+        <a:spcBef>
+          <a:spcPts val="1000"/>
+        </a:spcBef>
+        <a:spcAft>
+          <a:spcPts val="0"/>
+        </a:spcAft>
+        <a:buClr>
+          <a:schemeClr val="accent1"/>
+        </a:buClr>
+        <a:buSzPct val="80000"/>
+        <a:buFont typeface="Wingdings 3" charset="2"/>
+        <a:buChar char=""/>
+        <a:defRPr sz="1400" b="0" i="0" kern="1200">
+          <a:solidFill>
+            <a:schemeClr val="tx1"/>
+          </a:solidFill>
+          <a:latin typeface="+mj-lt"/>
+          <a:ea typeface="+mj-ea"/>
+          <a:cs typeface="+mj-cs"/>
+        </a:defRPr>
+      </a:lvl5pPr>
+      <a:lvl6pPr marL="2514600" indent="-228600" algn="l" defTabSz="457200" rtl="0" eaLnBrk="1" latinLnBrk="0" hangingPunct="1">
+        <a:spcBef>
+          <a:spcPts val="1000"/>
+        </a:spcBef>
+        <a:spcAft>
+          <a:spcPts val="0"/>
+        </a:spcAft>
+        <a:buClr>
+          <a:schemeClr val="accent1"/>
+        </a:buClr>
+        <a:buSzPct val="80000"/>
+        <a:buFont typeface="Wingdings 3" charset="2"/>
+        <a:buChar char=""/>
+        <a:defRPr sz="1400" b="0" i="0" kern="1200">
+          <a:solidFill>
+            <a:schemeClr val="tx1"/>
+          </a:solidFill>
+          <a:latin typeface="+mj-lt"/>
+          <a:ea typeface="+mj-ea"/>
+          <a:cs typeface="+mj-cs"/>
+        </a:defRPr>
+      </a:lvl6pPr>
+      <a:lvl7pPr marL="2971800" indent="-228600" algn="l" defTabSz="457200" rtl="0" eaLnBrk="1" latinLnBrk="0" hangingPunct="1">
+        <a:spcBef>
+          <a:spcPts val="1000"/>
+        </a:spcBef>
+        <a:spcAft>
+          <a:spcPts val="0"/>
+        </a:spcAft>
+        <a:buClr>
+          <a:schemeClr val="accent1"/>
+        </a:buClr>
+        <a:buSzPct val="80000"/>
+        <a:buFont typeface="Wingdings 3" charset="2"/>
+        <a:buChar char=""/>
+        <a:defRPr sz="1400" b="0" i="0" kern="1200">
+          <a:solidFill>
+            <a:schemeClr val="tx1"/>
+          </a:solidFill>
+          <a:latin typeface="+mj-lt"/>
+          <a:ea typeface="+mj-ea"/>
+          <a:cs typeface="+mj-cs"/>
+        </a:defRPr>
+      </a:lvl7pPr>
+      <a:lvl8pPr marL="3429000" indent="-228600" algn="l" defTabSz="457200" rtl="0" eaLnBrk="1" latinLnBrk="0" hangingPunct="1">
+        <a:spcBef>
+          <a:spcPts val="1000"/>
+        </a:spcBef>
+        <a:spcAft>
+          <a:spcPts val="0"/>
+        </a:spcAft>
+        <a:buClr>
+          <a:schemeClr val="accent1"/>
+        </a:buClr>
+        <a:buSzPct val="80000"/>
+        <a:buFont typeface="Wingdings 3" charset="2"/>
+        <a:buChar char=""/>
+        <a:defRPr sz="1400" b="0" i="0" kern="1200">
+          <a:solidFill>
+            <a:schemeClr val="tx1"/>
+          </a:solidFill>
+          <a:latin typeface="+mj-lt"/>
+          <a:ea typeface="+mj-ea"/>
+          <a:cs typeface="+mj-cs"/>
+        </a:defRPr>
+      </a:lvl8pPr>
+      <a:lvl9pPr marL="3886200" indent="-228600" algn="l" defTabSz="457200" rtl="0" eaLnBrk="1" latinLnBrk="0" hangingPunct="1">
+        <a:spcBef>
+          <a:spcPts val="1000"/>
+        </a:spcBef>
+        <a:spcAft>
+          <a:spcPts val="0"/>
+        </a:spcAft>
+        <a:buClr>
+          <a:schemeClr val="accent1"/>
+        </a:buClr>
+        <a:buSzPct val="80000"/>
+        <a:buFont typeface="Wingdings 3" charset="2"/>
+        <a:buChar char=""/>
+        <a:defRPr sz="1400" b="0" i="0" kern="1200">
+          <a:solidFill>
+            <a:schemeClr val="tx1"/>
+          </a:solidFill>
+          <a:latin typeface="+mj-lt"/>
+          <a:ea typeface="+mj-ea"/>
+          <a:cs typeface="+mj-cs"/>
+        </a:defRPr>
+      </a:lvl9pPr>
+    </p:bodyStyle>
+    <p:otherStyle>
+      <a:defPPr>
+        <a:defRPr lang="en-US"/>
+      </a:defPPr>
+      <a:lvl1pPr marL="0" algn="l" defTabSz="457200" rtl="0" eaLnBrk="1" latinLnBrk="0" hangingPunct="1">
+        <a:defRPr sz="1800" kern="1200">
           <a:solidFill>
             <a:schemeClr val="tx1"/>
           </a:solidFill>
@@ -2707,16 +5914,8 @@
           <a:cs typeface="+mn-cs"/>
         </a:defRPr>
       </a:lvl1pPr>
-      <a:lvl2pPr marL="685800" indent="-228600" algn="l" defTabSz="914400" rtl="0" eaLnBrk="1" latinLnBrk="0" hangingPunct="1">
-        <a:lnSpc>
-          <a:spcPct val="90000"/>
-        </a:lnSpc>
-        <a:spcBef>
-          <a:spcPts val="500"/>
-        </a:spcBef>
-        <a:buFont typeface="Arial" panose="020B0604020202020204" pitchFamily="34" charset="0"/>
-        <a:buChar char="•"/>
-        <a:defRPr sz="2400" kern="1200">
+      <a:lvl2pPr marL="457200" algn="l" defTabSz="457200" rtl="0" eaLnBrk="1" latinLnBrk="0" hangingPunct="1">
+        <a:defRPr sz="1800" kern="1200">
           <a:solidFill>
             <a:schemeClr val="tx1"/>
           </a:solidFill>
@@ -2725,16 +5924,8 @@
           <a:cs typeface="+mn-cs"/>
         </a:defRPr>
       </a:lvl2pPr>
-      <a:lvl3pPr marL="1143000" indent="-228600" algn="l" defTabSz="914400" rtl="0" eaLnBrk="1" latinLnBrk="0" hangingPunct="1">
-        <a:lnSpc>
-          <a:spcPct val="90000"/>
-        </a:lnSpc>
-        <a:spcBef>
-          <a:spcPts val="500"/>
-        </a:spcBef>
-        <a:buFont typeface="Arial" panose="020B0604020202020204" pitchFamily="34" charset="0"/>
-        <a:buChar char="•"/>
-        <a:defRPr sz="2000" kern="1200">
+      <a:lvl3pPr marL="914400" algn="l" defTabSz="457200" rtl="0" eaLnBrk="1" latinLnBrk="0" hangingPunct="1">
+        <a:defRPr sz="1800" kern="1200">
           <a:solidFill>
             <a:schemeClr val="tx1"/>
           </a:solidFill>
@@ -2743,15 +5934,7 @@
           <a:cs typeface="+mn-cs"/>
         </a:defRPr>
       </a:lvl3pPr>
-      <a:lvl4pPr marL="1600200" indent="-228600" algn="l" defTabSz="914400" rtl="0" eaLnBrk="1" latinLnBrk="0" hangingPunct="1">
-        <a:lnSpc>
-          <a:spcPct val="90000"/>
-        </a:lnSpc>
-        <a:spcBef>
-          <a:spcPts val="500"/>
-        </a:spcBef>
-        <a:buFont typeface="Arial" panose="020B0604020202020204" pitchFamily="34" charset="0"/>
-        <a:buChar char="•"/>
+      <a:lvl4pPr marL="1371600" algn="l" defTabSz="457200" rtl="0" eaLnBrk="1" latinLnBrk="0" hangingPunct="1">
         <a:defRPr sz="1800" kern="1200">
           <a:solidFill>
             <a:schemeClr val="tx1"/>
@@ -2761,15 +5944,7 @@
           <a:cs typeface="+mn-cs"/>
         </a:defRPr>
       </a:lvl4pPr>
-      <a:lvl5pPr marL="2057400" indent="-228600" algn="l" defTabSz="914400" rtl="0" eaLnBrk="1" latinLnBrk="0" hangingPunct="1">
-        <a:lnSpc>
-          <a:spcPct val="90000"/>
-        </a:lnSpc>
-        <a:spcBef>
-          <a:spcPts val="500"/>
-        </a:spcBef>
-        <a:buFont typeface="Arial" panose="020B0604020202020204" pitchFamily="34" charset="0"/>
-        <a:buChar char="•"/>
+      <a:lvl5pPr marL="1828800" algn="l" defTabSz="457200" rtl="0" eaLnBrk="1" latinLnBrk="0" hangingPunct="1">
         <a:defRPr sz="1800" kern="1200">
           <a:solidFill>
             <a:schemeClr val="tx1"/>
@@ -2779,15 +5954,7 @@
           <a:cs typeface="+mn-cs"/>
         </a:defRPr>
       </a:lvl5pPr>
-      <a:lvl6pPr marL="2514600" indent="-228600" algn="l" defTabSz="914400" rtl="0" eaLnBrk="1" latinLnBrk="0" hangingPunct="1">
-        <a:lnSpc>
-          <a:spcPct val="90000"/>
-        </a:lnSpc>
-        <a:spcBef>
-          <a:spcPts val="500"/>
-        </a:spcBef>
-        <a:buFont typeface="Arial" panose="020B0604020202020204" pitchFamily="34" charset="0"/>
-        <a:buChar char="•"/>
+      <a:lvl6pPr marL="2286000" algn="l" defTabSz="457200" rtl="0" eaLnBrk="1" latinLnBrk="0" hangingPunct="1">
         <a:defRPr sz="1800" kern="1200">
           <a:solidFill>
             <a:schemeClr val="tx1"/>
@@ -2797,15 +5964,7 @@
           <a:cs typeface="+mn-cs"/>
         </a:defRPr>
       </a:lvl6pPr>
-      <a:lvl7pPr marL="2971800" indent="-228600" algn="l" defTabSz="914400" rtl="0" eaLnBrk="1" latinLnBrk="0" hangingPunct="1">
-        <a:lnSpc>
-          <a:spcPct val="90000"/>
-        </a:lnSpc>
-        <a:spcBef>
-          <a:spcPts val="500"/>
-        </a:spcBef>
-        <a:buFont typeface="Arial" panose="020B0604020202020204" pitchFamily="34" charset="0"/>
-        <a:buChar char="•"/>
+      <a:lvl7pPr marL="2743200" algn="l" defTabSz="457200" rtl="0" eaLnBrk="1" latinLnBrk="0" hangingPunct="1">
         <a:defRPr sz="1800" kern="1200">
           <a:solidFill>
             <a:schemeClr val="tx1"/>
@@ -2815,15 +5974,7 @@
           <a:cs typeface="+mn-cs"/>
         </a:defRPr>
       </a:lvl7pPr>
-      <a:lvl8pPr marL="3429000" indent="-228600" algn="l" defTabSz="914400" rtl="0" eaLnBrk="1" latinLnBrk="0" hangingPunct="1">
-        <a:lnSpc>
-          <a:spcPct val="90000"/>
-        </a:lnSpc>
-        <a:spcBef>
-          <a:spcPts val="500"/>
-        </a:spcBef>
-        <a:buFont typeface="Arial" panose="020B0604020202020204" pitchFamily="34" charset="0"/>
-        <a:buChar char="•"/>
+      <a:lvl8pPr marL="3200400" algn="l" defTabSz="457200" rtl="0" eaLnBrk="1" latinLnBrk="0" hangingPunct="1">
         <a:defRPr sz="1800" kern="1200">
           <a:solidFill>
             <a:schemeClr val="tx1"/>
@@ -2833,110 +5984,7 @@
           <a:cs typeface="+mn-cs"/>
         </a:defRPr>
       </a:lvl8pPr>
-      <a:lvl9pPr marL="3886200" indent="-228600" algn="l" defTabSz="914400" rtl="0" eaLnBrk="1" latinLnBrk="0" hangingPunct="1">
-        <a:lnSpc>
-          <a:spcPct val="90000"/>
-        </a:lnSpc>
-        <a:spcBef>
-          <a:spcPts val="500"/>
-        </a:spcBef>
-        <a:buFont typeface="Arial" panose="020B0604020202020204" pitchFamily="34" charset="0"/>
-        <a:buChar char="•"/>
-        <a:defRPr sz="1800" kern="1200">
-          <a:solidFill>
-            <a:schemeClr val="tx1"/>
-          </a:solidFill>
-          <a:latin typeface="+mn-lt"/>
-          <a:ea typeface="+mn-ea"/>
-          <a:cs typeface="+mn-cs"/>
-        </a:defRPr>
-      </a:lvl9pPr>
-    </p:bodyStyle>
-    <p:otherStyle>
-      <a:defPPr>
-        <a:defRPr lang="en-US"/>
-      </a:defPPr>
-      <a:lvl1pPr marL="0" algn="l" defTabSz="914400" rtl="0" eaLnBrk="1" latinLnBrk="0" hangingPunct="1">
-        <a:defRPr sz="1800" kern="1200">
-          <a:solidFill>
-            <a:schemeClr val="tx1"/>
-          </a:solidFill>
-          <a:latin typeface="+mn-lt"/>
-          <a:ea typeface="+mn-ea"/>
-          <a:cs typeface="+mn-cs"/>
-        </a:defRPr>
-      </a:lvl1pPr>
-      <a:lvl2pPr marL="457200" algn="l" defTabSz="914400" rtl="0" eaLnBrk="1" latinLnBrk="0" hangingPunct="1">
-        <a:defRPr sz="1800" kern="1200">
-          <a:solidFill>
-            <a:schemeClr val="tx1"/>
-          </a:solidFill>
-          <a:latin typeface="+mn-lt"/>
-          <a:ea typeface="+mn-ea"/>
-          <a:cs typeface="+mn-cs"/>
-        </a:defRPr>
-      </a:lvl2pPr>
-      <a:lvl3pPr marL="914400" algn="l" defTabSz="914400" rtl="0" eaLnBrk="1" latinLnBrk="0" hangingPunct="1">
-        <a:defRPr sz="1800" kern="1200">
-          <a:solidFill>
-            <a:schemeClr val="tx1"/>
-          </a:solidFill>
-          <a:latin typeface="+mn-lt"/>
-          <a:ea typeface="+mn-ea"/>
-          <a:cs typeface="+mn-cs"/>
-        </a:defRPr>
-      </a:lvl3pPr>
-      <a:lvl4pPr marL="1371600" algn="l" defTabSz="914400" rtl="0" eaLnBrk="1" latinLnBrk="0" hangingPunct="1">
-        <a:defRPr sz="1800" kern="1200">
-          <a:solidFill>
-            <a:schemeClr val="tx1"/>
-          </a:solidFill>
-          <a:latin typeface="+mn-lt"/>
-          <a:ea typeface="+mn-ea"/>
-          <a:cs typeface="+mn-cs"/>
-        </a:defRPr>
-      </a:lvl4pPr>
-      <a:lvl5pPr marL="1828800" algn="l" defTabSz="914400" rtl="0" eaLnBrk="1" latinLnBrk="0" hangingPunct="1">
-        <a:defRPr sz="1800" kern="1200">
-          <a:solidFill>
-            <a:schemeClr val="tx1"/>
-          </a:solidFill>
-          <a:latin typeface="+mn-lt"/>
-          <a:ea typeface="+mn-ea"/>
-          <a:cs typeface="+mn-cs"/>
-        </a:defRPr>
-      </a:lvl5pPr>
-      <a:lvl6pPr marL="2286000" algn="l" defTabSz="914400" rtl="0" eaLnBrk="1" latinLnBrk="0" hangingPunct="1">
-        <a:defRPr sz="1800" kern="1200">
-          <a:solidFill>
-            <a:schemeClr val="tx1"/>
-          </a:solidFill>
-          <a:latin typeface="+mn-lt"/>
-          <a:ea typeface="+mn-ea"/>
-          <a:cs typeface="+mn-cs"/>
-        </a:defRPr>
-      </a:lvl6pPr>
-      <a:lvl7pPr marL="2743200" algn="l" defTabSz="914400" rtl="0" eaLnBrk="1" latinLnBrk="0" hangingPunct="1">
-        <a:defRPr sz="1800" kern="1200">
-          <a:solidFill>
-            <a:schemeClr val="tx1"/>
-          </a:solidFill>
-          <a:latin typeface="+mn-lt"/>
-          <a:ea typeface="+mn-ea"/>
-          <a:cs typeface="+mn-cs"/>
-        </a:defRPr>
-      </a:lvl7pPr>
-      <a:lvl8pPr marL="3200400" algn="l" defTabSz="914400" rtl="0" eaLnBrk="1" latinLnBrk="0" hangingPunct="1">
-        <a:defRPr sz="1800" kern="1200">
-          <a:solidFill>
-            <a:schemeClr val="tx1"/>
-          </a:solidFill>
-          <a:latin typeface="+mn-lt"/>
-          <a:ea typeface="+mn-ea"/>
-          <a:cs typeface="+mn-cs"/>
-        </a:defRPr>
-      </a:lvl8pPr>
-      <a:lvl9pPr marL="3657600" algn="l" defTabSz="914400" rtl="0" eaLnBrk="1" latinLnBrk="0" hangingPunct="1">
+      <a:lvl9pPr marL="3657600" algn="l" defTabSz="457200" rtl="0" eaLnBrk="1" latinLnBrk="0" hangingPunct="1">
         <a:defRPr sz="1800" kern="1200">
           <a:solidFill>
             <a:schemeClr val="tx1"/>
@@ -2984,10 +6032,14 @@
           <a:lstStyle/>
           <a:p>
             <a:r>
-              <a:rPr lang="en-US" dirty="0" smtClean="0"/>
+              <a:rPr lang="en-US" u="sng" dirty="0" smtClean="0">
+                <a:latin typeface="Arial Black" panose="020B0A04020102020204" pitchFamily="34" charset="0"/>
+              </a:rPr>
               <a:t>K.A.B</a:t>
             </a:r>
-            <a:endParaRPr lang="en-ZA" dirty="0"/>
+            <a:endParaRPr lang="en-ZA" u="sng" dirty="0">
+              <a:latin typeface="Arial Black" panose="020B0A04020102020204" pitchFamily="34" charset="0"/>
+            </a:endParaRPr>
           </a:p>
         </p:txBody>
       </p:sp>
@@ -3003,22 +6055,32 @@
         </p:nvSpPr>
         <p:spPr/>
         <p:txBody>
-          <a:bodyPr/>
-          <a:lstStyle/>
-          <a:p>
-            <a:r>
-              <a:rPr lang="en-US" dirty="0" smtClean="0"/>
+          <a:bodyPr>
+            <a:noAutofit/>
+          </a:bodyPr>
+          <a:lstStyle/>
+          <a:p>
+            <a:r>
+              <a:rPr lang="en-US" sz="3200" b="1" u="sng" dirty="0" smtClean="0">
+                <a:latin typeface="Arial Black" panose="020B0A04020102020204" pitchFamily="34" charset="0"/>
+              </a:rPr>
               <a:t>GROUP PRESENTATION on </a:t>
             </a:r>
             <a:r>
-              <a:rPr lang="en-US" dirty="0" err="1" smtClean="0"/>
+              <a:rPr lang="en-US" sz="3200" b="1" u="sng" dirty="0" err="1" smtClean="0">
+                <a:latin typeface="Arial Black" panose="020B0A04020102020204" pitchFamily="34" charset="0"/>
+              </a:rPr>
               <a:t>AgroShield</a:t>
             </a:r>
             <a:r>
-              <a:rPr lang="en-US" dirty="0" smtClean="0"/>
+              <a:rPr lang="en-US" sz="3200" b="1" u="sng" dirty="0" smtClean="0">
+                <a:latin typeface="Arial Black" panose="020B0A04020102020204" pitchFamily="34" charset="0"/>
+              </a:rPr>
               <a:t> Twin</a:t>
             </a:r>
-            <a:endParaRPr lang="en-ZA" dirty="0"/>
+            <a:endParaRPr lang="en-ZA" sz="3200" b="1" u="sng" dirty="0">
+              <a:latin typeface="Arial Black" panose="020B0A04020102020204" pitchFamily="34" charset="0"/>
+            </a:endParaRPr>
           </a:p>
         </p:txBody>
       </p:sp>
@@ -3068,10 +6130,14 @@
           <a:lstStyle/>
           <a:p>
             <a:r>
-              <a:rPr lang="en-US" dirty="0" smtClean="0"/>
-              <a:t>THE PROBLEM WE IDENTIFIED</a:t>
-            </a:r>
-            <a:endParaRPr lang="en-ZA" dirty="0"/>
+              <a:rPr lang="en-ZA" dirty="0" smtClean="0">
+                <a:latin typeface="Algerian" panose="04020705040A02060702" pitchFamily="82" charset="0"/>
+              </a:rPr>
+              <a:t>PROBLEMS</a:t>
+            </a:r>
+            <a:endParaRPr lang="en-ZA" dirty="0">
+              <a:latin typeface="Algerian" panose="04020705040A02060702" pitchFamily="82" charset="0"/>
+            </a:endParaRPr>
           </a:p>
         </p:txBody>
       </p:sp>
@@ -3088,33 +6154,72 @@
         <p:spPr/>
         <p:txBody>
           <a:bodyPr>
-            <a:normAutofit fontScale="85000" lnSpcReduction="20000"/>
+            <a:normAutofit/>
           </a:bodyPr>
           <a:lstStyle/>
           <a:p>
             <a:r>
-              <a:rPr lang="en-US" dirty="0" smtClean="0"/>
-              <a:t>Farmers face changing environmental conditions such as high temperatures and insufficient soil moisture. The challenge is that these conditions may not affect the entire farm equally. One area can be dry while another area still has enough moisture.</a:t>
-            </a:r>
-          </a:p>
-          <a:p>
-            <a:r>
-              <a:rPr lang="en-US" dirty="0" smtClean="0"/>
-              <a:t>The problem is that farmers are experiencing an issue when it comes to soil hydration and plant hydration It affects small scale and large scale farmers as all of them share the this similar stressor as areas with high elevation and which are far from rivers and dams tend to struggle when it comes to gathering water to water their crops.</a:t>
-            </a:r>
-          </a:p>
-          <a:p>
-            <a:r>
-              <a:rPr lang="en-US" dirty="0" smtClean="0"/>
-              <a:t>This is caused by the rapid raises of temperature and the lacking of rain causing droughts.</a:t>
-            </a:r>
-          </a:p>
-          <a:p>
-            <a:r>
-              <a:rPr lang="en-US" dirty="0" smtClean="0"/>
-              <a:t>This can be solved by creating a smart irrigation system where by the soil moisture is measured before hand by sensors and through the IOT to tell the farmers on when and how to water and hydrate the soil when needed</a:t>
-            </a:r>
-            <a:endParaRPr lang="en-ZA" dirty="0"/>
+              <a:rPr lang="en-US" dirty="0"/>
+              <a:t>- </a:t>
+            </a:r>
+            <a:r>
+              <a:rPr lang="en-US" b="1" dirty="0"/>
+              <a:t>Introduction - farmers are facing a problem when it comes to soil </a:t>
+            </a:r>
+            <a:r>
+              <a:rPr lang="en-US" b="1" dirty="0" smtClean="0"/>
+              <a:t>irrigation-</a:t>
+            </a:r>
+          </a:p>
+          <a:p>
+            <a:r>
+              <a:rPr lang="en-US" b="1" dirty="0" smtClean="0"/>
+              <a:t> </a:t>
+            </a:r>
+            <a:r>
+              <a:rPr lang="en-US" b="1" dirty="0"/>
+              <a:t>Were by they are unable to determine which area is stressed at a specific time- </a:t>
+            </a:r>
+            <a:endParaRPr lang="en-US" b="1" dirty="0" smtClean="0"/>
+          </a:p>
+          <a:p>
+            <a:r>
+              <a:rPr lang="en-US" b="1" dirty="0" smtClean="0"/>
+              <a:t>Leading </a:t>
+            </a:r>
+            <a:r>
+              <a:rPr lang="en-US" b="1" dirty="0"/>
+              <a:t>to them watering unnecessary areas and wasting </a:t>
+            </a:r>
+            <a:r>
+              <a:rPr lang="en-US" b="1" dirty="0" smtClean="0"/>
+              <a:t>resources-</a:t>
+            </a:r>
+          </a:p>
+          <a:p>
+            <a:r>
+              <a:rPr lang="en-US" b="1" dirty="0" smtClean="0"/>
+              <a:t> </a:t>
+            </a:r>
+            <a:r>
+              <a:rPr lang="en-US" b="1" dirty="0"/>
+              <a:t>With this action crops are given incorrect amounts of water leading to poor production, stock reduction and profit </a:t>
+            </a:r>
+            <a:r>
+              <a:rPr lang="en-US" b="1" dirty="0" smtClean="0"/>
+              <a:t>loss-</a:t>
+            </a:r>
+          </a:p>
+          <a:p>
+            <a:r>
+              <a:rPr lang="en-US" b="1" dirty="0" smtClean="0"/>
+              <a:t> </a:t>
+            </a:r>
+            <a:r>
+              <a:rPr lang="en-US" b="1" dirty="0"/>
+              <a:t>And which also can lead to poor food security</a:t>
+            </a:r>
+            <a:endParaRPr lang="en-ZA" b="1" dirty="0"/>
           </a:p>
         </p:txBody>
       </p:sp>
@@ -3164,10 +6269,14 @@
           <a:lstStyle/>
           <a:p>
             <a:r>
-              <a:rPr lang="en-US" dirty="0" smtClean="0"/>
-              <a:t>OUR SOLUTION</a:t>
-            </a:r>
-            <a:endParaRPr lang="en-ZA" dirty="0"/>
+              <a:rPr lang="en-US" b="1" u="sng" dirty="0" smtClean="0">
+                <a:latin typeface="Algerian" panose="04020705040A02060702" pitchFamily="82" charset="0"/>
+              </a:rPr>
+              <a:t>SOLUTION</a:t>
+            </a:r>
+            <a:endParaRPr lang="en-ZA" b="1" u="sng" dirty="0">
+              <a:latin typeface="Algerian" panose="04020705040A02060702" pitchFamily="82" charset="0"/>
+            </a:endParaRPr>
           </a:p>
         </p:txBody>
       </p:sp>
@@ -3189,22 +6298,46 @@
           <a:lstStyle/>
           <a:p>
             <a:r>
-              <a:rPr lang="en-US" dirty="0" smtClean="0"/>
-              <a:t>Our solution is designed to identify exactly which farming zone needs attention.</a:t>
-            </a:r>
-          </a:p>
-          <a:p>
-            <a:r>
-              <a:rPr lang="en-US" dirty="0" smtClean="0"/>
-              <a:t>When the system detects low soil moisture, it can automatically activate a relay and irrigation pump to provide water to the affected zone. When high temperatures are detected, it can activate an alarm.</a:t>
-            </a:r>
-          </a:p>
-          <a:p>
-            <a:r>
-              <a:rPr lang="en-US" dirty="0" smtClean="0"/>
-              <a:t>But our project goes further. We connect the physical farm to a 3D digital twin. The digital twin represents the different farm zones and displays their current conditions. If Zone 2 becomes too dry, for example, the digital twin highlights Zone 2 as stressed and shows that irrigation is active.</a:t>
-            </a:r>
-            <a:endParaRPr lang="en-ZA" dirty="0"/>
+              <a:rPr lang="en-US" b="1" dirty="0" smtClean="0">
+                <a:latin typeface="Arial Black" panose="020B0A04020102020204" pitchFamily="34" charset="0"/>
+              </a:rPr>
+              <a:t>THAT’S WHERE AGROSHIELD TWIN COMES IN</a:t>
+            </a:r>
+          </a:p>
+          <a:p>
+            <a:r>
+              <a:rPr lang="en-US" b="1" dirty="0" smtClean="0">
+                <a:latin typeface="Arial Black" panose="020B0A04020102020204" pitchFamily="34" charset="0"/>
+              </a:rPr>
+              <a:t>THE BEST SOLUTION EVERY FAMER  NEEDS</a:t>
+            </a:r>
+          </a:p>
+          <a:p>
+            <a:r>
+              <a:rPr lang="en-US" b="1" dirty="0" smtClean="0">
+                <a:latin typeface="Arial Black" panose="020B0A04020102020204" pitchFamily="34" charset="0"/>
+              </a:rPr>
+              <a:t>Me and my team KAB DECIDED TO DESIGN AN AUTO IRRIGATION DESIGN  FOR EVERY FARMER</a:t>
+            </a:r>
+          </a:p>
+          <a:p>
+            <a:r>
+              <a:rPr lang="en-US" b="1" dirty="0" smtClean="0">
+                <a:latin typeface="Arial Black" panose="020B0A04020102020204" pitchFamily="34" charset="0"/>
+              </a:rPr>
+              <a:t>IT AUTOMATICALY IRRIGATE THE SPESIFIC REGION WHERE WATER IS NEEDED FOR CROPS and shuts WHEN its enough </a:t>
+            </a:r>
+          </a:p>
+          <a:p>
+            <a:r>
+              <a:rPr lang="en-US" b="1" dirty="0">
+                <a:latin typeface="Arial Black" panose="020B0A04020102020204" pitchFamily="34" charset="0"/>
+              </a:rPr>
+              <a:t> </a:t>
+            </a:r>
+            <a:endParaRPr lang="en-US" b="1" dirty="0" smtClean="0">
+              <a:latin typeface="Arial Black" panose="020B0A04020102020204" pitchFamily="34" charset="0"/>
+            </a:endParaRPr>
           </a:p>
         </p:txBody>
       </p:sp>
@@ -3254,10 +6387,14 @@
           <a:lstStyle/>
           <a:p>
             <a:r>
-              <a:rPr lang="en-US" dirty="0" smtClean="0"/>
-              <a:t>How it works</a:t>
-            </a:r>
-            <a:endParaRPr lang="en-ZA" dirty="0"/>
+              <a:rPr lang="en-US" b="1" dirty="0" smtClean="0">
+                <a:latin typeface="Algerian" panose="04020705040A02060702" pitchFamily="82" charset="0"/>
+              </a:rPr>
+              <a:t>DEMONSTRATION</a:t>
+            </a:r>
+            <a:endParaRPr lang="en-ZA" b="1" dirty="0">
+              <a:latin typeface="Algerian" panose="04020705040A02060702" pitchFamily="82" charset="0"/>
+            </a:endParaRPr>
           </a:p>
         </p:txBody>
       </p:sp>
@@ -3277,24 +6414,74 @@
           <a:lstStyle/>
           <a:p>
             <a:r>
-              <a:rPr lang="en-US" dirty="0" smtClean="0"/>
-              <a:t>The system uses an array of sensors to continuously collect different types of data like soil moisture, temperature and humidity and it also uses an ultrasonic sensor to measure water levels in a tank using distance.</a:t>
-            </a:r>
-          </a:p>
-          <a:p>
-            <a:r>
-              <a:rPr lang="en-US" dirty="0" smtClean="0"/>
-              <a:t>The whole system will be controlled locally by a ESP32.</a:t>
-            </a:r>
-          </a:p>
-          <a:p>
-            <a:r>
-              <a:rPr lang="en-US" dirty="0" smtClean="0"/>
-              <a:t>With the BLYNK app you can also view and control the system remotely</a:t>
-            </a:r>
-          </a:p>
-          <a:p>
-            <a:endParaRPr lang="en-ZA" dirty="0"/>
+              <a:rPr lang="en-US" b="1" dirty="0">
+                <a:latin typeface="Arial Black" panose="020B0A04020102020204" pitchFamily="34" charset="0"/>
+              </a:rPr>
+              <a:t>- Our prototype acts on this four aspects </a:t>
+            </a:r>
+            <a:r>
+              <a:rPr lang="en-US" b="1" dirty="0" smtClean="0">
+                <a:latin typeface="Arial Black" panose="020B0A04020102020204" pitchFamily="34" charset="0"/>
+              </a:rPr>
+              <a:t>– </a:t>
+            </a:r>
+          </a:p>
+          <a:p>
+            <a:r>
+              <a:rPr lang="en-US" b="1" dirty="0" smtClean="0">
+                <a:latin typeface="Arial Black" panose="020B0A04020102020204" pitchFamily="34" charset="0"/>
+              </a:rPr>
+              <a:t>SENSE </a:t>
+            </a:r>
+            <a:r>
+              <a:rPr lang="en-US" b="1" dirty="0">
+                <a:latin typeface="Arial Black" panose="020B0A04020102020204" pitchFamily="34" charset="0"/>
+              </a:rPr>
+              <a:t>- DECIDE - ACT </a:t>
+            </a:r>
+            <a:r>
+              <a:rPr lang="en-US" b="1" dirty="0" smtClean="0">
+                <a:latin typeface="Arial Black" panose="020B0A04020102020204" pitchFamily="34" charset="0"/>
+              </a:rPr>
+              <a:t>– PROJECT</a:t>
+            </a:r>
+          </a:p>
+          <a:p>
+            <a:r>
+              <a:rPr lang="en-US" b="1" dirty="0" smtClean="0">
+                <a:latin typeface="Arial Black" panose="020B0A04020102020204" pitchFamily="34" charset="0"/>
+              </a:rPr>
+              <a:t>- </a:t>
+            </a:r>
+            <a:r>
+              <a:rPr lang="en-US" b="1" dirty="0">
+                <a:latin typeface="Arial Black" panose="020B0A04020102020204" pitchFamily="34" charset="0"/>
+              </a:rPr>
+              <a:t>Were we used sensors that detect soil moisture, temperature and </a:t>
+            </a:r>
+            <a:r>
+              <a:rPr lang="en-US" b="1" dirty="0" smtClean="0">
+                <a:latin typeface="Arial Black" panose="020B0A04020102020204" pitchFamily="34" charset="0"/>
+              </a:rPr>
+              <a:t>humidity-</a:t>
+            </a:r>
+          </a:p>
+          <a:p>
+            <a:r>
+              <a:rPr lang="en-US" b="1" dirty="0" smtClean="0">
+                <a:latin typeface="Arial Black" panose="020B0A04020102020204" pitchFamily="34" charset="0"/>
+              </a:rPr>
+              <a:t> </a:t>
+            </a:r>
+            <a:r>
+              <a:rPr lang="en-US" b="1" dirty="0">
+                <a:latin typeface="Arial Black" panose="020B0A04020102020204" pitchFamily="34" charset="0"/>
+              </a:rPr>
+              <a:t>And also the ultrasonic sensor that measures the amount and remainder in that storage tank</a:t>
+            </a:r>
+            <a:endParaRPr lang="en-ZA" b="1" dirty="0">
+              <a:latin typeface="Arial Black" panose="020B0A04020102020204" pitchFamily="34" charset="0"/>
+            </a:endParaRPr>
           </a:p>
         </p:txBody>
       </p:sp>
@@ -3335,7 +6522,7 @@
             <a:spLocks noGrp="1"/>
           </p:cNvSpPr>
           <p:nvPr>
-            <p:ph type="title"/>
+            <p:ph type="ctrTitle"/>
           </p:nvPr>
         </p:nvSpPr>
         <p:spPr/>
@@ -3343,84 +6530,35 @@
           <a:bodyPr/>
           <a:lstStyle/>
           <a:p>
-            <a:r>
-              <a:rPr lang="en-US" dirty="0" smtClean="0"/>
-              <a:t>Our progress</a:t>
-            </a:r>
-            <a:endParaRPr lang="en-ZA" dirty="0"/>
-          </a:p>
-        </p:txBody>
-      </p:sp>
-      <p:sp>
-        <p:nvSpPr>
-          <p:cNvPr id="3" name="Content Placeholder 2"/>
-          <p:cNvSpPr>
-            <a:spLocks noGrp="1"/>
-          </p:cNvSpPr>
-          <p:nvPr>
-            <p:ph sz="half" idx="1"/>
-          </p:nvPr>
-        </p:nvSpPr>
-        <p:spPr/>
-        <p:txBody>
-          <a:bodyPr/>
-          <a:lstStyle/>
-          <a:p>
-            <a:r>
-              <a:rPr lang="en-US" dirty="0" smtClean="0"/>
-              <a:t>We’ve managed to assemble a partial prototype using an esp32 after prototyping with an Arduino </a:t>
-            </a:r>
-            <a:r>
-              <a:rPr lang="en-US" dirty="0" err="1" smtClean="0"/>
-              <a:t>uno</a:t>
-            </a:r>
-            <a:r>
-              <a:rPr lang="en-US" dirty="0" smtClean="0"/>
-              <a:t>. </a:t>
-            </a:r>
-          </a:p>
-          <a:p>
-            <a:r>
-              <a:rPr lang="en-US" dirty="0" smtClean="0"/>
-              <a:t>We have also finished the code for the final circuit of the system</a:t>
-            </a:r>
-            <a:endParaRPr lang="en-ZA" dirty="0"/>
-          </a:p>
-        </p:txBody>
-      </p:sp>
-      <p:pic>
-        <p:nvPicPr>
-          <p:cNvPr id="7" name="Content Placeholder 6"/>
-          <p:cNvPicPr>
-            <a:picLocks noGrp="1" noChangeAspect="1"/>
-          </p:cNvPicPr>
-          <p:nvPr>
-            <p:ph sz="half" idx="2"/>
-          </p:nvPr>
-        </p:nvPicPr>
-        <p:blipFill>
-          <a:blip r:embed="rId2" cstate="print">
-            <a:extLst>
-              <a:ext uri="{28A0092B-C50C-407E-A947-70E740481C1C}">
-                <a14:useLocalDpi xmlns:a14="http://schemas.microsoft.com/office/drawing/2010/main" val="0"/>
-              </a:ext>
-            </a:extLst>
-          </a:blip>
-          <a:stretch>
-            <a:fillRect/>
-          </a:stretch>
-        </p:blipFill>
-        <p:spPr>
-          <a:xfrm>
-            <a:off x="7758452" y="1825625"/>
-            <a:ext cx="3731583" cy="4351338"/>
-          </a:xfrm>
-        </p:spPr>
-      </p:pic>
+            <a:endParaRPr lang="en-US"/>
+          </a:p>
+        </p:txBody>
+      </p:sp>
+      <p:sp>
+        <p:nvSpPr>
+          <p:cNvPr id="3" name="Subtitle 2"/>
+          <p:cNvSpPr>
+            <a:spLocks noGrp="1"/>
+          </p:cNvSpPr>
+          <p:nvPr>
+            <p:ph type="subTitle" idx="1"/>
+          </p:nvPr>
+        </p:nvSpPr>
+        <p:spPr/>
+        <p:txBody>
+          <a:bodyPr>
+            <a:normAutofit/>
+          </a:bodyPr>
+          <a:lstStyle/>
+          <a:p>
+            <a:endParaRPr lang="en-US" dirty="0"/>
+          </a:p>
+        </p:txBody>
+      </p:sp>
     </p:spTree>
     <p:extLst>
       <p:ext uri="{BB962C8B-B14F-4D97-AF65-F5344CB8AC3E}">
-        <p14:creationId xmlns:p14="http://schemas.microsoft.com/office/powerpoint/2010/main" val="2646822735"/>
+        <p14:creationId xmlns:p14="http://schemas.microsoft.com/office/powerpoint/2010/main" val="41129146"/>
       </p:ext>
     </p:extLst>
   </p:cSld>
@@ -3431,9 +6569,9 @@
 </file>
 
 <file path=ppt/theme/theme1.xml><?xml version="1.0" encoding="utf-8"?>
-<a:theme xmlns:a="http://schemas.openxmlformats.org/drawingml/2006/main" name="Office Theme">
+<a:theme xmlns:a="http://schemas.openxmlformats.org/drawingml/2006/main" name="Ion">
   <a:themeElements>
-    <a:clrScheme name="Office">
+    <a:clrScheme name="Ion">
       <a:dk1>
         <a:sysClr val="windowText" lastClr="000000"/>
       </a:dk1>
@@ -3441,44 +6579,44 @@
         <a:sysClr val="window" lastClr="FFFFFF"/>
       </a:lt1>
       <a:dk2>
-        <a:srgbClr val="44546A"/>
+        <a:srgbClr val="0E5580"/>
       </a:dk2>
       <a:lt2>
-        <a:srgbClr val="E7E6E6"/>
+        <a:srgbClr val="EBEBEB"/>
       </a:lt2>
       <a:accent1>
-        <a:srgbClr val="5B9BD5"/>
+        <a:srgbClr val="ACD433"/>
       </a:accent1>
       <a:accent2>
-        <a:srgbClr val="ED7D31"/>
+        <a:srgbClr val="E6C133"/>
       </a:accent2>
       <a:accent3>
-        <a:srgbClr val="A5A5A5"/>
+        <a:srgbClr val="EF7A24"/>
       </a:accent3>
       <a:accent4>
-        <a:srgbClr val="FFC000"/>
+        <a:srgbClr val="5AA0F5"/>
       </a:accent4>
       <a:accent5>
-        <a:srgbClr val="4472C4"/>
+        <a:srgbClr val="75CEEC"/>
       </a:accent5>
       <a:accent6>
-        <a:srgbClr val="70AD47"/>
+        <a:srgbClr val="65D6A0"/>
       </a:accent6>
       <a:hlink>
-        <a:srgbClr val="0563C1"/>
+        <a:srgbClr val="C4E46E"/>
       </a:hlink>
       <a:folHlink>
-        <a:srgbClr val="954F72"/>
+        <a:srgbClr val="BDE0FB"/>
       </a:folHlink>
     </a:clrScheme>
-    <a:fontScheme name="Office">
+    <a:fontScheme name="Ion">
       <a:majorFont>
-        <a:latin typeface="Calibri Light" panose="020F0302020204030204"/>
+        <a:latin typeface="Century Gothic" panose="020B0502020202020204"/>
         <a:ea typeface=""/>
         <a:cs typeface=""/>
-        <a:font script="Jpan" typeface="游ゴシック Light"/>
+        <a:font script="Jpan" typeface="メイリオ"/>
         <a:font script="Hang" typeface="맑은 고딕"/>
-        <a:font script="Hans" typeface="等线 Light"/>
+        <a:font script="Hans" typeface="宋体"/>
         <a:font script="Hant" typeface="新細明體"/>
         <a:font script="Arab" typeface="Times New Roman"/>
         <a:font script="Hebr" typeface="Times New Roman"/>
@@ -3508,12 +6646,12 @@
         <a:font script="Geor" typeface="Sylfaen"/>
       </a:majorFont>
       <a:minorFont>
-        <a:latin typeface="Calibri" panose="020F0502020204030204"/>
+        <a:latin typeface="Century Gothic" panose="020B0502020202020204"/>
         <a:ea typeface=""/>
         <a:cs typeface=""/>
-        <a:font script="Jpan" typeface="游ゴシック"/>
+        <a:font script="Jpan" typeface="メイリオ"/>
         <a:font script="Hang" typeface="맑은 고딕"/>
-        <a:font script="Hans" typeface="等线"/>
+        <a:font script="Hans" typeface="宋体"/>
         <a:font script="Hant" typeface="新細明體"/>
         <a:font script="Arab" typeface="Arial"/>
         <a:font script="Hebr" typeface="Arial"/>
@@ -3543,7 +6681,7 @@
         <a:font script="Geor" typeface="Sylfaen"/>
       </a:minorFont>
     </a:fontScheme>
-    <a:fmtScheme name="Office">
+    <a:fmtScheme name="Ion">
       <a:fillStyleLst>
         <a:solidFill>
           <a:schemeClr val="phClr"/>
@@ -3552,23 +6690,15 @@
           <a:gsLst>
             <a:gs pos="0">
               <a:schemeClr val="phClr">
-                <a:lumMod val="110000"/>
-                <a:satMod val="105000"/>
-                <a:tint val="67000"/>
-              </a:schemeClr>
-            </a:gs>
-            <a:gs pos="50000">
-              <a:schemeClr val="phClr">
-                <a:lumMod val="105000"/>
-                <a:satMod val="103000"/>
-                <a:tint val="73000"/>
+                <a:tint val="64000"/>
+                <a:lumMod val="118000"/>
               </a:schemeClr>
             </a:gs>
             <a:gs pos="100000">
               <a:schemeClr val="phClr">
-                <a:lumMod val="105000"/>
-                <a:satMod val="109000"/>
-                <a:tint val="81000"/>
+                <a:tint val="92000"/>
+                <a:alpha val="100000"/>
+                <a:lumMod val="110000"/>
               </a:schemeClr>
             </a:gs>
           </a:gsLst>
@@ -3578,23 +6708,14 @@
           <a:gsLst>
             <a:gs pos="0">
               <a:schemeClr val="phClr">
-                <a:satMod val="103000"/>
-                <a:lumMod val="102000"/>
-                <a:tint val="94000"/>
-              </a:schemeClr>
-            </a:gs>
-            <a:gs pos="50000">
-              <a:schemeClr val="phClr">
-                <a:satMod val="110000"/>
-                <a:lumMod val="100000"/>
-                <a:shade val="100000"/>
+                <a:tint val="98000"/>
+                <a:lumMod val="114000"/>
               </a:schemeClr>
             </a:gs>
             <a:gs pos="100000">
               <a:schemeClr val="phClr">
-                <a:lumMod val="99000"/>
-                <a:satMod val="120000"/>
-                <a:shade val="78000"/>
+                <a:shade val="90000"/>
+                <a:lumMod val="84000"/>
               </a:schemeClr>
             </a:gs>
           </a:gsLst>
@@ -3602,26 +6723,23 @@
         </a:gradFill>
       </a:fillStyleLst>
       <a:lnStyleLst>
-        <a:ln w="6350" cap="flat" cmpd="sng" algn="ctr">
+        <a:ln w="9525" cap="rnd" cmpd="sng" algn="ctr">
           <a:solidFill>
             <a:schemeClr val="phClr"/>
           </a:solidFill>
           <a:prstDash val="solid"/>
-          <a:miter lim="800000"/>
         </a:ln>
-        <a:ln w="12700" cap="flat" cmpd="sng" algn="ctr">
+        <a:ln w="19050" cap="rnd" cmpd="sng" algn="ctr">
           <a:solidFill>
             <a:schemeClr val="phClr"/>
           </a:solidFill>
           <a:prstDash val="solid"/>
-          <a:miter lim="800000"/>
         </a:ln>
-        <a:ln w="19050" cap="flat" cmpd="sng" algn="ctr">
+        <a:ln w="28575" cap="rnd" cmpd="sng" algn="ctr">
           <a:solidFill>
             <a:schemeClr val="phClr"/>
           </a:solidFill>
           <a:prstDash val="solid"/>
-          <a:miter lim="800000"/>
         </a:ln>
       </a:lnStyleLst>
       <a:effectStyleLst>
@@ -3629,55 +6747,79 @@
           <a:effectLst/>
         </a:effectStyle>
         <a:effectStyle>
-          <a:effectLst/>
+          <a:effectLst>
+            <a:outerShdw blurRad="38100" dist="25400" dir="5400000" rotWithShape="0">
+              <a:srgbClr val="000000">
+                <a:alpha val="45000"/>
+              </a:srgbClr>
+            </a:outerShdw>
+          </a:effectLst>
         </a:effectStyle>
         <a:effectStyle>
           <a:effectLst>
-            <a:outerShdw blurRad="57150" dist="19050" dir="5400000" algn="ctr" rotWithShape="0">
+            <a:outerShdw blurRad="63500" dist="38100" dir="5400000" rotWithShape="0">
               <a:srgbClr val="000000">
-                <a:alpha val="63000"/>
+                <a:alpha val="60000"/>
               </a:srgbClr>
             </a:outerShdw>
           </a:effectLst>
+          <a:scene3d>
+            <a:camera prst="orthographicFront">
+              <a:rot lat="0" lon="0" rev="0"/>
+            </a:camera>
+            <a:lightRig rig="threePt" dir="tl"/>
+          </a:scene3d>
+          <a:sp3d prstMaterial="plastic">
+            <a:bevelT w="0" h="0"/>
+          </a:sp3d>
         </a:effectStyle>
       </a:effectStyleLst>
       <a:bgFillStyleLst>
         <a:solidFill>
           <a:schemeClr val="phClr"/>
         </a:solidFill>
-        <a:solidFill>
-          <a:schemeClr val="phClr">
-            <a:tint val="95000"/>
-            <a:satMod val="170000"/>
-          </a:schemeClr>
-        </a:solidFill>
         <a:gradFill rotWithShape="1">
           <a:gsLst>
             <a:gs pos="0">
               <a:schemeClr val="phClr">
-                <a:tint val="93000"/>
-                <a:satMod val="150000"/>
-                <a:shade val="98000"/>
-                <a:lumMod val="102000"/>
-              </a:schemeClr>
-            </a:gs>
-            <a:gs pos="50000">
-              <a:schemeClr val="phClr">
-                <a:tint val="98000"/>
-                <a:satMod val="130000"/>
-                <a:shade val="90000"/>
-                <a:lumMod val="103000"/>
+                <a:tint val="92000"/>
+                <a:hueMod val="96000"/>
+                <a:satMod val="128000"/>
+                <a:lumMod val="114000"/>
               </a:schemeClr>
             </a:gs>
             <a:gs pos="100000">
               <a:schemeClr val="phClr">
-                <a:shade val="63000"/>
-                <a:satMod val="120000"/>
+                <a:shade val="62000"/>
+                <a:hueMod val="100000"/>
+                <a:satMod val="134000"/>
+                <a:lumMod val="56000"/>
               </a:schemeClr>
             </a:gs>
           </a:gsLst>
-          <a:lin ang="5400000" scaled="0"/>
+          <a:path path="circle">
+            <a:fillToRect l="45000" t="65000" r="125000" b="100000"/>
+          </a:path>
         </a:gradFill>
+        <a:blipFill rotWithShape="1">
+          <a:blip xmlns:r="http://schemas.openxmlformats.org/officeDocument/2006/relationships" r:embed="rId1">
+            <a:duotone>
+              <a:schemeClr val="phClr">
+                <a:shade val="62000"/>
+                <a:hueMod val="108000"/>
+                <a:satMod val="164000"/>
+                <a:lumMod val="69000"/>
+              </a:schemeClr>
+              <a:schemeClr val="phClr">
+                <a:tint val="96000"/>
+                <a:hueMod val="90000"/>
+                <a:satMod val="130000"/>
+                <a:lumMod val="134000"/>
+              </a:schemeClr>
+            </a:duotone>
+          </a:blip>
+          <a:stretch/>
+        </a:blipFill>
       </a:bgFillStyleLst>
     </a:fmtScheme>
   </a:themeElements>
@@ -3685,7 +6827,7 @@
   <a:extraClrSchemeLst/>
   <a:extLst>
     <a:ext uri="{05A4C25C-085E-4340-85A3-A5531E510DB2}">
-      <thm15:themeFamily xmlns:thm15="http://schemas.microsoft.com/office/thememl/2012/main" name="Office Theme" id="{62F939B6-93AF-4DB8-9C6B-D6C7DFDC589F}" vid="{4A3C46E8-61CC-4603-A589-7422A47A8E4A}"/>
+      <thm15:themeFamily xmlns:thm15="http://schemas.microsoft.com/office/thememl/2012/main" name="Ion" id="{B8441ADB-2E43-4AF7-B97A-BD870242C6A8}" vid="{BACC050B-8757-4460-95D8-E37B46A6B421}"/>
     </a:ext>
   </a:extLst>
 </a:theme>
